--- a/slides/xpugen_operator_agent.pptx
+++ b/slides/xpugen_operator_agent.pptx
@@ -515,7 +515,7 @@
                 <a:ea typeface="Microsoft YaHei"/>
                 <a:cs typeface="Microsoft YaHei"/>
               </a:rPr>
-              <a:t>【附页 · xpugen · 约 110 秒（1:50）】</a:t>
+              <a:t>【附页 · xpugen · 约 120 秒（2:00）】</a:t>
             </a:r>
           </a:p>
           <a:p>
@@ -533,7 +533,7 @@
                 <a:ea typeface="Microsoft YaHei"/>
                 <a:cs typeface="Microsoft YaHei"/>
               </a:rPr>
-              <a:t>这一页是另一个仓库 xpugen：面向国产 GPU 的算子生成 Agent。闭环是 LLM 生成、编译、和 golden 对齐数值、测延迟，再把结构化反馈喂回去迭代。它生成的是 M100 的 SDNN4 内核，不是 CUDA；CUDA、Triton、torch 只当算法参考和基线。</a:t>
+              <a:t>这一页是另一个仓库 xpugen：给国产 GPU 写算子的 Agent。闭环是 LLM 生成、编译、和 golden 对数值、测延迟，再把结构化的反馈喂回去改下一轮，最多八轮。它生成的是 M100 的 SDNN4 内核，不是 CUDA；CUDA、Triton、torch 只当算法参考和基线。</a:t>
             </a:r>
           </a:p>
           <a:p>
@@ -551,7 +551,7 @@
                 <a:ea typeface="Microsoft YaHei"/>
                 <a:cs typeface="Microsoft YaHei"/>
               </a:rPr>
-              <a:t>评测是分级放行的：先编译，过了精度门才测性能。入口有两条：从需求出发，或者从现有实现反推规格，第 0 轮直接拿它当基线，后面在它上面改。</a:t>
+              <a:t>评测是分级放行的：先编译，过了精度这一关才测性能。入口有两条：从一句需求开始，或者从现有实现反推规格，第 0 轮直接拿它当基线，后面在它上面改。</a:t>
             </a:r>
           </a:p>
           <a:p>
@@ -569,7 +569,7 @@
                 <a:ea typeface="Microsoft YaHei"/>
                 <a:cs typeface="Microsoft YaHei"/>
               </a:rPr>
-              <a:t>架构上最重要的不变量是硬件解耦：agent 和 harness 不碰任何硬件库，只依赖四个抽象接口，backend 是唯一的耦合层。换一款芯片，只要实现这四个接口、再填一张硬件卡片，循环本身零改动。现在有三个后端：mock 在 CPU 上用纯 PyTorch 跑通全闭环，m100 是真机，p800 还是占位。</a:t>
+              <a:t>架构上最重要的一条是硬件解耦：生成和评测这套流程完全不碰硬件，只认四个接口——编译、运行、采性能、算理论上限。换一款芯片，只要照这四个接口写一个后端、再填一张硬件说明卡，主流程一行不改。现在没有硬件也能在 CPU 上跑通整条闭环，M100 真机已经接上，P800 还没接。</a:t>
             </a:r>
           </a:p>
           <a:p>
@@ -587,7 +587,7 @@
                 <a:ea typeface="Microsoft YaHei"/>
                 <a:cs typeface="Microsoft YaHei"/>
               </a:rPr>
-              <a:t>两条纪律是防止自己骗自己：精度参考只用 CPU 实现，精度门永远先于性能门；机制看模拟器，收益必须在真机的生产 shape 上测，不一致以真机为准。</a:t>
+              <a:t>两条纪律是防止自己骗自己：精度参考只用 CPU 实现，绝不拿 CUDA 当标准，精度不过关就不看性能；模拟器只用来看清改动动了哪一块，收益一律以真机、生产形状的实测为准，两边对不上听真机的。</a:t>
             </a:r>
           </a:p>
           <a:p>
@@ -605,7 +605,7 @@
                 <a:ea typeface="Microsoft YaHei"/>
                 <a:cs typeface="Microsoft YaHei"/>
               </a:rPr>
-              <a:t>这些规矩都是机器门强制的，不靠人肉 review：每轮的 before、after、判词写不进去，这一轮就算失败。</a:t>
+              <a:t>这些规矩不是靠人盯，是写死在流程里的：每轮改了什么、前后数据、结论，写不进去这一轮就算失败。</a:t>
             </a:r>
           </a:p>
         </p:txBody>
@@ -3849,7 +3849,7 @@
                 <a:ea typeface="Microsoft YaHei"/>
                 <a:cs typeface="Microsoft YaHei"/>
               </a:rPr>
-              <a:t>LLM 按硬件卡片写内核</a:t>
+              <a:t>LLM 照硬件说明卡写内核</a:t>
             </a:r>
           </a:p>
         </p:txBody>
@@ -3951,7 +3951,7 @@
                 <a:ea typeface="Microsoft YaHei"/>
                 <a:cs typeface="Microsoft YaHei"/>
               </a:rPr>
-              <a:t>编译 + 起 app 冒烟</a:t>
+              <a:t>编译并拉起程序</a:t>
             </a:r>
           </a:p>
         </p:txBody>
@@ -4075,7 +4075,7 @@
                 <a:ea typeface="Microsoft YaHei"/>
                 <a:cs typeface="Microsoft YaHei"/>
               </a:rPr>
-              <a:t>多 shape × dtype 对数值</a:t>
+              <a:t>多种形状、精度逐一对数值</a:t>
             </a:r>
           </a:p>
         </p:txBody>
@@ -4199,7 +4199,7 @@
                 <a:ea typeface="Microsoft YaHei"/>
                 <a:cs typeface="Microsoft YaHei"/>
               </a:rPr>
-              <a:t>中位延迟 + roofline 上界</a:t>
+              <a:t>取中位延迟，比理论上限</a:t>
             </a:r>
           </a:p>
         </p:txBody>
@@ -4323,7 +4323,7 @@
                 <a:ea typeface="Microsoft YaHei"/>
                 <a:cs typeface="Microsoft YaHei"/>
               </a:rPr>
-              <a:t>reward 打分 + 机制证据</a:t>
+              <a:t>打分，并指出慢在哪</a:t>
             </a:r>
           </a:p>
         </p:txBody>
@@ -4409,7 +4409,7 @@
         <p:spPr>
           <a:xfrm>
             <a:off x="1734891" y="3374136"/>
-            <a:ext cx="4754880" cy="274320"/>
+            <a:ext cx="4114800" cy="274320"/>
           </a:xfrm>
           <a:prstGeom prst="rect">
             <a:avLst/>
@@ -4442,7 +4442,7 @@
                 <a:ea typeface="Microsoft YaHei"/>
                 <a:cs typeface="Microsoft YaHei"/>
               </a:rPr>
-              <a:t>每轮落盘 before / after / 判词；最多 8 轮</a:t>
+              <a:t>每轮改了什么、前后数据、结论都要落盘，写不进去这轮就算失败</a:t>
             </a:r>
           </a:p>
         </p:txBody>
@@ -4489,7 +4489,7 @@
                 <a:ea typeface="Microsoft YaHei"/>
                 <a:cs typeface="Microsoft YaHei"/>
               </a:rPr>
-              <a:t>入口：从需求出发，或从现有实现反推规格、第 0 轮当基线</a:t>
+              <a:t>入口：从一句需求开始，或从现有实现反推规格、第 0 轮当基线</a:t>
             </a:r>
           </a:p>
         </p:txBody>
@@ -4565,7 +4565,7 @@
                 <a:ea typeface="Microsoft YaHei"/>
                 <a:cs typeface="Microsoft YaHei"/>
               </a:rPr>
-              <a:t>硬件解耦 · 唯一的架构不变量</a:t>
+              <a:t>硬件解耦 · 换一款芯片只动一层</a:t>
             </a:r>
           </a:p>
         </p:txBody>
@@ -4600,7 +4600,7 @@
                 <a:spcPts val="0"/>
               </a:spcBef>
               <a:spcAft>
-                <a:spcPts val="400"/>
+                <a:spcPts val="200"/>
               </a:spcAft>
               <a:buClr>
                 <a:srgbClr val="C0612C"/>
@@ -4617,7 +4617,31 @@
                 <a:ea typeface="Microsoft YaHei"/>
                 <a:cs typeface="Microsoft YaHei"/>
               </a:rPr>
-              <a:t>agent / harness 硬件无关，不 import 任何硬件库</a:t>
+              <a:t>生成和评测完全不碰硬件，只认四个接口</a:t>
+            </a:r>
+          </a:p>
+          <a:p>
+            <a:pPr algn="l" latinLnBrk="0">
+              <a:lnSpc>
+                <a:spcPct val="100000"/>
+              </a:lnSpc>
+              <a:spcBef>
+                <a:spcPts val="0"/>
+              </a:spcBef>
+              <a:spcAft>
+                <a:spcPts val="500"/>
+              </a:spcAft>
+            </a:pPr>
+            <a:r>
+              <a:rPr sz="1050" b="0">
+                <a:solidFill>
+                  <a:srgbClr val="66727F"/>
+                </a:solidFill>
+                <a:latin typeface="Microsoft YaHei"/>
+                <a:ea typeface="Microsoft YaHei"/>
+                <a:cs typeface="Microsoft YaHei"/>
+              </a:rPr>
+              <a:t>　编译、运行、采性能、算理论上限（roofline）</a:t>
             </a:r>
           </a:p>
           <a:p>
@@ -4629,7 +4653,7 @@
                 <a:spcPts val="0"/>
               </a:spcBef>
               <a:spcAft>
-                <a:spcPts val="400"/>
+                <a:spcPts val="0"/>
               </a:spcAft>
               <a:buClr>
                 <a:srgbClr val="C0612C"/>
@@ -4646,36 +4670,7 @@
                 <a:ea typeface="Microsoft YaHei"/>
                 <a:cs typeface="Microsoft YaHei"/>
               </a:rPr>
-              <a:t>只依赖四个抽象接口：Compiler、Runtime、Profiler、Roofline</a:t>
-            </a:r>
-          </a:p>
-          <a:p>
-            <a:pPr algn="l" latinLnBrk="0" marL="146304" indent="-146304">
-              <a:lnSpc>
-                <a:spcPct val="100000"/>
-              </a:lnSpc>
-              <a:spcBef>
-                <a:spcPts val="0"/>
-              </a:spcBef>
-              <a:spcAft>
-                <a:spcPts val="400"/>
-              </a:spcAft>
-              <a:buClr>
-                <a:srgbClr val="C0612C"/>
-              </a:buClr>
-              <a:buFont typeface="Arial"/>
-              <a:buChar char="•"/>
-            </a:pPr>
-            <a:r>
-              <a:rPr sz="1100" b="0">
-                <a:solidFill>
-                  <a:srgbClr val="35424F"/>
-                </a:solidFill>
-                <a:latin typeface="Microsoft YaHei"/>
-                <a:ea typeface="Microsoft YaHei"/>
-                <a:cs typeface="Microsoft YaHei"/>
-              </a:rPr>
-              <a:t>backend/ 是唯一耦合层，换一款芯片循环零改动</a:t>
+              <a:t>换芯片 = 照这四个接口写一个后端 + 填一张硬件说明卡</a:t>
             </a:r>
           </a:p>
         </p:txBody>
@@ -4784,7 +4779,7 @@
                 <a:ea typeface="Microsoft YaHei"/>
                 <a:cs typeface="Microsoft YaHei"/>
               </a:rPr>
-              <a:t>mock：无硬件也能跑通闭环</a:t>
+              <a:t>没有硬件也能跑通整条闭环</a:t>
             </a:r>
           </a:p>
         </p:txBody>
@@ -4798,7 +4793,7 @@
         <p:spPr>
           <a:xfrm>
             <a:off x="3182112" y="5047488"/>
-            <a:ext cx="1737360" cy="274320"/>
+            <a:ext cx="1417320" cy="274320"/>
           </a:xfrm>
           <a:prstGeom prst="roundRect">
             <a:avLst>
@@ -4860,7 +4855,7 @@
         <p:spPr>
           <a:xfrm>
             <a:off x="3456432" y="5047488"/>
-            <a:ext cx="1444751" cy="274320"/>
+            <a:ext cx="1124712" cy="274320"/>
           </a:xfrm>
           <a:prstGeom prst="rect">
             <a:avLst/>
@@ -4893,14 +4888,123 @@
                 <a:ea typeface="Microsoft YaHei"/>
                 <a:cs typeface="Microsoft YaHei"/>
               </a:rPr>
-              <a:t>m100：真机 SDNN4</a:t>
-            </a:r>
-          </a:p>
-        </p:txBody>
-      </p:sp>
-      <p:sp>
-        <p:nvSpPr>
-          <p:cNvPr id="26" name="Rectangle 25"/>
+              <a:t>M100 真机已接</a:t>
+            </a:r>
+          </a:p>
+        </p:txBody>
+      </p:sp>
+      <p:sp>
+        <p:nvSpPr>
+          <p:cNvPr id="26" name="Rounded Rectangle 25"/>
+          <p:cNvSpPr/>
+          <p:nvPr/>
+        </p:nvSpPr>
+        <p:spPr>
+          <a:xfrm>
+            <a:off x="4709160" y="5047488"/>
+            <a:ext cx="1097280" cy="274320"/>
+          </a:xfrm>
+          <a:prstGeom prst="roundRect">
+            <a:avLst>
+              <a:gd name="adj" fmla="val 50000"/>
+            </a:avLst>
+          </a:prstGeom>
+          <a:solidFill>
+            <a:srgbClr val="F6F7F9"/>
+          </a:solidFill>
+          <a:ln w="9525">
+            <a:solidFill>
+              <a:srgbClr val="DDE2E7"/>
+            </a:solidFill>
+          </a:ln>
+        </p:spPr>
+        <p:txBody>
+          <a:bodyPr rtlCol="0" anchor="ctr"/>
+          <a:lstStyle/>
+          <a:p>
+            <a:pPr algn="ctr"/>
+          </a:p>
+        </p:txBody>
+      </p:sp>
+      <p:sp>
+        <p:nvSpPr>
+          <p:cNvPr id="27" name="Oval 26"/>
+          <p:cNvSpPr/>
+          <p:nvPr/>
+        </p:nvSpPr>
+        <p:spPr>
+          <a:xfrm>
+            <a:off x="4809744" y="5129783"/>
+            <a:ext cx="109728" cy="109728"/>
+          </a:xfrm>
+          <a:prstGeom prst="ellipse">
+            <a:avLst/>
+          </a:prstGeom>
+          <a:solidFill>
+            <a:srgbClr val="8C96A1"/>
+          </a:solidFill>
+          <a:ln>
+            <a:noFill/>
+          </a:ln>
+        </p:spPr>
+        <p:txBody>
+          <a:bodyPr rtlCol="0" anchor="ctr"/>
+          <a:lstStyle/>
+          <a:p>
+            <a:pPr algn="ctr"/>
+          </a:p>
+        </p:txBody>
+      </p:sp>
+      <p:sp>
+        <p:nvSpPr>
+          <p:cNvPr id="28" name="TextBox 27"/>
+          <p:cNvSpPr txBox="1"/>
+          <p:nvPr/>
+        </p:nvSpPr>
+        <p:spPr>
+          <a:xfrm>
+            <a:off x="4983480" y="5047488"/>
+            <a:ext cx="804671" cy="274320"/>
+          </a:xfrm>
+          <a:prstGeom prst="rect">
+            <a:avLst/>
+          </a:prstGeom>
+          <a:noFill/>
+        </p:spPr>
+        <p:txBody>
+          <a:bodyPr wrap="square" anchor="ctr" lIns="0" tIns="0" rIns="0" bIns="0">
+            <a:noAutofit/>
+          </a:bodyPr>
+          <a:lstStyle/>
+          <a:p>
+            <a:pPr algn="l" latinLnBrk="0">
+              <a:lnSpc>
+                <a:spcPct val="100000"/>
+              </a:lnSpc>
+              <a:spcBef>
+                <a:spcPts val="0"/>
+              </a:spcBef>
+              <a:spcAft>
+                <a:spcPts val="0"/>
+              </a:spcAft>
+            </a:pPr>
+            <a:r>
+              <a:rPr sz="1050" b="0">
+                <a:solidFill>
+                  <a:srgbClr val="35424F"/>
+                </a:solidFill>
+                <a:latin typeface="Microsoft YaHei"/>
+                <a:ea typeface="Microsoft YaHei"/>
+                <a:cs typeface="Microsoft YaHei"/>
+              </a:rPr>
+              <a:t>P800 待接</a:t>
+            </a:r>
+          </a:p>
+        </p:txBody>
+      </p:sp>
+      <p:sp>
+        <p:nvSpPr>
+          <p:cNvPr id="29" name="Rectangle 28"/>
           <p:cNvSpPr/>
           <p:nvPr/>
         </p:nvSpPr>
@@ -4931,7 +5035,7 @@
       </p:sp>
       <p:sp>
         <p:nvSpPr>
-          <p:cNvPr id="27" name="TextBox 26"/>
+          <p:cNvPr id="30" name="TextBox 29"/>
           <p:cNvSpPr txBox="1"/>
           <p:nvPr/>
         </p:nvSpPr>
@@ -4971,10 +5075,10 @@
                 <a:ea typeface="Microsoft YaHei"/>
                 <a:cs typeface="Microsoft YaHei"/>
               </a:rPr>
-              <a:t>两条关键纪律</a:t>
-            </a:r>
-            <a:r>
-              <a:rPr sz="1050" b="0">
+              <a:t>两条纪律</a:t>
+            </a:r>
+            <a:r>
+              <a:rPr sz="1200" b="1">
                 <a:solidFill>
                   <a:srgbClr val="66727F"/>
                 </a:solidFill>
@@ -4982,20 +5086,20 @@
                 <a:ea typeface="Microsoft YaHei"/>
                 <a:cs typeface="Microsoft YaHei"/>
               </a:rPr>
-              <a:t>　防 reward hacking</a:t>
-            </a:r>
-          </a:p>
-        </p:txBody>
-      </p:sp>
-      <p:sp>
-        <p:nvSpPr>
-          <p:cNvPr id="28" name="Oval 27"/>
+              <a:t>　怎么保证收益是真的</a:t>
+            </a:r>
+          </a:p>
+        </p:txBody>
+      </p:sp>
+      <p:sp>
+        <p:nvSpPr>
+          <p:cNvPr id="31" name="Oval 30"/>
           <p:cNvSpPr/>
           <p:nvPr/>
         </p:nvSpPr>
         <p:spPr>
           <a:xfrm>
-            <a:off x="6470751" y="4315967"/>
+            <a:off x="6470751" y="4334255"/>
             <a:ext cx="256032" cy="256032"/>
           </a:xfrm>
           <a:prstGeom prst="ellipse">
@@ -5041,14 +5145,14 @@
       </p:sp>
       <p:sp>
         <p:nvSpPr>
-          <p:cNvPr id="29" name="TextBox 28"/>
+          <p:cNvPr id="32" name="TextBox 31"/>
           <p:cNvSpPr txBox="1"/>
           <p:nvPr/>
         </p:nvSpPr>
         <p:spPr>
           <a:xfrm>
             <a:off x="6818223" y="4297679"/>
-            <a:ext cx="4587087" cy="292608"/>
+            <a:ext cx="4587087" cy="420624"/>
           </a:xfrm>
           <a:prstGeom prst="rect">
             <a:avLst/>
@@ -5060,6 +5164,30 @@
             <a:noAutofit/>
           </a:bodyPr>
           <a:lstStyle/>
+          <a:p>
+            <a:pPr algn="l" latinLnBrk="0">
+              <a:lnSpc>
+                <a:spcPct val="100000"/>
+              </a:lnSpc>
+              <a:spcBef>
+                <a:spcPts val="0"/>
+              </a:spcBef>
+              <a:spcAft>
+                <a:spcPts val="200"/>
+              </a:spcAft>
+            </a:pPr>
+            <a:r>
+              <a:rPr sz="1150" b="1">
+                <a:solidFill>
+                  <a:srgbClr val="16202A"/>
+                </a:solidFill>
+                <a:latin typeface="Microsoft YaHei"/>
+                <a:ea typeface="Microsoft YaHei"/>
+                <a:cs typeface="Microsoft YaHei"/>
+              </a:rPr>
+              <a:t>精度只认 CPU 参考实现</a:t>
+            </a:r>
+          </a:p>
           <a:p>
             <a:pPr algn="l" latinLnBrk="0">
               <a:lnSpc>
@@ -5073,7 +5201,7 @@
               </a:spcAft>
             </a:pPr>
             <a:r>
-              <a:rPr sz="1100" b="0">
+              <a:rPr sz="1050" b="0">
                 <a:solidFill>
                   <a:srgbClr val="35424F"/>
                 </a:solidFill>
@@ -5081,20 +5209,20 @@
                 <a:ea typeface="Microsoft YaHei"/>
                 <a:cs typeface="Microsoft YaHei"/>
               </a:rPr>
-              <a:t>精度参考只用 CPU 实现，精度门永远先于性能门</a:t>
-            </a:r>
-          </a:p>
-        </p:txBody>
-      </p:sp>
-      <p:sp>
-        <p:nvSpPr>
-          <p:cNvPr id="30" name="Oval 29"/>
+              <a:t>绝不拿 CUDA 当标准；精度不过关，就不看性能</a:t>
+            </a:r>
+          </a:p>
+        </p:txBody>
+      </p:sp>
+      <p:sp>
+        <p:nvSpPr>
+          <p:cNvPr id="33" name="Oval 32"/>
           <p:cNvSpPr/>
           <p:nvPr/>
         </p:nvSpPr>
         <p:spPr>
           <a:xfrm>
-            <a:off x="6470751" y="4663439"/>
+            <a:off x="6470751" y="4809743"/>
             <a:ext cx="256032" cy="256032"/>
           </a:xfrm>
           <a:prstGeom prst="ellipse">
@@ -5140,14 +5268,14 @@
       </p:sp>
       <p:sp>
         <p:nvSpPr>
-          <p:cNvPr id="31" name="TextBox 30"/>
+          <p:cNvPr id="34" name="TextBox 33"/>
           <p:cNvSpPr txBox="1"/>
           <p:nvPr/>
         </p:nvSpPr>
         <p:spPr>
           <a:xfrm>
-            <a:off x="6818223" y="4645151"/>
-            <a:ext cx="4587087" cy="292608"/>
+            <a:off x="6818223" y="4773167"/>
+            <a:ext cx="4587087" cy="420624"/>
           </a:xfrm>
           <a:prstGeom prst="rect">
             <a:avLst/>
@@ -5159,6 +5287,30 @@
             <a:noAutofit/>
           </a:bodyPr>
           <a:lstStyle/>
+          <a:p>
+            <a:pPr algn="l" latinLnBrk="0">
+              <a:lnSpc>
+                <a:spcPct val="100000"/>
+              </a:lnSpc>
+              <a:spcBef>
+                <a:spcPts val="0"/>
+              </a:spcBef>
+              <a:spcAft>
+                <a:spcPts val="200"/>
+              </a:spcAft>
+            </a:pPr>
+            <a:r>
+              <a:rPr sz="1150" b="1">
+                <a:solidFill>
+                  <a:srgbClr val="16202A"/>
+                </a:solidFill>
+                <a:latin typeface="Microsoft YaHei"/>
+                <a:ea typeface="Microsoft YaHei"/>
+                <a:cs typeface="Microsoft YaHei"/>
+              </a:rPr>
+              <a:t>收益只认真机实测</a:t>
+            </a:r>
+          </a:p>
           <a:p>
             <a:pPr algn="l" latinLnBrk="0">
               <a:lnSpc>
@@ -5172,7 +5324,7 @@
               </a:spcAft>
             </a:pPr>
             <a:r>
-              <a:rPr sz="1100" b="0">
+              <a:rPr sz="1050" b="0">
                 <a:solidFill>
                   <a:srgbClr val="35424F"/>
                 </a:solidFill>
@@ -5180,21 +5332,50 @@
                 <a:ea typeface="Microsoft YaHei"/>
                 <a:cs typeface="Microsoft YaHei"/>
               </a:rPr>
-              <a:t>机制看模拟器，收益在真机生产 shape 上测，不一致以真机为准</a:t>
-            </a:r>
-          </a:p>
-        </p:txBody>
-      </p:sp>
-      <p:sp>
-        <p:nvSpPr>
-          <p:cNvPr id="32" name="TextBox 31"/>
+              <a:t>模拟器只用来看清改动动了哪一块，两边对不上听真机的</a:t>
+            </a:r>
+          </a:p>
+        </p:txBody>
+      </p:sp>
+      <p:sp>
+        <p:nvSpPr>
+          <p:cNvPr id="35" name="Rectangle 34"/>
+          <p:cNvSpPr/>
+          <p:nvPr/>
+        </p:nvSpPr>
+        <p:spPr>
+          <a:xfrm>
+            <a:off x="548640" y="5596128"/>
+            <a:ext cx="11094415" cy="603504"/>
+          </a:xfrm>
+          <a:prstGeom prst="rect">
+            <a:avLst/>
+          </a:prstGeom>
+          <a:solidFill>
+            <a:srgbClr val="16202A"/>
+          </a:solidFill>
+          <a:ln>
+            <a:noFill/>
+          </a:ln>
+        </p:spPr>
+        <p:txBody>
+          <a:bodyPr rtlCol="0" anchor="ctr"/>
+          <a:lstStyle/>
+          <a:p>
+            <a:pPr algn="ctr"/>
+          </a:p>
+        </p:txBody>
+      </p:sp>
+      <p:sp>
+        <p:nvSpPr>
+          <p:cNvPr id="36" name="TextBox 35"/>
           <p:cNvSpPr txBox="1"/>
           <p:nvPr/>
         </p:nvSpPr>
         <p:spPr>
           <a:xfrm>
-            <a:off x="6470751" y="5029199"/>
-            <a:ext cx="4934559" cy="274320"/>
+            <a:off x="822959" y="5596128"/>
+            <a:ext cx="10545775" cy="603504"/>
           </a:xfrm>
           <a:prstGeom prst="rect">
             <a:avLst/>
@@ -5219,58 +5400,51 @@
               </a:spcAft>
             </a:pPr>
             <a:r>
-              <a:rPr sz="1050" b="0">
-                <a:solidFill>
-                  <a:srgbClr val="66727F"/>
+              <a:rPr sz="1300" b="1">
+                <a:solidFill>
+                  <a:srgbClr val="FFFFFF"/>
                 </a:solidFill>
                 <a:latin typeface="Microsoft YaHei"/>
                 <a:ea typeface="Microsoft YaHei"/>
                 <a:cs typeface="Microsoft YaHei"/>
               </a:rPr>
-              <a:t>两条都由机器门强制：每轮 before / after / 判词写不进去，这一轮就算失败</a:t>
-            </a:r>
-          </a:p>
-        </p:txBody>
-      </p:sp>
-      <p:sp>
-        <p:nvSpPr>
-          <p:cNvPr id="33" name="Rectangle 32"/>
-          <p:cNvSpPr/>
-          <p:nvPr/>
-        </p:nvSpPr>
-        <p:spPr>
-          <a:xfrm>
-            <a:off x="548640" y="5596128"/>
-            <a:ext cx="11094415" cy="603504"/>
-          </a:xfrm>
-          <a:prstGeom prst="rect">
-            <a:avLst/>
-          </a:prstGeom>
-          <a:solidFill>
-            <a:srgbClr val="16202A"/>
-          </a:solidFill>
-          <a:ln>
-            <a:noFill/>
-          </a:ln>
-        </p:spPr>
-        <p:txBody>
-          <a:bodyPr rtlCol="0" anchor="ctr"/>
-          <a:lstStyle/>
-          <a:p>
-            <a:pPr algn="ctr"/>
-          </a:p>
-        </p:txBody>
-      </p:sp>
-      <p:sp>
-        <p:nvSpPr>
-          <p:cNvPr id="34" name="TextBox 33"/>
+              <a:t>对外接口　</a:t>
+            </a:r>
+            <a:r>
+              <a:rPr sz="1300" b="1">
+                <a:solidFill>
+                  <a:srgbClr val="F2B233"/>
+                </a:solidFill>
+                <a:latin typeface="Microsoft YaHei"/>
+                <a:ea typeface="Microsoft YaHei"/>
+                <a:cs typeface="Microsoft YaHei"/>
+              </a:rPr>
+              <a:t>operator-channel 透传通道</a:t>
+            </a:r>
+            <a:r>
+              <a:rPr sz="1300" b="1">
+                <a:solidFill>
+                  <a:srgbClr val="FFFFFF"/>
+                </a:solidFill>
+                <a:latin typeface="Microsoft YaHei"/>
+                <a:ea typeface="Microsoft YaHei"/>
+                <a:cs typeface="Microsoft YaHei"/>
+              </a:rPr>
+              <a:t>　m100-model-agent 管整模型接入与调优，xpugen 管单算子生成</a:t>
+            </a:r>
+          </a:p>
+        </p:txBody>
+      </p:sp>
+      <p:sp>
+        <p:nvSpPr>
+          <p:cNvPr id="37" name="TextBox 36"/>
           <p:cNvSpPr txBox="1"/>
           <p:nvPr/>
         </p:nvSpPr>
         <p:spPr>
           <a:xfrm>
-            <a:off x="822959" y="5596128"/>
-            <a:ext cx="10545775" cy="603504"/>
+            <a:off x="548640" y="6382512"/>
+            <a:ext cx="9905695" cy="256032"/>
           </a:xfrm>
           <a:prstGeom prst="rect">
             <a:avLst/>
@@ -5295,75 +5469,6 @@
               </a:spcAft>
             </a:pPr>
             <a:r>
-              <a:rPr sz="1300" b="1">
-                <a:solidFill>
-                  <a:srgbClr val="FFFFFF"/>
-                </a:solidFill>
-                <a:latin typeface="Microsoft YaHei"/>
-                <a:ea typeface="Microsoft YaHei"/>
-                <a:cs typeface="Microsoft YaHei"/>
-              </a:rPr>
-              <a:t>对外接口　</a:t>
-            </a:r>
-            <a:r>
-              <a:rPr sz="1300" b="1">
-                <a:solidFill>
-                  <a:srgbClr val="F2B233"/>
-                </a:solidFill>
-                <a:latin typeface="Microsoft YaHei"/>
-                <a:ea typeface="Microsoft YaHei"/>
-                <a:cs typeface="Microsoft YaHei"/>
-              </a:rPr>
-              <a:t>operator-channel 透传通道</a:t>
-            </a:r>
-            <a:r>
-              <a:rPr sz="1300" b="1">
-                <a:solidFill>
-                  <a:srgbClr val="FFFFFF"/>
-                </a:solidFill>
-                <a:latin typeface="Microsoft YaHei"/>
-                <a:ea typeface="Microsoft YaHei"/>
-                <a:cs typeface="Microsoft YaHei"/>
-              </a:rPr>
-              <a:t>　m100-model-agent 管整模型接入与调优，xpugen 管单算子生成</a:t>
-            </a:r>
-          </a:p>
-        </p:txBody>
-      </p:sp>
-      <p:sp>
-        <p:nvSpPr>
-          <p:cNvPr id="35" name="TextBox 34"/>
-          <p:cNvSpPr txBox="1"/>
-          <p:nvPr/>
-        </p:nvSpPr>
-        <p:spPr>
-          <a:xfrm>
-            <a:off x="548640" y="6382512"/>
-            <a:ext cx="9905695" cy="256032"/>
-          </a:xfrm>
-          <a:prstGeom prst="rect">
-            <a:avLst/>
-          </a:prstGeom>
-          <a:noFill/>
-        </p:spPr>
-        <p:txBody>
-          <a:bodyPr wrap="square" anchor="ctr" lIns="0" tIns="0" rIns="0" bIns="0">
-            <a:noAutofit/>
-          </a:bodyPr>
-          <a:lstStyle/>
-          <a:p>
-            <a:pPr algn="l" latinLnBrk="0">
-              <a:lnSpc>
-                <a:spcPct val="100000"/>
-              </a:lnSpc>
-              <a:spcBef>
-                <a:spcPts val="0"/>
-              </a:spcBef>
-              <a:spcAft>
-                <a:spcPts val="0"/>
-              </a:spcAft>
-            </a:pPr>
-            <a:r>
               <a:rPr sz="1000" b="0">
                 <a:solidFill>
                   <a:srgbClr val="66727F"/>
@@ -5379,7 +5484,7 @@
       </p:sp>
       <p:sp>
         <p:nvSpPr>
-          <p:cNvPr id="36" name="TextBox 35"/>
+          <p:cNvPr id="38" name="TextBox 37"/>
           <p:cNvSpPr txBox="1"/>
           <p:nvPr/>
         </p:nvSpPr>

--- a/slides/xpugen_operator_agent.pptx
+++ b/slides/xpugen_operator_agent.pptx
@@ -515,7 +515,7 @@
                 <a:ea typeface="Microsoft YaHei"/>
                 <a:cs typeface="Microsoft YaHei"/>
               </a:rPr>
-              <a:t>【附页 · xpugen · 约 120 秒（2:00）】</a:t>
+              <a:t>【附页 · xpugen · 约 70 秒（1:10）】</a:t>
             </a:r>
           </a:p>
           <a:p>
@@ -533,7 +533,7 @@
                 <a:ea typeface="Microsoft YaHei"/>
                 <a:cs typeface="Microsoft YaHei"/>
               </a:rPr>
-              <a:t>这一页是另一个仓库 xpugen：给国产 GPU 写算子的 Agent。闭环是 LLM 生成、编译、和 golden 对数值、测延迟，再把结构化的反馈喂回去改下一轮，最多八轮。它生成的是 M100 的 SDNN4 内核，不是 CUDA；CUDA、Triton、torch 只当算法参考和基线。</a:t>
+              <a:t>这一页是另一个仓库 xpugen：给国产 GPU 写算子的 Agent。它生成的是 M100 的 SDNN4 内核，不是 CUDA；CUDA、Triton、torch 只当算法参考和基线。</a:t>
             </a:r>
           </a:p>
           <a:p>
@@ -551,7 +551,7 @@
                 <a:ea typeface="Microsoft YaHei"/>
                 <a:cs typeface="Microsoft YaHei"/>
               </a:rPr>
-              <a:t>评测是分级放行的：先编译，过了精度这一关才测性能。入口有两条：从一句需求开始，或者从现有实现反推规格，第 0 轮直接拿它当基线，后面在它上面改。</a:t>
+              <a:t>左边是它怎么工作的。入口有两条：从一句需求开始，或者从现有实现反推出规格，第 0 轮直接拿现有实现当基线，后面在它上面改。</a:t>
             </a:r>
           </a:p>
           <a:p>
@@ -569,7 +569,7 @@
                 <a:ea typeface="Microsoft YaHei"/>
                 <a:cs typeface="Microsoft YaHei"/>
               </a:rPr>
-              <a:t>架构上最重要的一条是硬件解耦：生成和评测这套流程完全不碰硬件，只认四个接口——编译、运行、采性能、算理论上限。换一款芯片，只要照这四个接口写一个后端、再填一张硬件说明卡，主流程一行不改。现在没有硬件也能在 CPU 上跑通整条闭环，M100 真机已经接上，P800 还没接。</a:t>
+              <a:t>然后就是一轮轮迭代：LLM 照硬件说明卡写内核，编译跑起来，多种形状和精度逐一和 golden 对数值，再测延迟、跟理论上限比，最后把打分和慢在哪带进下一轮。最多八轮。</a:t>
             </a:r>
           </a:p>
           <a:p>
@@ -587,7 +587,7 @@
                 <a:ea typeface="Microsoft YaHei"/>
                 <a:cs typeface="Microsoft YaHei"/>
               </a:rPr>
-              <a:t>两条纪律是防止自己骗自己：精度参考只用 CPU 实现，绝不拿 CUDA 当标准，精度不过关就不看性能；模拟器只用来看清改动动了哪一块，收益一律以真机、生产形状的实测为准，两边对不上听真机的。</a:t>
+              <a:t>右边是效果。（按实测数字讲：已经有多少个算子达标、平均几轮、相对原来的实现快多少、离理论上限还差多少。口径都是真机、生产形状上的实测。）</a:t>
             </a:r>
           </a:p>
           <a:p>
@@ -597,15 +597,51 @@
               </a:spcAft>
             </a:pPr>
             <a:r>
-              <a:rPr sz="1200" b="0">
-                <a:solidFill>
-                  <a:srgbClr val="16202A"/>
+              <a:rPr sz="1200" b="1">
+                <a:solidFill>
+                  <a:srgbClr val="66727F"/>
                 </a:solidFill>
                 <a:latin typeface="Microsoft YaHei"/>
                 <a:ea typeface="Microsoft YaHei"/>
                 <a:cs typeface="Microsoft YaHei"/>
               </a:rPr>
-              <a:t>这些规矩不是靠人盯，是写死在流程里的：每轮改了什么、前后数据、结论，写不进去这一轮就算失败。</a:t>
+              <a:t>被问到再说 ——</a:t>
+            </a:r>
+          </a:p>
+          <a:p>
+            <a:pPr>
+              <a:spcAft>
+                <a:spcPts val="600"/>
+              </a:spcAft>
+            </a:pPr>
+            <a:r>
+              <a:rPr sz="1200" b="0">
+                <a:solidFill>
+                  <a:srgbClr val="66727F"/>
+                </a:solidFill>
+                <a:latin typeface="Microsoft YaHei"/>
+                <a:ea typeface="Microsoft YaHei"/>
+                <a:cs typeface="Microsoft YaHei"/>
+              </a:rPr>
+              <a:t>换芯片要改什么：生成和评测这套流程完全不碰硬件，只认四个接口——编译、运行、采性能、算理论上限。每款芯片照这四个接口写一个后端、再填一张硬件说明卡，主流程一行不改。现在没有硬件也能在 CPU 上跑通整条闭环，M100 真机已接，P800 还没接。</a:t>
+            </a:r>
+          </a:p>
+          <a:p>
+            <a:pPr>
+              <a:spcAft>
+                <a:spcPts val="600"/>
+              </a:spcAft>
+            </a:pPr>
+            <a:r>
+              <a:rPr sz="1200" b="0">
+                <a:solidFill>
+                  <a:srgbClr val="66727F"/>
+                </a:solidFill>
+                <a:latin typeface="Microsoft YaHei"/>
+                <a:ea typeface="Microsoft YaHei"/>
+                <a:cs typeface="Microsoft YaHei"/>
+              </a:rPr>
+              <a:t>数字凭什么信：精度参考只用 CPU 实现，绝不拿 CUDA 当标准，精度不过关就不看性能；模拟器只用来看清改动动了哪一块，收益一律以真机实测为准，两边对不上听真机的。而且每轮改了什么、前后数据、结论都必须落盘，写不进去这一轮就算失败。</a:t>
             </a:r>
           </a:p>
         </p:txBody>
@@ -3700,7 +3736,7 @@
                 <a:ea typeface="Microsoft YaHei"/>
                 <a:cs typeface="Microsoft YaHei"/>
               </a:rPr>
-              <a:t>xpugen：给国产 GPU 生成原生算子，编译、对齐、测速后按反馈迭代</a:t>
+              <a:t>xpugen：给国产 GPU 写算子的 Agent</a:t>
             </a:r>
           </a:p>
         </p:txBody>
@@ -3754,34 +3790,27 @@
       </p:sp>
       <p:sp>
         <p:nvSpPr>
-          <p:cNvPr id="5" name="Rectangle 4"/>
-          <p:cNvSpPr/>
+          <p:cNvPr id="5" name="TextBox 4"/>
+          <p:cNvSpPr txBox="1"/>
           <p:nvPr/>
         </p:nvSpPr>
         <p:spPr>
           <a:xfrm>
-            <a:off x="548640" y="1874519"/>
-            <a:ext cx="1970166" cy="1207008"/>
+            <a:off x="548640" y="1755648"/>
+            <a:ext cx="5029200" cy="292608"/>
           </a:xfrm>
           <a:prstGeom prst="rect">
             <a:avLst/>
           </a:prstGeom>
-          <a:solidFill>
-            <a:srgbClr val="FFFFFF"/>
-          </a:solidFill>
-          <a:ln w="12700">
-            <a:solidFill>
-              <a:srgbClr val="C0612C"/>
-            </a:solidFill>
-          </a:ln>
-        </p:spPr>
-        <p:txBody>
-          <a:bodyPr rtlCol="0" anchor="ctr" wrap="square" lIns="128016" tIns="91440" rIns="128016" bIns="91440">
+          <a:noFill/>
+        </p:spPr>
+        <p:txBody>
+          <a:bodyPr wrap="square" anchor="ctr" lIns="0" tIns="0" rIns="0" bIns="0">
             <a:noAutofit/>
           </a:bodyPr>
           <a:lstStyle/>
           <a:p>
-            <a:pPr algn="ctr" latinLnBrk="0">
+            <a:pPr algn="l" latinLnBrk="0">
               <a:lnSpc>
                 <a:spcPct val="100000"/>
               </a:lnSpc>
@@ -3789,23 +3818,57 @@
                 <a:spcPts val="0"/>
               </a:spcBef>
               <a:spcAft>
-                <a:spcPts val="500"/>
+                <a:spcPts val="0"/>
               </a:spcAft>
             </a:pPr>
             <a:r>
-              <a:rPr sz="950" b="1">
-                <a:solidFill>
-                  <a:srgbClr val="C0612C"/>
-                </a:solidFill>
-                <a:latin typeface="Consolas"/>
+              <a:rPr sz="1350" b="1">
+                <a:solidFill>
+                  <a:srgbClr val="16202A"/>
+                </a:solidFill>
+                <a:latin typeface="Microsoft YaHei"/>
                 <a:ea typeface="Microsoft YaHei"/>
                 <a:cs typeface="Microsoft YaHei"/>
               </a:rPr>
-              <a:t>　</a:t>
-            </a:r>
-          </a:p>
-          <a:p>
-            <a:pPr algn="ctr" latinLnBrk="0">
+              <a:t>怎么工作</a:t>
+            </a:r>
+            <a:r>
+              <a:rPr sz="1050" b="0">
+                <a:solidFill>
+                  <a:srgbClr val="66727F"/>
+                </a:solidFill>
+                <a:latin typeface="Microsoft YaHei"/>
+                <a:ea typeface="Microsoft YaHei"/>
+                <a:cs typeface="Microsoft YaHei"/>
+              </a:rPr>
+              <a:t>　一个算子，最多 8 轮</a:t>
+            </a:r>
+          </a:p>
+        </p:txBody>
+      </p:sp>
+      <p:sp>
+        <p:nvSpPr>
+          <p:cNvPr id="6" name="TextBox 5"/>
+          <p:cNvSpPr txBox="1"/>
+          <p:nvPr/>
+        </p:nvSpPr>
+        <p:spPr>
+          <a:xfrm>
+            <a:off x="548640" y="2066543"/>
+            <a:ext cx="5029200" cy="256032"/>
+          </a:xfrm>
+          <a:prstGeom prst="rect">
+            <a:avLst/>
+          </a:prstGeom>
+          <a:noFill/>
+        </p:spPr>
+        <p:txBody>
+          <a:bodyPr wrap="square" anchor="ctr" lIns="0" tIns="0" rIns="0" bIns="0">
+            <a:noAutofit/>
+          </a:bodyPr>
+          <a:lstStyle/>
+          <a:p>
+            <a:pPr algn="l" latinLnBrk="0">
               <a:lnSpc>
                 <a:spcPct val="100000"/>
               </a:lnSpc>
@@ -3813,145 +3876,19 @@
                 <a:spcPts val="0"/>
               </a:spcBef>
               <a:spcAft>
-                <a:spcPts val="600"/>
+                <a:spcPts val="0"/>
               </a:spcAft>
             </a:pPr>
             <a:r>
-              <a:rPr sz="1400" b="1">
-                <a:solidFill>
-                  <a:srgbClr val="16202A"/>
+              <a:rPr sz="1050" b="0">
+                <a:solidFill>
+                  <a:srgbClr val="66727F"/>
                 </a:solidFill>
                 <a:latin typeface="Microsoft YaHei"/>
                 <a:ea typeface="Microsoft YaHei"/>
                 <a:cs typeface="Microsoft YaHei"/>
               </a:rPr>
-              <a:t>生成</a:t>
-            </a:r>
-          </a:p>
-          <a:p>
-            <a:pPr algn="ctr" latinLnBrk="0">
-              <a:lnSpc>
-                <a:spcPct val="114000"/>
-              </a:lnSpc>
-              <a:spcBef>
-                <a:spcPts val="0"/>
-              </a:spcBef>
-              <a:spcAft>
-                <a:spcPts val="0"/>
-              </a:spcAft>
-            </a:pPr>
-            <a:r>
-              <a:rPr sz="1050" b="0">
-                <a:solidFill>
-                  <a:srgbClr val="35424F"/>
-                </a:solidFill>
-                <a:latin typeface="Microsoft YaHei"/>
-                <a:ea typeface="Microsoft YaHei"/>
-                <a:cs typeface="Microsoft YaHei"/>
-              </a:rPr>
-              <a:t>LLM 照硬件说明卡写内核</a:t>
-            </a:r>
-          </a:p>
-        </p:txBody>
-      </p:sp>
-      <p:sp>
-        <p:nvSpPr>
-          <p:cNvPr id="6" name="Rectangle 5"/>
-          <p:cNvSpPr/>
-          <p:nvPr/>
-        </p:nvSpPr>
-        <p:spPr>
-          <a:xfrm>
-            <a:off x="2829702" y="1874519"/>
-            <a:ext cx="1970166" cy="1207008"/>
-          </a:xfrm>
-          <a:prstGeom prst="rect">
-            <a:avLst/>
-          </a:prstGeom>
-          <a:solidFill>
-            <a:srgbClr val="FFFFFF"/>
-          </a:solidFill>
-          <a:ln w="12700">
-            <a:solidFill>
-              <a:srgbClr val="C0612C"/>
-            </a:solidFill>
-          </a:ln>
-        </p:spPr>
-        <p:txBody>
-          <a:bodyPr rtlCol="0" anchor="ctr" wrap="square" lIns="128016" tIns="91440" rIns="128016" bIns="91440">
-            <a:noAutofit/>
-          </a:bodyPr>
-          <a:lstStyle/>
-          <a:p>
-            <a:pPr algn="ctr" latinLnBrk="0">
-              <a:lnSpc>
-                <a:spcPct val="100000"/>
-              </a:lnSpc>
-              <a:spcBef>
-                <a:spcPts val="0"/>
-              </a:spcBef>
-              <a:spcAft>
-                <a:spcPts val="500"/>
-              </a:spcAft>
-            </a:pPr>
-            <a:r>
-              <a:rPr sz="950" b="1">
-                <a:solidFill>
-                  <a:srgbClr val="C0612C"/>
-                </a:solidFill>
-                <a:latin typeface="Consolas"/>
-                <a:ea typeface="Microsoft YaHei"/>
-                <a:cs typeface="Microsoft YaHei"/>
-              </a:rPr>
-              <a:t>L0</a:t>
-            </a:r>
-          </a:p>
-          <a:p>
-            <a:pPr algn="ctr" latinLnBrk="0">
-              <a:lnSpc>
-                <a:spcPct val="100000"/>
-              </a:lnSpc>
-              <a:spcBef>
-                <a:spcPts val="0"/>
-              </a:spcBef>
-              <a:spcAft>
-                <a:spcPts val="600"/>
-              </a:spcAft>
-            </a:pPr>
-            <a:r>
-              <a:rPr sz="1400" b="1">
-                <a:solidFill>
-                  <a:srgbClr val="16202A"/>
-                </a:solidFill>
-                <a:latin typeface="Microsoft YaHei"/>
-                <a:ea typeface="Microsoft YaHei"/>
-                <a:cs typeface="Microsoft YaHei"/>
-              </a:rPr>
-              <a:t>编译</a:t>
-            </a:r>
-          </a:p>
-          <a:p>
-            <a:pPr algn="ctr" latinLnBrk="0">
-              <a:lnSpc>
-                <a:spcPct val="114000"/>
-              </a:lnSpc>
-              <a:spcBef>
-                <a:spcPts val="0"/>
-              </a:spcBef>
-              <a:spcAft>
-                <a:spcPts val="0"/>
-              </a:spcAft>
-            </a:pPr>
-            <a:r>
-              <a:rPr sz="1050" b="0">
-                <a:solidFill>
-                  <a:srgbClr val="35424F"/>
-                </a:solidFill>
-                <a:latin typeface="Microsoft YaHei"/>
-                <a:ea typeface="Microsoft YaHei"/>
-                <a:cs typeface="Microsoft YaHei"/>
-              </a:rPr>
-              <a:t>编译并拉起程序</a:t>
+              <a:t>入口：一句需求，或拿现有实现当第 0 轮基线</a:t>
             </a:r>
           </a:p>
         </p:txBody>
@@ -3964,45 +3901,42 @@
         </p:nvCxnSpPr>
         <p:spPr>
           <a:xfrm>
-            <a:off x="2573670" y="2478024"/>
-            <a:ext cx="201168" cy="0"/>
+            <a:off x="1161288" y="2587752"/>
+            <a:ext cx="0" cy="3090672"/>
           </a:xfrm>
           <a:prstGeom prst="line">
             <a:avLst/>
           </a:prstGeom>
-          <a:ln w="19050">
+          <a:ln w="15875">
             <a:solidFill>
-              <a:srgbClr val="C0612C"/>
+              <a:srgbClr val="C5CCD4"/>
             </a:solidFill>
-            <a:tailEnd type="triangle" w="med" len="med"/>
           </a:ln>
         </p:spPr>
       </p:cxnSp>
       <p:sp>
         <p:nvSpPr>
-          <p:cNvPr id="8" name="Rectangle 7"/>
+          <p:cNvPr id="8" name="Oval 7"/>
           <p:cNvSpPr/>
           <p:nvPr/>
         </p:nvSpPr>
         <p:spPr>
           <a:xfrm>
-            <a:off x="5110764" y="1874519"/>
-            <a:ext cx="1970166" cy="1207008"/>
-          </a:xfrm>
-          <a:prstGeom prst="rect">
+            <a:off x="1005840" y="2432304"/>
+            <a:ext cx="310896" cy="310896"/>
+          </a:xfrm>
+          <a:prstGeom prst="ellipse">
             <a:avLst/>
           </a:prstGeom>
           <a:solidFill>
-            <a:srgbClr val="FFFFFF"/>
+            <a:srgbClr val="C0612C"/>
           </a:solidFill>
-          <a:ln w="12700">
-            <a:solidFill>
-              <a:srgbClr val="C0612C"/>
-            </a:solidFill>
+          <a:ln>
+            <a:noFill/>
           </a:ln>
         </p:spPr>
         <p:txBody>
-          <a:bodyPr rtlCol="0" anchor="ctr" wrap="square" lIns="128016" tIns="91440" rIns="128016" bIns="91440">
+          <a:bodyPr rtlCol="0" anchor="ctr" wrap="square" lIns="0" tIns="0" rIns="0" bIns="0">
             <a:noAutofit/>
           </a:bodyPr>
           <a:lstStyle/>
@@ -4015,21 +3949,143 @@
                 <a:spcPts val="0"/>
               </a:spcBef>
               <a:spcAft>
-                <a:spcPts val="500"/>
+                <a:spcPts val="0"/>
               </a:spcAft>
             </a:pPr>
             <a:r>
-              <a:rPr sz="950" b="1">
-                <a:solidFill>
-                  <a:srgbClr val="C0612C"/>
-                </a:solidFill>
-                <a:latin typeface="Consolas"/>
+              <a:rPr sz="1100" b="1">
+                <a:solidFill>
+                  <a:srgbClr val="FFFFFF"/>
+                </a:solidFill>
+                <a:latin typeface="Arial"/>
                 <a:ea typeface="Microsoft YaHei"/>
                 <a:cs typeface="Microsoft YaHei"/>
               </a:rPr>
-              <a:t>L1</a:t>
-            </a:r>
-          </a:p>
+              <a:t>1</a:t>
+            </a:r>
+          </a:p>
+        </p:txBody>
+      </p:sp>
+      <p:sp>
+        <p:nvSpPr>
+          <p:cNvPr id="9" name="TextBox 8"/>
+          <p:cNvSpPr txBox="1"/>
+          <p:nvPr/>
+        </p:nvSpPr>
+        <p:spPr>
+          <a:xfrm>
+            <a:off x="1463040" y="2395728"/>
+            <a:ext cx="4572000" cy="274320"/>
+          </a:xfrm>
+          <a:prstGeom prst="rect">
+            <a:avLst/>
+          </a:prstGeom>
+          <a:noFill/>
+        </p:spPr>
+        <p:txBody>
+          <a:bodyPr wrap="square" anchor="ctr" lIns="0" tIns="0" rIns="0" bIns="0">
+            <a:noAutofit/>
+          </a:bodyPr>
+          <a:lstStyle/>
+          <a:p>
+            <a:pPr algn="l" latinLnBrk="0">
+              <a:lnSpc>
+                <a:spcPct val="100000"/>
+              </a:lnSpc>
+              <a:spcBef>
+                <a:spcPts val="0"/>
+              </a:spcBef>
+              <a:spcAft>
+                <a:spcPts val="0"/>
+              </a:spcAft>
+            </a:pPr>
+            <a:r>
+              <a:rPr sz="1300" b="1">
+                <a:solidFill>
+                  <a:srgbClr val="16202A"/>
+                </a:solidFill>
+                <a:latin typeface="Microsoft YaHei"/>
+                <a:ea typeface="Microsoft YaHei"/>
+                <a:cs typeface="Microsoft YaHei"/>
+              </a:rPr>
+              <a:t>生成</a:t>
+            </a:r>
+          </a:p>
+        </p:txBody>
+      </p:sp>
+      <p:sp>
+        <p:nvSpPr>
+          <p:cNvPr id="10" name="TextBox 9"/>
+          <p:cNvSpPr txBox="1"/>
+          <p:nvPr/>
+        </p:nvSpPr>
+        <p:spPr>
+          <a:xfrm>
+            <a:off x="1463040" y="2670048"/>
+            <a:ext cx="4572000" cy="256032"/>
+          </a:xfrm>
+          <a:prstGeom prst="rect">
+            <a:avLst/>
+          </a:prstGeom>
+          <a:noFill/>
+        </p:spPr>
+        <p:txBody>
+          <a:bodyPr wrap="square" anchor="ctr" lIns="0" tIns="0" rIns="0" bIns="0">
+            <a:noAutofit/>
+          </a:bodyPr>
+          <a:lstStyle/>
+          <a:p>
+            <a:pPr algn="l" latinLnBrk="0">
+              <a:lnSpc>
+                <a:spcPct val="100000"/>
+              </a:lnSpc>
+              <a:spcBef>
+                <a:spcPts val="0"/>
+              </a:spcBef>
+              <a:spcAft>
+                <a:spcPts val="0"/>
+              </a:spcAft>
+            </a:pPr>
+            <a:r>
+              <a:rPr sz="1050" b="0">
+                <a:solidFill>
+                  <a:srgbClr val="35424F"/>
+                </a:solidFill>
+                <a:latin typeface="Microsoft YaHei"/>
+                <a:ea typeface="Microsoft YaHei"/>
+                <a:cs typeface="Microsoft YaHei"/>
+              </a:rPr>
+              <a:t>LLM 照硬件说明卡写出内核</a:t>
+            </a:r>
+          </a:p>
+        </p:txBody>
+      </p:sp>
+      <p:sp>
+        <p:nvSpPr>
+          <p:cNvPr id="11" name="Oval 10"/>
+          <p:cNvSpPr/>
+          <p:nvPr/>
+        </p:nvSpPr>
+        <p:spPr>
+          <a:xfrm>
+            <a:off x="1005840" y="3204972"/>
+            <a:ext cx="310896" cy="310896"/>
+          </a:xfrm>
+          <a:prstGeom prst="ellipse">
+            <a:avLst/>
+          </a:prstGeom>
+          <a:solidFill>
+            <a:srgbClr val="C0612C"/>
+          </a:solidFill>
+          <a:ln>
+            <a:noFill/>
+          </a:ln>
+        </p:spPr>
+        <p:txBody>
+          <a:bodyPr rtlCol="0" anchor="ctr" wrap="square" lIns="0" tIns="0" rIns="0" bIns="0">
+            <a:noAutofit/>
+          </a:bodyPr>
+          <a:lstStyle/>
           <a:p>
             <a:pPr algn="ctr" latinLnBrk="0">
               <a:lnSpc>
@@ -4039,11 +4095,58 @@
                 <a:spcPts val="0"/>
               </a:spcBef>
               <a:spcAft>
-                <a:spcPts val="600"/>
+                <a:spcPts val="0"/>
               </a:spcAft>
             </a:pPr>
             <a:r>
-              <a:rPr sz="1400" b="1">
+              <a:rPr sz="1100" b="1">
+                <a:solidFill>
+                  <a:srgbClr val="FFFFFF"/>
+                </a:solidFill>
+                <a:latin typeface="Arial"/>
+                <a:ea typeface="Microsoft YaHei"/>
+                <a:cs typeface="Microsoft YaHei"/>
+              </a:rPr>
+              <a:t>2</a:t>
+            </a:r>
+          </a:p>
+        </p:txBody>
+      </p:sp>
+      <p:sp>
+        <p:nvSpPr>
+          <p:cNvPr id="12" name="TextBox 11"/>
+          <p:cNvSpPr txBox="1"/>
+          <p:nvPr/>
+        </p:nvSpPr>
+        <p:spPr>
+          <a:xfrm>
+            <a:off x="1463040" y="3168396"/>
+            <a:ext cx="4572000" cy="274320"/>
+          </a:xfrm>
+          <a:prstGeom prst="rect">
+            <a:avLst/>
+          </a:prstGeom>
+          <a:noFill/>
+        </p:spPr>
+        <p:txBody>
+          <a:bodyPr wrap="square" anchor="ctr" lIns="0" tIns="0" rIns="0" bIns="0">
+            <a:noAutofit/>
+          </a:bodyPr>
+          <a:lstStyle/>
+          <a:p>
+            <a:pPr algn="l" latinLnBrk="0">
+              <a:lnSpc>
+                <a:spcPct val="100000"/>
+              </a:lnSpc>
+              <a:spcBef>
+                <a:spcPts val="0"/>
+              </a:spcBef>
+              <a:spcAft>
+                <a:spcPts val="0"/>
+              </a:spcAft>
+            </a:pPr>
+            <a:r>
+              <a:rPr sz="1300" b="1">
                 <a:solidFill>
                   <a:srgbClr val="16202A"/>
                 </a:solidFill>
@@ -4051,13 +4154,36 @@
                 <a:ea typeface="Microsoft YaHei"/>
                 <a:cs typeface="Microsoft YaHei"/>
               </a:rPr>
-              <a:t>对齐 golden</a:t>
-            </a:r>
-          </a:p>
-          <a:p>
-            <a:pPr algn="ctr" latinLnBrk="0">
+              <a:t>编译</a:t>
+            </a:r>
+          </a:p>
+        </p:txBody>
+      </p:sp>
+      <p:sp>
+        <p:nvSpPr>
+          <p:cNvPr id="13" name="TextBox 12"/>
+          <p:cNvSpPr txBox="1"/>
+          <p:nvPr/>
+        </p:nvSpPr>
+        <p:spPr>
+          <a:xfrm>
+            <a:off x="1463040" y="3442715"/>
+            <a:ext cx="4572000" cy="256032"/>
+          </a:xfrm>
+          <a:prstGeom prst="rect">
+            <a:avLst/>
+          </a:prstGeom>
+          <a:noFill/>
+        </p:spPr>
+        <p:txBody>
+          <a:bodyPr wrap="square" anchor="ctr" lIns="0" tIns="0" rIns="0" bIns="0">
+            <a:noAutofit/>
+          </a:bodyPr>
+          <a:lstStyle/>
+          <a:p>
+            <a:pPr algn="l" latinLnBrk="0">
               <a:lnSpc>
-                <a:spcPct val="114000"/>
+                <a:spcPct val="100000"/>
               </a:lnSpc>
               <a:spcBef>
                 <a:spcPts val="0"/>
@@ -4075,58 +4201,34 @@
                 <a:ea typeface="Microsoft YaHei"/>
                 <a:cs typeface="Microsoft YaHei"/>
               </a:rPr>
-              <a:t>多种形状、精度逐一对数值</a:t>
-            </a:r>
-          </a:p>
-        </p:txBody>
-      </p:sp>
-      <p:cxnSp>
-        <p:nvCxnSpPr>
-          <p:cNvPr id="9" name="Connector 8"/>
-          <p:cNvCxnSpPr/>
-          <p:nvPr/>
-        </p:nvCxnSpPr>
-        <p:spPr>
-          <a:xfrm>
-            <a:off x="4854732" y="2478024"/>
-            <a:ext cx="201168" cy="0"/>
-          </a:xfrm>
-          <a:prstGeom prst="line">
-            <a:avLst/>
-          </a:prstGeom>
-          <a:ln w="19050">
-            <a:solidFill>
-              <a:srgbClr val="C0612C"/>
-            </a:solidFill>
-            <a:tailEnd type="triangle" w="med" len="med"/>
-          </a:ln>
-        </p:spPr>
-      </p:cxnSp>
-      <p:sp>
-        <p:nvSpPr>
-          <p:cNvPr id="10" name="Rectangle 9"/>
+              <a:t>编译并拉起程序，跑通才往下走</a:t>
+            </a:r>
+          </a:p>
+        </p:txBody>
+      </p:sp>
+      <p:sp>
+        <p:nvSpPr>
+          <p:cNvPr id="14" name="Oval 13"/>
           <p:cNvSpPr/>
           <p:nvPr/>
         </p:nvSpPr>
         <p:spPr>
           <a:xfrm>
-            <a:off x="7391826" y="1874519"/>
-            <a:ext cx="1970166" cy="1207008"/>
-          </a:xfrm>
-          <a:prstGeom prst="rect">
+            <a:off x="1005840" y="3977639"/>
+            <a:ext cx="310896" cy="310896"/>
+          </a:xfrm>
+          <a:prstGeom prst="ellipse">
             <a:avLst/>
           </a:prstGeom>
           <a:solidFill>
-            <a:srgbClr val="FFFFFF"/>
+            <a:srgbClr val="C0612C"/>
           </a:solidFill>
-          <a:ln w="12700">
-            <a:solidFill>
-              <a:srgbClr val="C0612C"/>
-            </a:solidFill>
+          <a:ln>
+            <a:noFill/>
           </a:ln>
         </p:spPr>
         <p:txBody>
-          <a:bodyPr rtlCol="0" anchor="ctr" wrap="square" lIns="128016" tIns="91440" rIns="128016" bIns="91440">
+          <a:bodyPr rtlCol="0" anchor="ctr" wrap="square" lIns="0" tIns="0" rIns="0" bIns="0">
             <a:noAutofit/>
           </a:bodyPr>
           <a:lstStyle/>
@@ -4139,21 +4241,143 @@
                 <a:spcPts val="0"/>
               </a:spcBef>
               <a:spcAft>
-                <a:spcPts val="500"/>
+                <a:spcPts val="0"/>
               </a:spcAft>
             </a:pPr>
             <a:r>
-              <a:rPr sz="950" b="1">
-                <a:solidFill>
-                  <a:srgbClr val="C0612C"/>
-                </a:solidFill>
-                <a:latin typeface="Consolas"/>
+              <a:rPr sz="1100" b="1">
+                <a:solidFill>
+                  <a:srgbClr val="FFFFFF"/>
+                </a:solidFill>
+                <a:latin typeface="Arial"/>
                 <a:ea typeface="Microsoft YaHei"/>
                 <a:cs typeface="Microsoft YaHei"/>
               </a:rPr>
-              <a:t>BENCH · PROFILE</a:t>
-            </a:r>
-          </a:p>
+              <a:t>3</a:t>
+            </a:r>
+          </a:p>
+        </p:txBody>
+      </p:sp>
+      <p:sp>
+        <p:nvSpPr>
+          <p:cNvPr id="15" name="TextBox 14"/>
+          <p:cNvSpPr txBox="1"/>
+          <p:nvPr/>
+        </p:nvSpPr>
+        <p:spPr>
+          <a:xfrm>
+            <a:off x="1463040" y="3941063"/>
+            <a:ext cx="4572000" cy="274320"/>
+          </a:xfrm>
+          <a:prstGeom prst="rect">
+            <a:avLst/>
+          </a:prstGeom>
+          <a:noFill/>
+        </p:spPr>
+        <p:txBody>
+          <a:bodyPr wrap="square" anchor="ctr" lIns="0" tIns="0" rIns="0" bIns="0">
+            <a:noAutofit/>
+          </a:bodyPr>
+          <a:lstStyle/>
+          <a:p>
+            <a:pPr algn="l" latinLnBrk="0">
+              <a:lnSpc>
+                <a:spcPct val="100000"/>
+              </a:lnSpc>
+              <a:spcBef>
+                <a:spcPts val="0"/>
+              </a:spcBef>
+              <a:spcAft>
+                <a:spcPts val="0"/>
+              </a:spcAft>
+            </a:pPr>
+            <a:r>
+              <a:rPr sz="1300" b="1">
+                <a:solidFill>
+                  <a:srgbClr val="16202A"/>
+                </a:solidFill>
+                <a:latin typeface="Microsoft YaHei"/>
+                <a:ea typeface="Microsoft YaHei"/>
+                <a:cs typeface="Microsoft YaHei"/>
+              </a:rPr>
+              <a:t>对数值</a:t>
+            </a:r>
+          </a:p>
+        </p:txBody>
+      </p:sp>
+      <p:sp>
+        <p:nvSpPr>
+          <p:cNvPr id="16" name="TextBox 15"/>
+          <p:cNvSpPr txBox="1"/>
+          <p:nvPr/>
+        </p:nvSpPr>
+        <p:spPr>
+          <a:xfrm>
+            <a:off x="1463040" y="4215383"/>
+            <a:ext cx="4572000" cy="256032"/>
+          </a:xfrm>
+          <a:prstGeom prst="rect">
+            <a:avLst/>
+          </a:prstGeom>
+          <a:noFill/>
+        </p:spPr>
+        <p:txBody>
+          <a:bodyPr wrap="square" anchor="ctr" lIns="0" tIns="0" rIns="0" bIns="0">
+            <a:noAutofit/>
+          </a:bodyPr>
+          <a:lstStyle/>
+          <a:p>
+            <a:pPr algn="l" latinLnBrk="0">
+              <a:lnSpc>
+                <a:spcPct val="100000"/>
+              </a:lnSpc>
+              <a:spcBef>
+                <a:spcPts val="0"/>
+              </a:spcBef>
+              <a:spcAft>
+                <a:spcPts val="0"/>
+              </a:spcAft>
+            </a:pPr>
+            <a:r>
+              <a:rPr sz="1050" b="0">
+                <a:solidFill>
+                  <a:srgbClr val="35424F"/>
+                </a:solidFill>
+                <a:latin typeface="Microsoft YaHei"/>
+                <a:ea typeface="Microsoft YaHei"/>
+                <a:cs typeface="Microsoft YaHei"/>
+              </a:rPr>
+              <a:t>多种形状、精度逐一对 golden</a:t>
+            </a:r>
+          </a:p>
+        </p:txBody>
+      </p:sp>
+      <p:sp>
+        <p:nvSpPr>
+          <p:cNvPr id="17" name="Oval 16"/>
+          <p:cNvSpPr/>
+          <p:nvPr/>
+        </p:nvSpPr>
+        <p:spPr>
+          <a:xfrm>
+            <a:off x="1005840" y="4750308"/>
+            <a:ext cx="310896" cy="310896"/>
+          </a:xfrm>
+          <a:prstGeom prst="ellipse">
+            <a:avLst/>
+          </a:prstGeom>
+          <a:solidFill>
+            <a:srgbClr val="C0612C"/>
+          </a:solidFill>
+          <a:ln>
+            <a:noFill/>
+          </a:ln>
+        </p:spPr>
+        <p:txBody>
+          <a:bodyPr rtlCol="0" anchor="ctr" wrap="square" lIns="0" tIns="0" rIns="0" bIns="0">
+            <a:noAutofit/>
+          </a:bodyPr>
+          <a:lstStyle/>
           <a:p>
             <a:pPr algn="ctr" latinLnBrk="0">
               <a:lnSpc>
@@ -4163,11 +4387,58 @@
                 <a:spcPts val="0"/>
               </a:spcBef>
               <a:spcAft>
-                <a:spcPts val="600"/>
+                <a:spcPts val="0"/>
               </a:spcAft>
             </a:pPr>
             <a:r>
-              <a:rPr sz="1400" b="1">
+              <a:rPr sz="1100" b="1">
+                <a:solidFill>
+                  <a:srgbClr val="FFFFFF"/>
+                </a:solidFill>
+                <a:latin typeface="Arial"/>
+                <a:ea typeface="Microsoft YaHei"/>
+                <a:cs typeface="Microsoft YaHei"/>
+              </a:rPr>
+              <a:t>4</a:t>
+            </a:r>
+          </a:p>
+        </p:txBody>
+      </p:sp>
+      <p:sp>
+        <p:nvSpPr>
+          <p:cNvPr id="18" name="TextBox 17"/>
+          <p:cNvSpPr txBox="1"/>
+          <p:nvPr/>
+        </p:nvSpPr>
+        <p:spPr>
+          <a:xfrm>
+            <a:off x="1463040" y="4713732"/>
+            <a:ext cx="4572000" cy="274320"/>
+          </a:xfrm>
+          <a:prstGeom prst="rect">
+            <a:avLst/>
+          </a:prstGeom>
+          <a:noFill/>
+        </p:spPr>
+        <p:txBody>
+          <a:bodyPr wrap="square" anchor="ctr" lIns="0" tIns="0" rIns="0" bIns="0">
+            <a:noAutofit/>
+          </a:bodyPr>
+          <a:lstStyle/>
+          <a:p>
+            <a:pPr algn="l" latinLnBrk="0">
+              <a:lnSpc>
+                <a:spcPct val="100000"/>
+              </a:lnSpc>
+              <a:spcBef>
+                <a:spcPts val="0"/>
+              </a:spcBef>
+              <a:spcAft>
+                <a:spcPts val="0"/>
+              </a:spcAft>
+            </a:pPr>
+            <a:r>
+              <a:rPr sz="1300" b="1">
                 <a:solidFill>
                   <a:srgbClr val="16202A"/>
                 </a:solidFill>
@@ -4175,13 +4446,36 @@
                 <a:ea typeface="Microsoft YaHei"/>
                 <a:cs typeface="Microsoft YaHei"/>
               </a:rPr>
-              <a:t>测延迟</a:t>
-            </a:r>
-          </a:p>
-          <a:p>
-            <a:pPr algn="ctr" latinLnBrk="0">
+              <a:t>测性能</a:t>
+            </a:r>
+          </a:p>
+        </p:txBody>
+      </p:sp>
+      <p:sp>
+        <p:nvSpPr>
+          <p:cNvPr id="19" name="TextBox 18"/>
+          <p:cNvSpPr txBox="1"/>
+          <p:nvPr/>
+        </p:nvSpPr>
+        <p:spPr>
+          <a:xfrm>
+            <a:off x="1463040" y="4988052"/>
+            <a:ext cx="4572000" cy="256032"/>
+          </a:xfrm>
+          <a:prstGeom prst="rect">
+            <a:avLst/>
+          </a:prstGeom>
+          <a:noFill/>
+        </p:spPr>
+        <p:txBody>
+          <a:bodyPr wrap="square" anchor="ctr" lIns="0" tIns="0" rIns="0" bIns="0">
+            <a:noAutofit/>
+          </a:bodyPr>
+          <a:lstStyle/>
+          <a:p>
+            <a:pPr algn="l" latinLnBrk="0">
               <a:lnSpc>
-                <a:spcPct val="114000"/>
+                <a:spcPct val="100000"/>
               </a:lnSpc>
               <a:spcBef>
                 <a:spcPts val="0"/>
@@ -4199,58 +4493,34 @@
                 <a:ea typeface="Microsoft YaHei"/>
                 <a:cs typeface="Microsoft YaHei"/>
               </a:rPr>
-              <a:t>取中位延迟，比理论上限</a:t>
-            </a:r>
-          </a:p>
-        </p:txBody>
-      </p:sp>
-      <p:cxnSp>
-        <p:nvCxnSpPr>
-          <p:cNvPr id="11" name="Connector 10"/>
-          <p:cNvCxnSpPr/>
-          <p:nvPr/>
-        </p:nvCxnSpPr>
-        <p:spPr>
-          <a:xfrm>
-            <a:off x="7135794" y="2478024"/>
-            <a:ext cx="201168" cy="0"/>
-          </a:xfrm>
-          <a:prstGeom prst="line">
-            <a:avLst/>
-          </a:prstGeom>
-          <a:ln w="19050">
-            <a:solidFill>
-              <a:srgbClr val="C0612C"/>
-            </a:solidFill>
-            <a:tailEnd type="triangle" w="med" len="med"/>
-          </a:ln>
-        </p:spPr>
-      </p:cxnSp>
-      <p:sp>
-        <p:nvSpPr>
-          <p:cNvPr id="12" name="Rectangle 11"/>
+              <a:t>取中位延迟，和理论上限比</a:t>
+            </a:r>
+          </a:p>
+        </p:txBody>
+      </p:sp>
+      <p:sp>
+        <p:nvSpPr>
+          <p:cNvPr id="20" name="Oval 19"/>
           <p:cNvSpPr/>
           <p:nvPr/>
         </p:nvSpPr>
         <p:spPr>
           <a:xfrm>
-            <a:off x="9672888" y="1874519"/>
-            <a:ext cx="1970166" cy="1207008"/>
-          </a:xfrm>
-          <a:prstGeom prst="rect">
+            <a:off x="1005840" y="5522976"/>
+            <a:ext cx="310896" cy="310896"/>
+          </a:xfrm>
+          <a:prstGeom prst="ellipse">
             <a:avLst/>
           </a:prstGeom>
           <a:solidFill>
-            <a:srgbClr val="FFFFFF"/>
+            <a:srgbClr val="C0612C"/>
           </a:solidFill>
-          <a:ln w="12700">
-            <a:solidFill>
-              <a:srgbClr val="C0612C"/>
-            </a:solidFill>
+          <a:ln>
+            <a:noFill/>
           </a:ln>
         </p:spPr>
         <p:txBody>
-          <a:bodyPr rtlCol="0" anchor="ctr" wrap="square" lIns="128016" tIns="91440" rIns="128016" bIns="91440">
+          <a:bodyPr rtlCol="0" anchor="ctr" wrap="square" lIns="0" tIns="0" rIns="0" bIns="0">
             <a:noAutofit/>
           </a:bodyPr>
           <a:lstStyle/>
@@ -4263,23 +4533,46 @@
                 <a:spcPts val="0"/>
               </a:spcBef>
               <a:spcAft>
-                <a:spcPts val="500"/>
+                <a:spcPts val="0"/>
               </a:spcAft>
             </a:pPr>
             <a:r>
-              <a:rPr sz="950" b="1">
-                <a:solidFill>
-                  <a:srgbClr val="C0612C"/>
-                </a:solidFill>
-                <a:latin typeface="Consolas"/>
+              <a:rPr sz="1100" b="1">
+                <a:solidFill>
+                  <a:srgbClr val="FFFFFF"/>
+                </a:solidFill>
+                <a:latin typeface="Arial"/>
                 <a:ea typeface="Microsoft YaHei"/>
                 <a:cs typeface="Microsoft YaHei"/>
               </a:rPr>
-              <a:t>SIM</a:t>
-            </a:r>
-          </a:p>
-          <a:p>
-            <a:pPr algn="ctr" latinLnBrk="0">
+              <a:t>5</a:t>
+            </a:r>
+          </a:p>
+        </p:txBody>
+      </p:sp>
+      <p:sp>
+        <p:nvSpPr>
+          <p:cNvPr id="21" name="TextBox 20"/>
+          <p:cNvSpPr txBox="1"/>
+          <p:nvPr/>
+        </p:nvSpPr>
+        <p:spPr>
+          <a:xfrm>
+            <a:off x="1463040" y="5486400"/>
+            <a:ext cx="4572000" cy="274320"/>
+          </a:xfrm>
+          <a:prstGeom prst="rect">
+            <a:avLst/>
+          </a:prstGeom>
+          <a:noFill/>
+        </p:spPr>
+        <p:txBody>
+          <a:bodyPr wrap="square" anchor="ctr" lIns="0" tIns="0" rIns="0" bIns="0">
+            <a:noAutofit/>
+          </a:bodyPr>
+          <a:lstStyle/>
+          <a:p>
+            <a:pPr algn="l" latinLnBrk="0">
               <a:lnSpc>
                 <a:spcPct val="100000"/>
               </a:lnSpc>
@@ -4287,11 +4580,11 @@
                 <a:spcPts val="0"/>
               </a:spcBef>
               <a:spcAft>
-                <a:spcPts val="600"/>
+                <a:spcPts val="0"/>
               </a:spcAft>
             </a:pPr>
             <a:r>
-              <a:rPr sz="1400" b="1">
+              <a:rPr sz="1300" b="1">
                 <a:solidFill>
                   <a:srgbClr val="16202A"/>
                 </a:solidFill>
@@ -4299,13 +4592,36 @@
                 <a:ea typeface="Microsoft YaHei"/>
                 <a:cs typeface="Microsoft YaHei"/>
               </a:rPr>
-              <a:t>结构化反馈</a:t>
-            </a:r>
-          </a:p>
-          <a:p>
-            <a:pPr algn="ctr" latinLnBrk="0">
+              <a:t>给反馈</a:t>
+            </a:r>
+          </a:p>
+        </p:txBody>
+      </p:sp>
+      <p:sp>
+        <p:nvSpPr>
+          <p:cNvPr id="22" name="TextBox 21"/>
+          <p:cNvSpPr txBox="1"/>
+          <p:nvPr/>
+        </p:nvSpPr>
+        <p:spPr>
+          <a:xfrm>
+            <a:off x="1463040" y="5760720"/>
+            <a:ext cx="4572000" cy="256032"/>
+          </a:xfrm>
+          <a:prstGeom prst="rect">
+            <a:avLst/>
+          </a:prstGeom>
+          <a:noFill/>
+        </p:spPr>
+        <p:txBody>
+          <a:bodyPr wrap="square" anchor="ctr" lIns="0" tIns="0" rIns="0" bIns="0">
+            <a:noAutofit/>
+          </a:bodyPr>
+          <a:lstStyle/>
+          <a:p>
+            <a:pPr algn="l" latinLnBrk="0">
               <a:lnSpc>
-                <a:spcPct val="114000"/>
+                <a:spcPct val="100000"/>
               </a:lnSpc>
               <a:spcBef>
                 <a:spcPts val="0"/>
@@ -4323,43 +4639,21 @@
                 <a:ea typeface="Microsoft YaHei"/>
                 <a:cs typeface="Microsoft YaHei"/>
               </a:rPr>
-              <a:t>打分，并指出慢在哪</a:t>
-            </a:r>
-          </a:p>
-        </p:txBody>
-      </p:sp>
-      <p:cxnSp>
-        <p:nvCxnSpPr>
-          <p:cNvPr id="13" name="Connector 12"/>
-          <p:cNvCxnSpPr/>
-          <p:nvPr/>
-        </p:nvCxnSpPr>
-        <p:spPr>
-          <a:xfrm>
-            <a:off x="9416856" y="2478024"/>
-            <a:ext cx="201168" cy="0"/>
-          </a:xfrm>
-          <a:prstGeom prst="line">
-            <a:avLst/>
-          </a:prstGeom>
-          <a:ln w="19050">
-            <a:solidFill>
-              <a:srgbClr val="C0612C"/>
-            </a:solidFill>
-            <a:tailEnd type="triangle" w="med" len="med"/>
-          </a:ln>
-        </p:spPr>
-      </p:cxnSp>
-      <p:sp>
-        <p:nvSpPr>
-          <p:cNvPr id="14" name="Freeform 13"/>
+              <a:t>打分、指出慢在哪，带进下一轮</a:t>
+            </a:r>
+          </a:p>
+        </p:txBody>
+      </p:sp>
+      <p:sp>
+        <p:nvSpPr>
+          <p:cNvPr id="23" name="Freeform 22"/>
           <p:cNvSpPr/>
           <p:nvPr/>
         </p:nvSpPr>
         <p:spPr>
           <a:xfrm>
-            <a:off x="1533723" y="3081528"/>
-            <a:ext cx="9124249" cy="256032"/>
+            <a:off x="594360" y="2587752"/>
+            <a:ext cx="566928" cy="3337560"/>
           </a:xfrm>
           <a:custGeom>
             <a:avLst/>
@@ -4368,18 +4662,18 @@
             <a:cxnLst/>
             <a:rect l="l" t="t" r="r" b="b"/>
             <a:pathLst>
-              <a:path w="9124249" h="256032">
+              <a:path w="566928" h="3337560">
                 <a:moveTo>
-                  <a:pt x="9124249" y="0"/>
+                  <a:pt x="566928" y="3337560"/>
                 </a:moveTo>
                 <a:lnTo>
-                  <a:pt x="9124249" y="256032"/>
-                </a:lnTo>
-                <a:lnTo>
-                  <a:pt x="0" y="256032"/>
+                  <a:pt x="0" y="3337560"/>
                 </a:lnTo>
                 <a:lnTo>
                   <a:pt x="0" y="0"/>
+                </a:lnTo>
+                <a:lnTo>
+                  <a:pt x="374904" y="0"/>
                 </a:lnTo>
               </a:path>
             </a:pathLst>
@@ -4402,108 +4696,14 @@
       </p:sp>
       <p:sp>
         <p:nvSpPr>
-          <p:cNvPr id="15" name="TextBox 14"/>
-          <p:cNvSpPr txBox="1"/>
-          <p:nvPr/>
-        </p:nvSpPr>
-        <p:spPr>
-          <a:xfrm>
-            <a:off x="1734891" y="3374136"/>
-            <a:ext cx="4114800" cy="274320"/>
-          </a:xfrm>
-          <a:prstGeom prst="rect">
-            <a:avLst/>
-          </a:prstGeom>
-          <a:noFill/>
-        </p:spPr>
-        <p:txBody>
-          <a:bodyPr wrap="square" anchor="ctr" lIns="0" tIns="0" rIns="0" bIns="0">
-            <a:noAutofit/>
-          </a:bodyPr>
-          <a:lstStyle/>
-          <a:p>
-            <a:pPr algn="l" latinLnBrk="0">
-              <a:lnSpc>
-                <a:spcPct val="100000"/>
-              </a:lnSpc>
-              <a:spcBef>
-                <a:spcPts val="0"/>
-              </a:spcBef>
-              <a:spcAft>
-                <a:spcPts val="0"/>
-              </a:spcAft>
-            </a:pPr>
-            <a:r>
-              <a:rPr sz="1050" b="0">
-                <a:solidFill>
-                  <a:srgbClr val="66727F"/>
-                </a:solidFill>
-                <a:latin typeface="Microsoft YaHei"/>
-                <a:ea typeface="Microsoft YaHei"/>
-                <a:cs typeface="Microsoft YaHei"/>
-              </a:rPr>
-              <a:t>每轮改了什么、前后数据、结论都要落盘，写不进去这轮就算失败</a:t>
-            </a:r>
-          </a:p>
-        </p:txBody>
-      </p:sp>
-      <p:sp>
-        <p:nvSpPr>
-          <p:cNvPr id="16" name="TextBox 15"/>
-          <p:cNvSpPr txBox="1"/>
-          <p:nvPr/>
-        </p:nvSpPr>
-        <p:spPr>
-          <a:xfrm>
-            <a:off x="6085972" y="3374136"/>
-            <a:ext cx="4572000" cy="274320"/>
-          </a:xfrm>
-          <a:prstGeom prst="rect">
-            <a:avLst/>
-          </a:prstGeom>
-          <a:noFill/>
-        </p:spPr>
-        <p:txBody>
-          <a:bodyPr wrap="square" anchor="ctr" lIns="0" tIns="0" rIns="0" bIns="0">
-            <a:noAutofit/>
-          </a:bodyPr>
-          <a:lstStyle/>
-          <a:p>
-            <a:pPr algn="r" latinLnBrk="0">
-              <a:lnSpc>
-                <a:spcPct val="100000"/>
-              </a:lnSpc>
-              <a:spcBef>
-                <a:spcPts val="0"/>
-              </a:spcBef>
-              <a:spcAft>
-                <a:spcPts val="0"/>
-              </a:spcAft>
-            </a:pPr>
-            <a:r>
-              <a:rPr sz="1050" b="0">
-                <a:solidFill>
-                  <a:srgbClr val="66727F"/>
-                </a:solidFill>
-                <a:latin typeface="Microsoft YaHei"/>
-                <a:ea typeface="Microsoft YaHei"/>
-                <a:cs typeface="Microsoft YaHei"/>
-              </a:rPr>
-              <a:t>入口：从一句需求开始，或从现有实现反推规格、第 0 轮当基线</a:t>
-            </a:r>
-          </a:p>
-        </p:txBody>
-      </p:sp>
-      <p:sp>
-        <p:nvSpPr>
-          <p:cNvPr id="17" name="Rectangle 16"/>
+          <p:cNvPr id="24" name="Rectangle 23"/>
           <p:cNvSpPr/>
           <p:nvPr/>
         </p:nvSpPr>
         <p:spPr>
           <a:xfrm>
-            <a:off x="548640" y="3785615"/>
-            <a:ext cx="5410047" cy="1645920"/>
+            <a:off x="5897880" y="2066543"/>
+            <a:ext cx="5745175" cy="3785616"/>
           </a:xfrm>
           <a:prstGeom prst="rect">
             <a:avLst/>
@@ -4525,14 +4725,14 @@
       </p:sp>
       <p:sp>
         <p:nvSpPr>
-          <p:cNvPr id="18" name="TextBox 17"/>
+          <p:cNvPr id="25" name="TextBox 24"/>
           <p:cNvSpPr txBox="1"/>
           <p:nvPr/>
         </p:nvSpPr>
         <p:spPr>
           <a:xfrm>
-            <a:off x="786384" y="3931920"/>
-            <a:ext cx="4952847" cy="292608"/>
+            <a:off x="6135624" y="2212848"/>
+            <a:ext cx="5287975" cy="292608"/>
           </a:xfrm>
           <a:prstGeom prst="rect">
             <a:avLst/>
@@ -4565,134 +4765,38 @@
                 <a:ea typeface="Microsoft YaHei"/>
                 <a:cs typeface="Microsoft YaHei"/>
               </a:rPr>
-              <a:t>硬件解耦 · 换一款芯片只动一层</a:t>
-            </a:r>
-          </a:p>
-        </p:txBody>
-      </p:sp>
-      <p:sp>
-        <p:nvSpPr>
-          <p:cNvPr id="19" name="TextBox 18"/>
-          <p:cNvSpPr txBox="1"/>
-          <p:nvPr/>
-        </p:nvSpPr>
-        <p:spPr>
-          <a:xfrm>
-            <a:off x="786384" y="4261104"/>
-            <a:ext cx="4934559" cy="731520"/>
-          </a:xfrm>
-          <a:prstGeom prst="rect">
-            <a:avLst/>
-          </a:prstGeom>
-          <a:noFill/>
-        </p:spPr>
-        <p:txBody>
-          <a:bodyPr wrap="square" anchor="t" lIns="0" tIns="0" rIns="0" bIns="0">
-            <a:noAutofit/>
-          </a:bodyPr>
-          <a:lstStyle/>
-          <a:p>
-            <a:pPr algn="l" latinLnBrk="0" marL="146304" indent="-146304">
-              <a:lnSpc>
-                <a:spcPct val="100000"/>
-              </a:lnSpc>
-              <a:spcBef>
-                <a:spcPts val="0"/>
-              </a:spcBef>
-              <a:spcAft>
-                <a:spcPts val="200"/>
-              </a:spcAft>
-              <a:buClr>
-                <a:srgbClr val="C0612C"/>
-              </a:buClr>
-              <a:buFont typeface="Arial"/>
-              <a:buChar char="•"/>
-            </a:pPr>
-            <a:r>
-              <a:rPr sz="1100" b="0">
-                <a:solidFill>
-                  <a:srgbClr val="35424F"/>
+              <a:t>效果</a:t>
+            </a:r>
+            <a:r>
+              <a:rPr sz="1050" b="0">
+                <a:solidFill>
+                  <a:srgbClr val="8C96A1"/>
                 </a:solidFill>
                 <a:latin typeface="Microsoft YaHei"/>
                 <a:ea typeface="Microsoft YaHei"/>
                 <a:cs typeface="Microsoft YaHei"/>
               </a:rPr>
-              <a:t>生成和评测完全不碰硬件，只认四个接口</a:t>
-            </a:r>
-          </a:p>
-          <a:p>
-            <a:pPr algn="l" latinLnBrk="0">
-              <a:lnSpc>
-                <a:spcPct val="100000"/>
-              </a:lnSpc>
-              <a:spcBef>
-                <a:spcPts val="0"/>
-              </a:spcBef>
-              <a:spcAft>
-                <a:spcPts val="500"/>
-              </a:spcAft>
-            </a:pPr>
-            <a:r>
-              <a:rPr sz="1050" b="0">
-                <a:solidFill>
-                  <a:srgbClr val="66727F"/>
-                </a:solidFill>
-                <a:latin typeface="Microsoft YaHei"/>
-                <a:ea typeface="Microsoft YaHei"/>
-                <a:cs typeface="Microsoft YaHei"/>
-              </a:rPr>
-              <a:t>　编译、运行、采性能、算理论上限（roofline）</a:t>
-            </a:r>
-          </a:p>
-          <a:p>
-            <a:pPr algn="l" latinLnBrk="0" marL="146304" indent="-146304">
-              <a:lnSpc>
-                <a:spcPct val="100000"/>
-              </a:lnSpc>
-              <a:spcBef>
-                <a:spcPts val="0"/>
-              </a:spcBef>
-              <a:spcAft>
-                <a:spcPts val="0"/>
-              </a:spcAft>
-              <a:buClr>
-                <a:srgbClr val="C0612C"/>
-              </a:buClr>
-              <a:buFont typeface="Arial"/>
-              <a:buChar char="•"/>
-            </a:pPr>
-            <a:r>
-              <a:rPr sz="1100" b="0">
-                <a:solidFill>
-                  <a:srgbClr val="35424F"/>
-                </a:solidFill>
-                <a:latin typeface="Microsoft YaHei"/>
-                <a:ea typeface="Microsoft YaHei"/>
-                <a:cs typeface="Microsoft YaHei"/>
-              </a:rPr>
-              <a:t>换芯片 = 照这四个接口写一个后端 + 填一张硬件说明卡</a:t>
-            </a:r>
-          </a:p>
-        </p:txBody>
-      </p:sp>
-      <p:sp>
-        <p:nvSpPr>
-          <p:cNvPr id="20" name="Rounded Rectangle 19"/>
+              <a:t>　数字待补</a:t>
+            </a:r>
+          </a:p>
+        </p:txBody>
+      </p:sp>
+      <p:sp>
+        <p:nvSpPr>
+          <p:cNvPr id="26" name="Rectangle 25"/>
           <p:cNvSpPr/>
           <p:nvPr/>
         </p:nvSpPr>
         <p:spPr>
           <a:xfrm>
-            <a:off x="786384" y="5047488"/>
-            <a:ext cx="2286000" cy="274320"/>
-          </a:xfrm>
-          <a:prstGeom prst="roundRect">
-            <a:avLst>
-              <a:gd name="adj" fmla="val 50000"/>
-            </a:avLst>
+            <a:off x="6135624" y="2688336"/>
+            <a:ext cx="2552547" cy="1188720"/>
+          </a:xfrm>
+          <a:prstGeom prst="rect">
+            <a:avLst/>
           </a:prstGeom>
           <a:solidFill>
-            <a:srgbClr val="F6F7F9"/>
+            <a:srgbClr val="FFFFFF"/>
           </a:solidFill>
           <a:ln w="9525">
             <a:solidFill>
@@ -4710,43 +4814,14 @@
       </p:sp>
       <p:sp>
         <p:nvSpPr>
-          <p:cNvPr id="21" name="Oval 20"/>
-          <p:cNvSpPr/>
-          <p:nvPr/>
-        </p:nvSpPr>
-        <p:spPr>
-          <a:xfrm>
-            <a:off x="886968" y="5129783"/>
-            <a:ext cx="109728" cy="109728"/>
-          </a:xfrm>
-          <a:prstGeom prst="ellipse">
-            <a:avLst/>
-          </a:prstGeom>
-          <a:solidFill>
-            <a:srgbClr val="C0612C"/>
-          </a:solidFill>
-          <a:ln>
-            <a:noFill/>
-          </a:ln>
-        </p:spPr>
-        <p:txBody>
-          <a:bodyPr rtlCol="0" anchor="ctr"/>
-          <a:lstStyle/>
-          <a:p>
-            <a:pPr algn="ctr"/>
-          </a:p>
-        </p:txBody>
-      </p:sp>
-      <p:sp>
-        <p:nvSpPr>
-          <p:cNvPr id="22" name="TextBox 21"/>
+          <p:cNvPr id="27" name="TextBox 26"/>
           <p:cNvSpPr txBox="1"/>
           <p:nvPr/>
         </p:nvSpPr>
         <p:spPr>
           <a:xfrm>
-            <a:off x="1060704" y="5047488"/>
-            <a:ext cx="1993392" cy="274320"/>
+            <a:off x="6135624" y="2926080"/>
+            <a:ext cx="2552547" cy="457200"/>
           </a:xfrm>
           <a:prstGeom prst="rect">
             <a:avLst/>
@@ -4759,7 +4834,7 @@
           </a:bodyPr>
           <a:lstStyle/>
           <a:p>
-            <a:pPr algn="l" latinLnBrk="0">
+            <a:pPr algn="ctr" latinLnBrk="0">
               <a:lnSpc>
                 <a:spcPct val="100000"/>
               </a:lnSpc>
@@ -4771,7 +4846,54 @@
               </a:spcAft>
             </a:pPr>
             <a:r>
-              <a:rPr sz="1050" b="0">
+              <a:rPr sz="2800" b="1">
+                <a:solidFill>
+                  <a:srgbClr val="C5CCD4"/>
+                </a:solidFill>
+                <a:latin typeface="Arial"/>
+                <a:ea typeface="Microsoft YaHei"/>
+                <a:cs typeface="Microsoft YaHei"/>
+              </a:rPr>
+              <a:t>—</a:t>
+            </a:r>
+          </a:p>
+        </p:txBody>
+      </p:sp>
+      <p:sp>
+        <p:nvSpPr>
+          <p:cNvPr id="28" name="TextBox 27"/>
+          <p:cNvSpPr txBox="1"/>
+          <p:nvPr/>
+        </p:nvSpPr>
+        <p:spPr>
+          <a:xfrm>
+            <a:off x="6135624" y="3438144"/>
+            <a:ext cx="2552547" cy="274320"/>
+          </a:xfrm>
+          <a:prstGeom prst="rect">
+            <a:avLst/>
+          </a:prstGeom>
+          <a:noFill/>
+        </p:spPr>
+        <p:txBody>
+          <a:bodyPr wrap="square" anchor="ctr" lIns="0" tIns="0" rIns="0" bIns="0">
+            <a:noAutofit/>
+          </a:bodyPr>
+          <a:lstStyle/>
+          <a:p>
+            <a:pPr algn="ctr" latinLnBrk="0">
+              <a:lnSpc>
+                <a:spcPct val="100000"/>
+              </a:lnSpc>
+              <a:spcBef>
+                <a:spcPts val="0"/>
+              </a:spcBef>
+              <a:spcAft>
+                <a:spcPts val="0"/>
+              </a:spcAft>
+            </a:pPr>
+            <a:r>
+              <a:rPr sz="1100" b="0">
                 <a:solidFill>
                   <a:srgbClr val="35424F"/>
                 </a:solidFill>
@@ -4779,29 +4901,27 @@
                 <a:ea typeface="Microsoft YaHei"/>
                 <a:cs typeface="Microsoft YaHei"/>
               </a:rPr>
-              <a:t>没有硬件也能跑通整条闭环</a:t>
-            </a:r>
-          </a:p>
-        </p:txBody>
-      </p:sp>
-      <p:sp>
-        <p:nvSpPr>
-          <p:cNvPr id="23" name="Rounded Rectangle 22"/>
+              <a:t>已达标算子数</a:t>
+            </a:r>
+          </a:p>
+        </p:txBody>
+      </p:sp>
+      <p:sp>
+        <p:nvSpPr>
+          <p:cNvPr id="29" name="Rectangle 28"/>
           <p:cNvSpPr/>
           <p:nvPr/>
         </p:nvSpPr>
         <p:spPr>
           <a:xfrm>
-            <a:off x="3182112" y="5047488"/>
-            <a:ext cx="1417320" cy="274320"/>
-          </a:xfrm>
-          <a:prstGeom prst="roundRect">
-            <a:avLst>
-              <a:gd name="adj" fmla="val 50000"/>
-            </a:avLst>
+            <a:off x="8852763" y="2688336"/>
+            <a:ext cx="2552547" cy="1188720"/>
+          </a:xfrm>
+          <a:prstGeom prst="rect">
+            <a:avLst/>
           </a:prstGeom>
           <a:solidFill>
-            <a:srgbClr val="F6F7F9"/>
+            <a:srgbClr val="FFFFFF"/>
           </a:solidFill>
           <a:ln w="9525">
             <a:solidFill>
@@ -4819,43 +4939,14 @@
       </p:sp>
       <p:sp>
         <p:nvSpPr>
-          <p:cNvPr id="24" name="Oval 23"/>
-          <p:cNvSpPr/>
-          <p:nvPr/>
-        </p:nvSpPr>
-        <p:spPr>
-          <a:xfrm>
-            <a:off x="3282696" y="5129783"/>
-            <a:ext cx="109728" cy="109728"/>
-          </a:xfrm>
-          <a:prstGeom prst="ellipse">
-            <a:avLst/>
-          </a:prstGeom>
-          <a:solidFill>
-            <a:srgbClr val="C0612C"/>
-          </a:solidFill>
-          <a:ln>
-            <a:noFill/>
-          </a:ln>
-        </p:spPr>
-        <p:txBody>
-          <a:bodyPr rtlCol="0" anchor="ctr"/>
-          <a:lstStyle/>
-          <a:p>
-            <a:pPr algn="ctr"/>
-          </a:p>
-        </p:txBody>
-      </p:sp>
-      <p:sp>
-        <p:nvSpPr>
-          <p:cNvPr id="25" name="TextBox 24"/>
+          <p:cNvPr id="30" name="TextBox 29"/>
           <p:cNvSpPr txBox="1"/>
           <p:nvPr/>
         </p:nvSpPr>
         <p:spPr>
           <a:xfrm>
-            <a:off x="3456432" y="5047488"/>
-            <a:ext cx="1124712" cy="274320"/>
+            <a:off x="8852763" y="2926080"/>
+            <a:ext cx="2552547" cy="457200"/>
           </a:xfrm>
           <a:prstGeom prst="rect">
             <a:avLst/>
@@ -4868,7 +4959,7 @@
           </a:bodyPr>
           <a:lstStyle/>
           <a:p>
-            <a:pPr algn="l" latinLnBrk="0">
+            <a:pPr algn="ctr" latinLnBrk="0">
               <a:lnSpc>
                 <a:spcPct val="100000"/>
               </a:lnSpc>
@@ -4880,7 +4971,54 @@
               </a:spcAft>
             </a:pPr>
             <a:r>
-              <a:rPr sz="1050" b="0">
+              <a:rPr sz="2800" b="1">
+                <a:solidFill>
+                  <a:srgbClr val="C5CCD4"/>
+                </a:solidFill>
+                <a:latin typeface="Arial"/>
+                <a:ea typeface="Microsoft YaHei"/>
+                <a:cs typeface="Microsoft YaHei"/>
+              </a:rPr>
+              <a:t>—</a:t>
+            </a:r>
+          </a:p>
+        </p:txBody>
+      </p:sp>
+      <p:sp>
+        <p:nvSpPr>
+          <p:cNvPr id="31" name="TextBox 30"/>
+          <p:cNvSpPr txBox="1"/>
+          <p:nvPr/>
+        </p:nvSpPr>
+        <p:spPr>
+          <a:xfrm>
+            <a:off x="8852763" y="3438144"/>
+            <a:ext cx="2552547" cy="274320"/>
+          </a:xfrm>
+          <a:prstGeom prst="rect">
+            <a:avLst/>
+          </a:prstGeom>
+          <a:noFill/>
+        </p:spPr>
+        <p:txBody>
+          <a:bodyPr wrap="square" anchor="ctr" lIns="0" tIns="0" rIns="0" bIns="0">
+            <a:noAutofit/>
+          </a:bodyPr>
+          <a:lstStyle/>
+          <a:p>
+            <a:pPr algn="ctr" latinLnBrk="0">
+              <a:lnSpc>
+                <a:spcPct val="100000"/>
+              </a:lnSpc>
+              <a:spcBef>
+                <a:spcPts val="0"/>
+              </a:spcBef>
+              <a:spcAft>
+                <a:spcPts val="0"/>
+              </a:spcAft>
+            </a:pPr>
+            <a:r>
+              <a:rPr sz="1100" b="0">
                 <a:solidFill>
                   <a:srgbClr val="35424F"/>
                 </a:solidFill>
@@ -4888,29 +5026,27 @@
                 <a:ea typeface="Microsoft YaHei"/>
                 <a:cs typeface="Microsoft YaHei"/>
               </a:rPr>
-              <a:t>M100 真机已接</a:t>
-            </a:r>
-          </a:p>
-        </p:txBody>
-      </p:sp>
-      <p:sp>
-        <p:nvSpPr>
-          <p:cNvPr id="26" name="Rounded Rectangle 25"/>
+              <a:t>平均达标轮数</a:t>
+            </a:r>
+          </a:p>
+        </p:txBody>
+      </p:sp>
+      <p:sp>
+        <p:nvSpPr>
+          <p:cNvPr id="32" name="Rectangle 31"/>
           <p:cNvSpPr/>
           <p:nvPr/>
         </p:nvSpPr>
         <p:spPr>
           <a:xfrm>
-            <a:off x="4709160" y="5047488"/>
-            <a:ext cx="1097280" cy="274320"/>
-          </a:xfrm>
-          <a:prstGeom prst="roundRect">
-            <a:avLst>
-              <a:gd name="adj" fmla="val 50000"/>
-            </a:avLst>
+            <a:off x="6135624" y="4023360"/>
+            <a:ext cx="2552547" cy="1188720"/>
+          </a:xfrm>
+          <a:prstGeom prst="rect">
+            <a:avLst/>
           </a:prstGeom>
           <a:solidFill>
-            <a:srgbClr val="F6F7F9"/>
+            <a:srgbClr val="FFFFFF"/>
           </a:solidFill>
           <a:ln w="9525">
             <a:solidFill>
@@ -4928,23 +5064,119 @@
       </p:sp>
       <p:sp>
         <p:nvSpPr>
-          <p:cNvPr id="27" name="Oval 26"/>
+          <p:cNvPr id="33" name="TextBox 32"/>
+          <p:cNvSpPr txBox="1"/>
+          <p:nvPr/>
+        </p:nvSpPr>
+        <p:spPr>
+          <a:xfrm>
+            <a:off x="6135624" y="4261104"/>
+            <a:ext cx="2552547" cy="457200"/>
+          </a:xfrm>
+          <a:prstGeom prst="rect">
+            <a:avLst/>
+          </a:prstGeom>
+          <a:noFill/>
+        </p:spPr>
+        <p:txBody>
+          <a:bodyPr wrap="square" anchor="ctr" lIns="0" tIns="0" rIns="0" bIns="0">
+            <a:noAutofit/>
+          </a:bodyPr>
+          <a:lstStyle/>
+          <a:p>
+            <a:pPr algn="ctr" latinLnBrk="0">
+              <a:lnSpc>
+                <a:spcPct val="100000"/>
+              </a:lnSpc>
+              <a:spcBef>
+                <a:spcPts val="0"/>
+              </a:spcBef>
+              <a:spcAft>
+                <a:spcPts val="0"/>
+              </a:spcAft>
+            </a:pPr>
+            <a:r>
+              <a:rPr sz="2800" b="1">
+                <a:solidFill>
+                  <a:srgbClr val="C5CCD4"/>
+                </a:solidFill>
+                <a:latin typeface="Arial"/>
+                <a:ea typeface="Microsoft YaHei"/>
+                <a:cs typeface="Microsoft YaHei"/>
+              </a:rPr>
+              <a:t>—</a:t>
+            </a:r>
+          </a:p>
+        </p:txBody>
+      </p:sp>
+      <p:sp>
+        <p:nvSpPr>
+          <p:cNvPr id="34" name="TextBox 33"/>
+          <p:cNvSpPr txBox="1"/>
+          <p:nvPr/>
+        </p:nvSpPr>
+        <p:spPr>
+          <a:xfrm>
+            <a:off x="6135624" y="4773168"/>
+            <a:ext cx="2552547" cy="274320"/>
+          </a:xfrm>
+          <a:prstGeom prst="rect">
+            <a:avLst/>
+          </a:prstGeom>
+          <a:noFill/>
+        </p:spPr>
+        <p:txBody>
+          <a:bodyPr wrap="square" anchor="ctr" lIns="0" tIns="0" rIns="0" bIns="0">
+            <a:noAutofit/>
+          </a:bodyPr>
+          <a:lstStyle/>
+          <a:p>
+            <a:pPr algn="ctr" latinLnBrk="0">
+              <a:lnSpc>
+                <a:spcPct val="100000"/>
+              </a:lnSpc>
+              <a:spcBef>
+                <a:spcPts val="0"/>
+              </a:spcBef>
+              <a:spcAft>
+                <a:spcPts val="0"/>
+              </a:spcAft>
+            </a:pPr>
+            <a:r>
+              <a:rPr sz="1100" b="0">
+                <a:solidFill>
+                  <a:srgbClr val="35424F"/>
+                </a:solidFill>
+                <a:latin typeface="Microsoft YaHei"/>
+                <a:ea typeface="Microsoft YaHei"/>
+                <a:cs typeface="Microsoft YaHei"/>
+              </a:rPr>
+              <a:t>相对基线加速</a:t>
+            </a:r>
+          </a:p>
+        </p:txBody>
+      </p:sp>
+      <p:sp>
+        <p:nvSpPr>
+          <p:cNvPr id="35" name="Rectangle 34"/>
           <p:cNvSpPr/>
           <p:nvPr/>
         </p:nvSpPr>
         <p:spPr>
           <a:xfrm>
-            <a:off x="4809744" y="5129783"/>
-            <a:ext cx="109728" cy="109728"/>
-          </a:xfrm>
-          <a:prstGeom prst="ellipse">
+            <a:off x="8852763" y="4023360"/>
+            <a:ext cx="2552547" cy="1188720"/>
+          </a:xfrm>
+          <a:prstGeom prst="rect">
             <a:avLst/>
           </a:prstGeom>
           <a:solidFill>
-            <a:srgbClr val="8C96A1"/>
+            <a:srgbClr val="FFFFFF"/>
           </a:solidFill>
-          <a:ln>
-            <a:noFill/>
+          <a:ln w="9525">
+            <a:solidFill>
+              <a:srgbClr val="DDE2E7"/>
+            </a:solidFill>
           </a:ln>
         </p:spPr>
         <p:txBody>
@@ -4957,14 +5189,108 @@
       </p:sp>
       <p:sp>
         <p:nvSpPr>
-          <p:cNvPr id="28" name="TextBox 27"/>
+          <p:cNvPr id="36" name="TextBox 35"/>
           <p:cNvSpPr txBox="1"/>
           <p:nvPr/>
         </p:nvSpPr>
         <p:spPr>
           <a:xfrm>
-            <a:off x="4983480" y="5047488"/>
-            <a:ext cx="804671" cy="274320"/>
+            <a:off x="8852763" y="4261104"/>
+            <a:ext cx="2552547" cy="457200"/>
+          </a:xfrm>
+          <a:prstGeom prst="rect">
+            <a:avLst/>
+          </a:prstGeom>
+          <a:noFill/>
+        </p:spPr>
+        <p:txBody>
+          <a:bodyPr wrap="square" anchor="ctr" lIns="0" tIns="0" rIns="0" bIns="0">
+            <a:noAutofit/>
+          </a:bodyPr>
+          <a:lstStyle/>
+          <a:p>
+            <a:pPr algn="ctr" latinLnBrk="0">
+              <a:lnSpc>
+                <a:spcPct val="100000"/>
+              </a:lnSpc>
+              <a:spcBef>
+                <a:spcPts val="0"/>
+              </a:spcBef>
+              <a:spcAft>
+                <a:spcPts val="0"/>
+              </a:spcAft>
+            </a:pPr>
+            <a:r>
+              <a:rPr sz="2800" b="1">
+                <a:solidFill>
+                  <a:srgbClr val="C5CCD4"/>
+                </a:solidFill>
+                <a:latin typeface="Arial"/>
+                <a:ea typeface="Microsoft YaHei"/>
+                <a:cs typeface="Microsoft YaHei"/>
+              </a:rPr>
+              <a:t>—</a:t>
+            </a:r>
+          </a:p>
+        </p:txBody>
+      </p:sp>
+      <p:sp>
+        <p:nvSpPr>
+          <p:cNvPr id="37" name="TextBox 36"/>
+          <p:cNvSpPr txBox="1"/>
+          <p:nvPr/>
+        </p:nvSpPr>
+        <p:spPr>
+          <a:xfrm>
+            <a:off x="8852763" y="4773168"/>
+            <a:ext cx="2552547" cy="274320"/>
+          </a:xfrm>
+          <a:prstGeom prst="rect">
+            <a:avLst/>
+          </a:prstGeom>
+          <a:noFill/>
+        </p:spPr>
+        <p:txBody>
+          <a:bodyPr wrap="square" anchor="ctr" lIns="0" tIns="0" rIns="0" bIns="0">
+            <a:noAutofit/>
+          </a:bodyPr>
+          <a:lstStyle/>
+          <a:p>
+            <a:pPr algn="ctr" latinLnBrk="0">
+              <a:lnSpc>
+                <a:spcPct val="100000"/>
+              </a:lnSpc>
+              <a:spcBef>
+                <a:spcPts val="0"/>
+              </a:spcBef>
+              <a:spcAft>
+                <a:spcPts val="0"/>
+              </a:spcAft>
+            </a:pPr>
+            <a:r>
+              <a:rPr sz="1100" b="0">
+                <a:solidFill>
+                  <a:srgbClr val="35424F"/>
+                </a:solidFill>
+                <a:latin typeface="Microsoft YaHei"/>
+                <a:ea typeface="Microsoft YaHei"/>
+                <a:cs typeface="Microsoft YaHei"/>
+              </a:rPr>
+              <a:t>理论上限达成率</a:t>
+            </a:r>
+          </a:p>
+        </p:txBody>
+      </p:sp>
+      <p:sp>
+        <p:nvSpPr>
+          <p:cNvPr id="38" name="TextBox 37"/>
+          <p:cNvSpPr txBox="1"/>
+          <p:nvPr/>
+        </p:nvSpPr>
+        <p:spPr>
+          <a:xfrm>
+            <a:off x="6135624" y="5431536"/>
+            <a:ext cx="5269687" cy="274320"/>
           </a:xfrm>
           <a:prstGeom prst="rect">
             <a:avLst/>
@@ -4991,58 +5317,27 @@
             <a:r>
               <a:rPr sz="1050" b="0">
                 <a:solidFill>
-                  <a:srgbClr val="35424F"/>
+                  <a:srgbClr val="66727F"/>
                 </a:solidFill>
                 <a:latin typeface="Microsoft YaHei"/>
                 <a:ea typeface="Microsoft YaHei"/>
                 <a:cs typeface="Microsoft YaHei"/>
               </a:rPr>
-              <a:t>P800 待接</a:t>
-            </a:r>
-          </a:p>
-        </p:txBody>
-      </p:sp>
-      <p:sp>
-        <p:nvSpPr>
-          <p:cNvPr id="29" name="Rectangle 28"/>
-          <p:cNvSpPr/>
-          <p:nvPr/>
-        </p:nvSpPr>
-        <p:spPr>
-          <a:xfrm>
-            <a:off x="6233007" y="3785615"/>
-            <a:ext cx="5410047" cy="1645920"/>
-          </a:xfrm>
-          <a:prstGeom prst="rect">
-            <a:avLst/>
-          </a:prstGeom>
-          <a:solidFill>
-            <a:srgbClr val="F6F7F9"/>
-          </a:solidFill>
-          <a:ln w="9525">
-            <a:solidFill>
-              <a:srgbClr val="C5CCD4"/>
-            </a:solidFill>
-          </a:ln>
-        </p:spPr>
-        <p:txBody>
-          <a:bodyPr rtlCol="0" anchor="ctr"/>
-          <a:lstStyle/>
-          <a:p>
-            <a:pPr algn="ctr"/>
-          </a:p>
-        </p:txBody>
-      </p:sp>
-      <p:sp>
-        <p:nvSpPr>
-          <p:cNvPr id="30" name="TextBox 29"/>
+              <a:t>口径：真机、生产形状上的实测</a:t>
+            </a:r>
+          </a:p>
+        </p:txBody>
+      </p:sp>
+      <p:sp>
+        <p:nvSpPr>
+          <p:cNvPr id="39" name="TextBox 38"/>
           <p:cNvSpPr txBox="1"/>
           <p:nvPr/>
         </p:nvSpPr>
         <p:spPr>
           <a:xfrm>
-            <a:off x="6470751" y="3931920"/>
-            <a:ext cx="4952847" cy="292608"/>
+            <a:off x="548640" y="6382512"/>
+            <a:ext cx="9905695" cy="256032"/>
           </a:xfrm>
           <a:prstGeom prst="rect">
             <a:avLst/>
@@ -5067,408 +5362,6 @@
               </a:spcAft>
             </a:pPr>
             <a:r>
-              <a:rPr sz="1400" b="1">
-                <a:solidFill>
-                  <a:srgbClr val="16202A"/>
-                </a:solidFill>
-                <a:latin typeface="Microsoft YaHei"/>
-                <a:ea typeface="Microsoft YaHei"/>
-                <a:cs typeface="Microsoft YaHei"/>
-              </a:rPr>
-              <a:t>两条纪律</a:t>
-            </a:r>
-            <a:r>
-              <a:rPr sz="1200" b="1">
-                <a:solidFill>
-                  <a:srgbClr val="66727F"/>
-                </a:solidFill>
-                <a:latin typeface="Microsoft YaHei"/>
-                <a:ea typeface="Microsoft YaHei"/>
-                <a:cs typeface="Microsoft YaHei"/>
-              </a:rPr>
-              <a:t>　怎么保证收益是真的</a:t>
-            </a:r>
-          </a:p>
-        </p:txBody>
-      </p:sp>
-      <p:sp>
-        <p:nvSpPr>
-          <p:cNvPr id="31" name="Oval 30"/>
-          <p:cNvSpPr/>
-          <p:nvPr/>
-        </p:nvSpPr>
-        <p:spPr>
-          <a:xfrm>
-            <a:off x="6470751" y="4334255"/>
-            <a:ext cx="256032" cy="256032"/>
-          </a:xfrm>
-          <a:prstGeom prst="ellipse">
-            <a:avLst/>
-          </a:prstGeom>
-          <a:solidFill>
-            <a:srgbClr val="C0612C"/>
-          </a:solidFill>
-          <a:ln>
-            <a:noFill/>
-          </a:ln>
-        </p:spPr>
-        <p:txBody>
-          <a:bodyPr rtlCol="0" anchor="ctr" wrap="square" lIns="0" tIns="0" rIns="0" bIns="0">
-            <a:noAutofit/>
-          </a:bodyPr>
-          <a:lstStyle/>
-          <a:p>
-            <a:pPr algn="ctr" latinLnBrk="0">
-              <a:lnSpc>
-                <a:spcPct val="100000"/>
-              </a:lnSpc>
-              <a:spcBef>
-                <a:spcPts val="0"/>
-              </a:spcBef>
-              <a:spcAft>
-                <a:spcPts val="0"/>
-              </a:spcAft>
-            </a:pPr>
-            <a:r>
-              <a:rPr sz="1050" b="1">
-                <a:solidFill>
-                  <a:srgbClr val="FFFFFF"/>
-                </a:solidFill>
-                <a:latin typeface="Arial"/>
-                <a:ea typeface="Microsoft YaHei"/>
-                <a:cs typeface="Microsoft YaHei"/>
-              </a:rPr>
-              <a:t>1</a:t>
-            </a:r>
-          </a:p>
-        </p:txBody>
-      </p:sp>
-      <p:sp>
-        <p:nvSpPr>
-          <p:cNvPr id="32" name="TextBox 31"/>
-          <p:cNvSpPr txBox="1"/>
-          <p:nvPr/>
-        </p:nvSpPr>
-        <p:spPr>
-          <a:xfrm>
-            <a:off x="6818223" y="4297679"/>
-            <a:ext cx="4587087" cy="420624"/>
-          </a:xfrm>
-          <a:prstGeom prst="rect">
-            <a:avLst/>
-          </a:prstGeom>
-          <a:noFill/>
-        </p:spPr>
-        <p:txBody>
-          <a:bodyPr wrap="square" anchor="ctr" lIns="0" tIns="0" rIns="0" bIns="0">
-            <a:noAutofit/>
-          </a:bodyPr>
-          <a:lstStyle/>
-          <a:p>
-            <a:pPr algn="l" latinLnBrk="0">
-              <a:lnSpc>
-                <a:spcPct val="100000"/>
-              </a:lnSpc>
-              <a:spcBef>
-                <a:spcPts val="0"/>
-              </a:spcBef>
-              <a:spcAft>
-                <a:spcPts val="200"/>
-              </a:spcAft>
-            </a:pPr>
-            <a:r>
-              <a:rPr sz="1150" b="1">
-                <a:solidFill>
-                  <a:srgbClr val="16202A"/>
-                </a:solidFill>
-                <a:latin typeface="Microsoft YaHei"/>
-                <a:ea typeface="Microsoft YaHei"/>
-                <a:cs typeface="Microsoft YaHei"/>
-              </a:rPr>
-              <a:t>精度只认 CPU 参考实现</a:t>
-            </a:r>
-          </a:p>
-          <a:p>
-            <a:pPr algn="l" latinLnBrk="0">
-              <a:lnSpc>
-                <a:spcPct val="100000"/>
-              </a:lnSpc>
-              <a:spcBef>
-                <a:spcPts val="0"/>
-              </a:spcBef>
-              <a:spcAft>
-                <a:spcPts val="0"/>
-              </a:spcAft>
-            </a:pPr>
-            <a:r>
-              <a:rPr sz="1050" b="0">
-                <a:solidFill>
-                  <a:srgbClr val="35424F"/>
-                </a:solidFill>
-                <a:latin typeface="Microsoft YaHei"/>
-                <a:ea typeface="Microsoft YaHei"/>
-                <a:cs typeface="Microsoft YaHei"/>
-              </a:rPr>
-              <a:t>绝不拿 CUDA 当标准；精度不过关，就不看性能</a:t>
-            </a:r>
-          </a:p>
-        </p:txBody>
-      </p:sp>
-      <p:sp>
-        <p:nvSpPr>
-          <p:cNvPr id="33" name="Oval 32"/>
-          <p:cNvSpPr/>
-          <p:nvPr/>
-        </p:nvSpPr>
-        <p:spPr>
-          <a:xfrm>
-            <a:off x="6470751" y="4809743"/>
-            <a:ext cx="256032" cy="256032"/>
-          </a:xfrm>
-          <a:prstGeom prst="ellipse">
-            <a:avLst/>
-          </a:prstGeom>
-          <a:solidFill>
-            <a:srgbClr val="C0612C"/>
-          </a:solidFill>
-          <a:ln>
-            <a:noFill/>
-          </a:ln>
-        </p:spPr>
-        <p:txBody>
-          <a:bodyPr rtlCol="0" anchor="ctr" wrap="square" lIns="0" tIns="0" rIns="0" bIns="0">
-            <a:noAutofit/>
-          </a:bodyPr>
-          <a:lstStyle/>
-          <a:p>
-            <a:pPr algn="ctr" latinLnBrk="0">
-              <a:lnSpc>
-                <a:spcPct val="100000"/>
-              </a:lnSpc>
-              <a:spcBef>
-                <a:spcPts val="0"/>
-              </a:spcBef>
-              <a:spcAft>
-                <a:spcPts val="0"/>
-              </a:spcAft>
-            </a:pPr>
-            <a:r>
-              <a:rPr sz="1050" b="1">
-                <a:solidFill>
-                  <a:srgbClr val="FFFFFF"/>
-                </a:solidFill>
-                <a:latin typeface="Arial"/>
-                <a:ea typeface="Microsoft YaHei"/>
-                <a:cs typeface="Microsoft YaHei"/>
-              </a:rPr>
-              <a:t>2</a:t>
-            </a:r>
-          </a:p>
-        </p:txBody>
-      </p:sp>
-      <p:sp>
-        <p:nvSpPr>
-          <p:cNvPr id="34" name="TextBox 33"/>
-          <p:cNvSpPr txBox="1"/>
-          <p:nvPr/>
-        </p:nvSpPr>
-        <p:spPr>
-          <a:xfrm>
-            <a:off x="6818223" y="4773167"/>
-            <a:ext cx="4587087" cy="420624"/>
-          </a:xfrm>
-          <a:prstGeom prst="rect">
-            <a:avLst/>
-          </a:prstGeom>
-          <a:noFill/>
-        </p:spPr>
-        <p:txBody>
-          <a:bodyPr wrap="square" anchor="ctr" lIns="0" tIns="0" rIns="0" bIns="0">
-            <a:noAutofit/>
-          </a:bodyPr>
-          <a:lstStyle/>
-          <a:p>
-            <a:pPr algn="l" latinLnBrk="0">
-              <a:lnSpc>
-                <a:spcPct val="100000"/>
-              </a:lnSpc>
-              <a:spcBef>
-                <a:spcPts val="0"/>
-              </a:spcBef>
-              <a:spcAft>
-                <a:spcPts val="200"/>
-              </a:spcAft>
-            </a:pPr>
-            <a:r>
-              <a:rPr sz="1150" b="1">
-                <a:solidFill>
-                  <a:srgbClr val="16202A"/>
-                </a:solidFill>
-                <a:latin typeface="Microsoft YaHei"/>
-                <a:ea typeface="Microsoft YaHei"/>
-                <a:cs typeface="Microsoft YaHei"/>
-              </a:rPr>
-              <a:t>收益只认真机实测</a:t>
-            </a:r>
-          </a:p>
-          <a:p>
-            <a:pPr algn="l" latinLnBrk="0">
-              <a:lnSpc>
-                <a:spcPct val="100000"/>
-              </a:lnSpc>
-              <a:spcBef>
-                <a:spcPts val="0"/>
-              </a:spcBef>
-              <a:spcAft>
-                <a:spcPts val="0"/>
-              </a:spcAft>
-            </a:pPr>
-            <a:r>
-              <a:rPr sz="1050" b="0">
-                <a:solidFill>
-                  <a:srgbClr val="35424F"/>
-                </a:solidFill>
-                <a:latin typeface="Microsoft YaHei"/>
-                <a:ea typeface="Microsoft YaHei"/>
-                <a:cs typeface="Microsoft YaHei"/>
-              </a:rPr>
-              <a:t>模拟器只用来看清改动动了哪一块，两边对不上听真机的</a:t>
-            </a:r>
-          </a:p>
-        </p:txBody>
-      </p:sp>
-      <p:sp>
-        <p:nvSpPr>
-          <p:cNvPr id="35" name="Rectangle 34"/>
-          <p:cNvSpPr/>
-          <p:nvPr/>
-        </p:nvSpPr>
-        <p:spPr>
-          <a:xfrm>
-            <a:off x="548640" y="5596128"/>
-            <a:ext cx="11094415" cy="603504"/>
-          </a:xfrm>
-          <a:prstGeom prst="rect">
-            <a:avLst/>
-          </a:prstGeom>
-          <a:solidFill>
-            <a:srgbClr val="16202A"/>
-          </a:solidFill>
-          <a:ln>
-            <a:noFill/>
-          </a:ln>
-        </p:spPr>
-        <p:txBody>
-          <a:bodyPr rtlCol="0" anchor="ctr"/>
-          <a:lstStyle/>
-          <a:p>
-            <a:pPr algn="ctr"/>
-          </a:p>
-        </p:txBody>
-      </p:sp>
-      <p:sp>
-        <p:nvSpPr>
-          <p:cNvPr id="36" name="TextBox 35"/>
-          <p:cNvSpPr txBox="1"/>
-          <p:nvPr/>
-        </p:nvSpPr>
-        <p:spPr>
-          <a:xfrm>
-            <a:off x="822959" y="5596128"/>
-            <a:ext cx="10545775" cy="603504"/>
-          </a:xfrm>
-          <a:prstGeom prst="rect">
-            <a:avLst/>
-          </a:prstGeom>
-          <a:noFill/>
-        </p:spPr>
-        <p:txBody>
-          <a:bodyPr wrap="square" anchor="ctr" lIns="0" tIns="0" rIns="0" bIns="0">
-            <a:noAutofit/>
-          </a:bodyPr>
-          <a:lstStyle/>
-          <a:p>
-            <a:pPr algn="l" latinLnBrk="0">
-              <a:lnSpc>
-                <a:spcPct val="100000"/>
-              </a:lnSpc>
-              <a:spcBef>
-                <a:spcPts val="0"/>
-              </a:spcBef>
-              <a:spcAft>
-                <a:spcPts val="0"/>
-              </a:spcAft>
-            </a:pPr>
-            <a:r>
-              <a:rPr sz="1300" b="1">
-                <a:solidFill>
-                  <a:srgbClr val="FFFFFF"/>
-                </a:solidFill>
-                <a:latin typeface="Microsoft YaHei"/>
-                <a:ea typeface="Microsoft YaHei"/>
-                <a:cs typeface="Microsoft YaHei"/>
-              </a:rPr>
-              <a:t>对外接口　</a:t>
-            </a:r>
-            <a:r>
-              <a:rPr sz="1300" b="1">
-                <a:solidFill>
-                  <a:srgbClr val="F2B233"/>
-                </a:solidFill>
-                <a:latin typeface="Microsoft YaHei"/>
-                <a:ea typeface="Microsoft YaHei"/>
-                <a:cs typeface="Microsoft YaHei"/>
-              </a:rPr>
-              <a:t>operator-channel 透传通道</a:t>
-            </a:r>
-            <a:r>
-              <a:rPr sz="1300" b="1">
-                <a:solidFill>
-                  <a:srgbClr val="FFFFFF"/>
-                </a:solidFill>
-                <a:latin typeface="Microsoft YaHei"/>
-                <a:ea typeface="Microsoft YaHei"/>
-                <a:cs typeface="Microsoft YaHei"/>
-              </a:rPr>
-              <a:t>　m100-model-agent 管整模型接入与调优，xpugen 管单算子生成</a:t>
-            </a:r>
-          </a:p>
-        </p:txBody>
-      </p:sp>
-      <p:sp>
-        <p:nvSpPr>
-          <p:cNvPr id="37" name="TextBox 36"/>
-          <p:cNvSpPr txBox="1"/>
-          <p:nvPr/>
-        </p:nvSpPr>
-        <p:spPr>
-          <a:xfrm>
-            <a:off x="548640" y="6382512"/>
-            <a:ext cx="9905695" cy="256032"/>
-          </a:xfrm>
-          <a:prstGeom prst="rect">
-            <a:avLst/>
-          </a:prstGeom>
-          <a:noFill/>
-        </p:spPr>
-        <p:txBody>
-          <a:bodyPr wrap="square" anchor="ctr" lIns="0" tIns="0" rIns="0" bIns="0">
-            <a:noAutofit/>
-          </a:bodyPr>
-          <a:lstStyle/>
-          <a:p>
-            <a:pPr algn="l" latinLnBrk="0">
-              <a:lnSpc>
-                <a:spcPct val="100000"/>
-              </a:lnSpc>
-              <a:spcBef>
-                <a:spcPts val="0"/>
-              </a:spcBef>
-              <a:spcAft>
-                <a:spcPts val="0"/>
-              </a:spcAft>
-            </a:pPr>
-            <a:r>
               <a:rPr sz="1000" b="0">
                 <a:solidFill>
                   <a:srgbClr val="66727F"/>
@@ -5484,7 +5377,7 @@
       </p:sp>
       <p:sp>
         <p:nvSpPr>
-          <p:cNvPr id="38" name="TextBox 37"/>
+          <p:cNvPr id="40" name="TextBox 39"/>
           <p:cNvSpPr txBox="1"/>
           <p:nvPr/>
         </p:nvSpPr>

--- a/slides/xpugen_operator_agent.pptx
+++ b/slides/xpugen_operator_agent.pptx
@@ -551,7 +551,7 @@
                 <a:ea typeface="Microsoft YaHei"/>
                 <a:cs typeface="Microsoft YaHei"/>
               </a:rPr>
-              <a:t>左边是它怎么工作的。入口有两条：从一句需求开始，或者从现有实现反推出规格，第 0 轮直接拿现有实现当基线，后面在它上面改。</a:t>
+              <a:t>左边这个圈就是它一轮迭代。入口有两条：从一句需求开始，或者从现有实现反推出规格，第 0 轮直接拿现有实现当基线，后面在它上面改。</a:t>
             </a:r>
           </a:p>
           <a:p>
@@ -569,7 +569,7 @@
                 <a:ea typeface="Microsoft YaHei"/>
                 <a:cs typeface="Microsoft YaHei"/>
               </a:rPr>
-              <a:t>然后就是一轮轮迭代：LLM 照硬件说明卡写内核，编译跑起来，多种形状和精度逐一和 golden 对数值，再测延迟、跟理论上限比，最后把打分和慢在哪带进下一轮。最多八轮。</a:t>
+              <a:t>转一圈是这样：LLM 照硬件说明卡写内核，编译跑起来，多种形状和精度逐一和 golden 对数值，再测延迟、跟理论上限比，最后把打分和慢在哪带进下一轮。最多八轮。</a:t>
             </a:r>
           </a:p>
           <a:p>
@@ -3796,8 +3796,8 @@
         </p:nvSpPr>
         <p:spPr>
           <a:xfrm>
-            <a:off x="548640" y="1755648"/>
-            <a:ext cx="5029200" cy="292608"/>
+            <a:off x="548640" y="1682496"/>
+            <a:ext cx="7406640" cy="274320"/>
           </a:xfrm>
           <a:prstGeom prst="rect">
             <a:avLst/>
@@ -3822,40 +3822,813 @@
               </a:spcAft>
             </a:pPr>
             <a:r>
-              <a:rPr sz="1350" b="1">
-                <a:solidFill>
-                  <a:srgbClr val="16202A"/>
+              <a:rPr sz="1050" b="1">
+                <a:solidFill>
+                  <a:srgbClr val="C0612C"/>
+                </a:solidFill>
+                <a:latin typeface="Consolas"/>
+                <a:ea typeface="Microsoft YaHei"/>
+                <a:cs typeface="Microsoft YaHei"/>
+              </a:rPr>
+              <a:t>入口　</a:t>
+            </a:r>
+            <a:r>
+              <a:rPr sz="1050" b="0">
+                <a:solidFill>
+                  <a:srgbClr val="66727F"/>
                 </a:solidFill>
                 <a:latin typeface="Microsoft YaHei"/>
                 <a:ea typeface="Microsoft YaHei"/>
                 <a:cs typeface="Microsoft YaHei"/>
               </a:rPr>
-              <a:t>怎么工作</a:t>
-            </a:r>
-            <a:r>
-              <a:rPr sz="1050" b="0">
-                <a:solidFill>
-                  <a:srgbClr val="66727F"/>
+              <a:t>一句需求，或现有实现当基线</a:t>
+            </a:r>
+          </a:p>
+        </p:txBody>
+      </p:sp>
+      <p:sp>
+        <p:nvSpPr>
+          <p:cNvPr id="6" name="Oval 5"/>
+          <p:cNvSpPr/>
+          <p:nvPr/>
+        </p:nvSpPr>
+        <p:spPr>
+          <a:xfrm>
+            <a:off x="3419856" y="3374136"/>
+            <a:ext cx="1572768" cy="1572768"/>
+          </a:xfrm>
+          <a:prstGeom prst="ellipse">
+            <a:avLst/>
+          </a:prstGeom>
+          <a:solidFill>
+            <a:srgbClr val="F8EADF"/>
+          </a:solidFill>
+          <a:ln>
+            <a:noFill/>
+          </a:ln>
+        </p:spPr>
+        <p:txBody>
+          <a:bodyPr rtlCol="0" anchor="ctr"/>
+          <a:lstStyle/>
+          <a:p>
+            <a:pPr algn="ctr"/>
+          </a:p>
+        </p:txBody>
+      </p:sp>
+      <p:sp>
+        <p:nvSpPr>
+          <p:cNvPr id="7" name="TextBox 6"/>
+          <p:cNvSpPr txBox="1"/>
+          <p:nvPr/>
+        </p:nvSpPr>
+        <p:spPr>
+          <a:xfrm>
+            <a:off x="3419856" y="3374136"/>
+            <a:ext cx="1572768" cy="1572768"/>
+          </a:xfrm>
+          <a:prstGeom prst="rect">
+            <a:avLst/>
+          </a:prstGeom>
+          <a:noFill/>
+        </p:spPr>
+        <p:txBody>
+          <a:bodyPr wrap="square" anchor="ctr" lIns="0" tIns="0" rIns="0" bIns="0">
+            <a:noAutofit/>
+          </a:bodyPr>
+          <a:lstStyle/>
+          <a:p>
+            <a:pPr algn="ctr" latinLnBrk="0">
+              <a:lnSpc>
+                <a:spcPct val="100000"/>
+              </a:lnSpc>
+              <a:spcBef>
+                <a:spcPts val="0"/>
+              </a:spcBef>
+              <a:spcAft>
+                <a:spcPts val="300"/>
+              </a:spcAft>
+            </a:pPr>
+            <a:r>
+              <a:rPr sz="1100" b="1">
+                <a:solidFill>
+                  <a:srgbClr val="C0612C"/>
                 </a:solidFill>
                 <a:latin typeface="Microsoft YaHei"/>
                 <a:ea typeface="Microsoft YaHei"/>
                 <a:cs typeface="Microsoft YaHei"/>
               </a:rPr>
-              <a:t>　一个算子，最多 8 轮</a:t>
-            </a:r>
-          </a:p>
-        </p:txBody>
-      </p:sp>
-      <p:sp>
-        <p:nvSpPr>
-          <p:cNvPr id="6" name="TextBox 5"/>
+              <a:t>算子级闭环</a:t>
+            </a:r>
+          </a:p>
+          <a:p>
+            <a:pPr algn="ctr" latinLnBrk="0">
+              <a:lnSpc>
+                <a:spcPct val="100000"/>
+              </a:lnSpc>
+              <a:spcBef>
+                <a:spcPts val="0"/>
+              </a:spcBef>
+              <a:spcAft>
+                <a:spcPts val="0"/>
+              </a:spcAft>
+            </a:pPr>
+            <a:r>
+              <a:rPr sz="1300" b="1">
+                <a:solidFill>
+                  <a:srgbClr val="16202A"/>
+                </a:solidFill>
+                <a:latin typeface="Microsoft YaHei"/>
+                <a:ea typeface="Microsoft YaHei"/>
+                <a:cs typeface="Microsoft YaHei"/>
+              </a:rPr>
+              <a:t>一个算子</a:t>
+            </a:r>
+          </a:p>
+          <a:p>
+            <a:pPr algn="ctr" latinLnBrk="0">
+              <a:lnSpc>
+                <a:spcPct val="100000"/>
+              </a:lnSpc>
+              <a:spcBef>
+                <a:spcPts val="0"/>
+              </a:spcBef>
+              <a:spcAft>
+                <a:spcPts val="0"/>
+              </a:spcAft>
+            </a:pPr>
+            <a:r>
+              <a:rPr sz="1300" b="1">
+                <a:solidFill>
+                  <a:srgbClr val="16202A"/>
+                </a:solidFill>
+                <a:latin typeface="Microsoft YaHei"/>
+                <a:ea typeface="Microsoft YaHei"/>
+                <a:cs typeface="Microsoft YaHei"/>
+              </a:rPr>
+              <a:t>最多 8 轮</a:t>
+            </a:r>
+          </a:p>
+        </p:txBody>
+      </p:sp>
+      <p:sp>
+        <p:nvSpPr>
+          <p:cNvPr id="8" name="Rounded Rectangle 7"/>
+          <p:cNvSpPr/>
+          <p:nvPr/>
+        </p:nvSpPr>
+        <p:spPr>
+          <a:xfrm>
+            <a:off x="3337559" y="2066543"/>
+            <a:ext cx="1737360" cy="676656"/>
+          </a:xfrm>
+          <a:prstGeom prst="roundRect">
+            <a:avLst>
+              <a:gd name="adj" fmla="val 35000"/>
+            </a:avLst>
+          </a:prstGeom>
+          <a:solidFill>
+            <a:srgbClr val="FFFFFF"/>
+          </a:solidFill>
+          <a:ln w="15875">
+            <a:solidFill>
+              <a:srgbClr val="C0612C"/>
+            </a:solidFill>
+          </a:ln>
+        </p:spPr>
+        <p:txBody>
+          <a:bodyPr rtlCol="0" anchor="ctr" wrap="square" lIns="45720" tIns="18288" rIns="45720" bIns="18288">
+            <a:noAutofit/>
+          </a:bodyPr>
+          <a:lstStyle/>
+          <a:p>
+            <a:pPr algn="ctr" latinLnBrk="0">
+              <a:lnSpc>
+                <a:spcPct val="100000"/>
+              </a:lnSpc>
+              <a:spcBef>
+                <a:spcPts val="0"/>
+              </a:spcBef>
+              <a:spcAft>
+                <a:spcPts val="200"/>
+              </a:spcAft>
+            </a:pPr>
+            <a:r>
+              <a:rPr sz="1250" b="1">
+                <a:solidFill>
+                  <a:srgbClr val="C0612C"/>
+                </a:solidFill>
+                <a:latin typeface="Arial"/>
+                <a:ea typeface="Microsoft YaHei"/>
+                <a:cs typeface="Microsoft YaHei"/>
+              </a:rPr>
+              <a:t>1 </a:t>
+            </a:r>
+            <a:r>
+              <a:rPr sz="1250" b="1">
+                <a:solidFill>
+                  <a:srgbClr val="16202A"/>
+                </a:solidFill>
+                <a:latin typeface="Microsoft YaHei"/>
+                <a:ea typeface="Microsoft YaHei"/>
+                <a:cs typeface="Microsoft YaHei"/>
+              </a:rPr>
+              <a:t>生成</a:t>
+            </a:r>
+          </a:p>
+          <a:p>
+            <a:pPr algn="ctr" latinLnBrk="0">
+              <a:lnSpc>
+                <a:spcPct val="100000"/>
+              </a:lnSpc>
+              <a:spcBef>
+                <a:spcPts val="0"/>
+              </a:spcBef>
+              <a:spcAft>
+                <a:spcPts val="0"/>
+              </a:spcAft>
+            </a:pPr>
+            <a:r>
+              <a:rPr sz="1000" b="0">
+                <a:solidFill>
+                  <a:srgbClr val="66727F"/>
+                </a:solidFill>
+                <a:latin typeface="Microsoft YaHei"/>
+                <a:ea typeface="Microsoft YaHei"/>
+                <a:cs typeface="Microsoft YaHei"/>
+              </a:rPr>
+              <a:t>照硬件说明卡写内核</a:t>
+            </a:r>
+          </a:p>
+        </p:txBody>
+      </p:sp>
+      <p:sp>
+        <p:nvSpPr>
+          <p:cNvPr id="9" name="Rounded Rectangle 8"/>
+          <p:cNvSpPr/>
+          <p:nvPr/>
+        </p:nvSpPr>
+        <p:spPr>
+          <a:xfrm>
+            <a:off x="6033462" y="3279666"/>
+            <a:ext cx="1737360" cy="676656"/>
+          </a:xfrm>
+          <a:prstGeom prst="roundRect">
+            <a:avLst>
+              <a:gd name="adj" fmla="val 35000"/>
+            </a:avLst>
+          </a:prstGeom>
+          <a:solidFill>
+            <a:srgbClr val="FFFFFF"/>
+          </a:solidFill>
+          <a:ln w="15875">
+            <a:solidFill>
+              <a:srgbClr val="C0612C"/>
+            </a:solidFill>
+          </a:ln>
+        </p:spPr>
+        <p:txBody>
+          <a:bodyPr rtlCol="0" anchor="ctr" wrap="square" lIns="45720" tIns="18288" rIns="45720" bIns="18288">
+            <a:noAutofit/>
+          </a:bodyPr>
+          <a:lstStyle/>
+          <a:p>
+            <a:pPr algn="ctr" latinLnBrk="0">
+              <a:lnSpc>
+                <a:spcPct val="100000"/>
+              </a:lnSpc>
+              <a:spcBef>
+                <a:spcPts val="0"/>
+              </a:spcBef>
+              <a:spcAft>
+                <a:spcPts val="200"/>
+              </a:spcAft>
+            </a:pPr>
+            <a:r>
+              <a:rPr sz="1250" b="1">
+                <a:solidFill>
+                  <a:srgbClr val="C0612C"/>
+                </a:solidFill>
+                <a:latin typeface="Arial"/>
+                <a:ea typeface="Microsoft YaHei"/>
+                <a:cs typeface="Microsoft YaHei"/>
+              </a:rPr>
+              <a:t>2 </a:t>
+            </a:r>
+            <a:r>
+              <a:rPr sz="1250" b="1">
+                <a:solidFill>
+                  <a:srgbClr val="16202A"/>
+                </a:solidFill>
+                <a:latin typeface="Microsoft YaHei"/>
+                <a:ea typeface="Microsoft YaHei"/>
+                <a:cs typeface="Microsoft YaHei"/>
+              </a:rPr>
+              <a:t>编译</a:t>
+            </a:r>
+          </a:p>
+          <a:p>
+            <a:pPr algn="ctr" latinLnBrk="0">
+              <a:lnSpc>
+                <a:spcPct val="100000"/>
+              </a:lnSpc>
+              <a:spcBef>
+                <a:spcPts val="0"/>
+              </a:spcBef>
+              <a:spcAft>
+                <a:spcPts val="0"/>
+              </a:spcAft>
+            </a:pPr>
+            <a:r>
+              <a:rPr sz="1000" b="0">
+                <a:solidFill>
+                  <a:srgbClr val="66727F"/>
+                </a:solidFill>
+                <a:latin typeface="Microsoft YaHei"/>
+                <a:ea typeface="Microsoft YaHei"/>
+                <a:cs typeface="Microsoft YaHei"/>
+              </a:rPr>
+              <a:t>编译并拉起程序</a:t>
+            </a:r>
+          </a:p>
+        </p:txBody>
+      </p:sp>
+      <p:sp>
+        <p:nvSpPr>
+          <p:cNvPr id="10" name="Rounded Rectangle 9"/>
+          <p:cNvSpPr/>
+          <p:nvPr/>
+        </p:nvSpPr>
+        <p:spPr>
+          <a:xfrm>
+            <a:off x="5003719" y="5242541"/>
+            <a:ext cx="1737360" cy="676656"/>
+          </a:xfrm>
+          <a:prstGeom prst="roundRect">
+            <a:avLst>
+              <a:gd name="adj" fmla="val 35000"/>
+            </a:avLst>
+          </a:prstGeom>
+          <a:solidFill>
+            <a:srgbClr val="FFFFFF"/>
+          </a:solidFill>
+          <a:ln w="15875">
+            <a:solidFill>
+              <a:srgbClr val="C0612C"/>
+            </a:solidFill>
+          </a:ln>
+        </p:spPr>
+        <p:txBody>
+          <a:bodyPr rtlCol="0" anchor="ctr" wrap="square" lIns="45720" tIns="18288" rIns="45720" bIns="18288">
+            <a:noAutofit/>
+          </a:bodyPr>
+          <a:lstStyle/>
+          <a:p>
+            <a:pPr algn="ctr" latinLnBrk="0">
+              <a:lnSpc>
+                <a:spcPct val="100000"/>
+              </a:lnSpc>
+              <a:spcBef>
+                <a:spcPts val="0"/>
+              </a:spcBef>
+              <a:spcAft>
+                <a:spcPts val="200"/>
+              </a:spcAft>
+            </a:pPr>
+            <a:r>
+              <a:rPr sz="1250" b="1">
+                <a:solidFill>
+                  <a:srgbClr val="C0612C"/>
+                </a:solidFill>
+                <a:latin typeface="Arial"/>
+                <a:ea typeface="Microsoft YaHei"/>
+                <a:cs typeface="Microsoft YaHei"/>
+              </a:rPr>
+              <a:t>3 </a:t>
+            </a:r>
+            <a:r>
+              <a:rPr sz="1250" b="1">
+                <a:solidFill>
+                  <a:srgbClr val="16202A"/>
+                </a:solidFill>
+                <a:latin typeface="Microsoft YaHei"/>
+                <a:ea typeface="Microsoft YaHei"/>
+                <a:cs typeface="Microsoft YaHei"/>
+              </a:rPr>
+              <a:t>对数值</a:t>
+            </a:r>
+          </a:p>
+          <a:p>
+            <a:pPr algn="ctr" latinLnBrk="0">
+              <a:lnSpc>
+                <a:spcPct val="100000"/>
+              </a:lnSpc>
+              <a:spcBef>
+                <a:spcPts val="0"/>
+              </a:spcBef>
+              <a:spcAft>
+                <a:spcPts val="0"/>
+              </a:spcAft>
+            </a:pPr>
+            <a:r>
+              <a:rPr sz="1000" b="0">
+                <a:solidFill>
+                  <a:srgbClr val="66727F"/>
+                </a:solidFill>
+                <a:latin typeface="Microsoft YaHei"/>
+                <a:ea typeface="Microsoft YaHei"/>
+                <a:cs typeface="Microsoft YaHei"/>
+              </a:rPr>
+              <a:t>多形状多精度对 golden</a:t>
+            </a:r>
+          </a:p>
+        </p:txBody>
+      </p:sp>
+      <p:sp>
+        <p:nvSpPr>
+          <p:cNvPr id="11" name="Rounded Rectangle 10"/>
+          <p:cNvSpPr/>
+          <p:nvPr/>
+        </p:nvSpPr>
+        <p:spPr>
+          <a:xfrm>
+            <a:off x="1671400" y="5242541"/>
+            <a:ext cx="1737360" cy="676656"/>
+          </a:xfrm>
+          <a:prstGeom prst="roundRect">
+            <a:avLst>
+              <a:gd name="adj" fmla="val 35000"/>
+            </a:avLst>
+          </a:prstGeom>
+          <a:solidFill>
+            <a:srgbClr val="FFFFFF"/>
+          </a:solidFill>
+          <a:ln w="15875">
+            <a:solidFill>
+              <a:srgbClr val="C0612C"/>
+            </a:solidFill>
+          </a:ln>
+        </p:spPr>
+        <p:txBody>
+          <a:bodyPr rtlCol="0" anchor="ctr" wrap="square" lIns="45720" tIns="18288" rIns="45720" bIns="18288">
+            <a:noAutofit/>
+          </a:bodyPr>
+          <a:lstStyle/>
+          <a:p>
+            <a:pPr algn="ctr" latinLnBrk="0">
+              <a:lnSpc>
+                <a:spcPct val="100000"/>
+              </a:lnSpc>
+              <a:spcBef>
+                <a:spcPts val="0"/>
+              </a:spcBef>
+              <a:spcAft>
+                <a:spcPts val="200"/>
+              </a:spcAft>
+            </a:pPr>
+            <a:r>
+              <a:rPr sz="1250" b="1">
+                <a:solidFill>
+                  <a:srgbClr val="C0612C"/>
+                </a:solidFill>
+                <a:latin typeface="Arial"/>
+                <a:ea typeface="Microsoft YaHei"/>
+                <a:cs typeface="Microsoft YaHei"/>
+              </a:rPr>
+              <a:t>4 </a:t>
+            </a:r>
+            <a:r>
+              <a:rPr sz="1250" b="1">
+                <a:solidFill>
+                  <a:srgbClr val="16202A"/>
+                </a:solidFill>
+                <a:latin typeface="Microsoft YaHei"/>
+                <a:ea typeface="Microsoft YaHei"/>
+                <a:cs typeface="Microsoft YaHei"/>
+              </a:rPr>
+              <a:t>测性能</a:t>
+            </a:r>
+          </a:p>
+          <a:p>
+            <a:pPr algn="ctr" latinLnBrk="0">
+              <a:lnSpc>
+                <a:spcPct val="100000"/>
+              </a:lnSpc>
+              <a:spcBef>
+                <a:spcPts val="0"/>
+              </a:spcBef>
+              <a:spcAft>
+                <a:spcPts val="0"/>
+              </a:spcAft>
+            </a:pPr>
+            <a:r>
+              <a:rPr sz="1000" b="0">
+                <a:solidFill>
+                  <a:srgbClr val="66727F"/>
+                </a:solidFill>
+                <a:latin typeface="Microsoft YaHei"/>
+                <a:ea typeface="Microsoft YaHei"/>
+                <a:cs typeface="Microsoft YaHei"/>
+              </a:rPr>
+              <a:t>中位延迟 · 比理论上限</a:t>
+            </a:r>
+          </a:p>
+        </p:txBody>
+      </p:sp>
+      <p:sp>
+        <p:nvSpPr>
+          <p:cNvPr id="12" name="Rounded Rectangle 11"/>
+          <p:cNvSpPr/>
+          <p:nvPr/>
+        </p:nvSpPr>
+        <p:spPr>
+          <a:xfrm>
+            <a:off x="641657" y="3279666"/>
+            <a:ext cx="1737360" cy="676656"/>
+          </a:xfrm>
+          <a:prstGeom prst="roundRect">
+            <a:avLst>
+              <a:gd name="adj" fmla="val 35000"/>
+            </a:avLst>
+          </a:prstGeom>
+          <a:solidFill>
+            <a:srgbClr val="FFFFFF"/>
+          </a:solidFill>
+          <a:ln w="15875">
+            <a:solidFill>
+              <a:srgbClr val="C0612C"/>
+            </a:solidFill>
+          </a:ln>
+        </p:spPr>
+        <p:txBody>
+          <a:bodyPr rtlCol="0" anchor="ctr" wrap="square" lIns="45720" tIns="18288" rIns="45720" bIns="18288">
+            <a:noAutofit/>
+          </a:bodyPr>
+          <a:lstStyle/>
+          <a:p>
+            <a:pPr algn="ctr" latinLnBrk="0">
+              <a:lnSpc>
+                <a:spcPct val="100000"/>
+              </a:lnSpc>
+              <a:spcBef>
+                <a:spcPts val="0"/>
+              </a:spcBef>
+              <a:spcAft>
+                <a:spcPts val="200"/>
+              </a:spcAft>
+            </a:pPr>
+            <a:r>
+              <a:rPr sz="1250" b="1">
+                <a:solidFill>
+                  <a:srgbClr val="C0612C"/>
+                </a:solidFill>
+                <a:latin typeface="Arial"/>
+                <a:ea typeface="Microsoft YaHei"/>
+                <a:cs typeface="Microsoft YaHei"/>
+              </a:rPr>
+              <a:t>5 </a:t>
+            </a:r>
+            <a:r>
+              <a:rPr sz="1250" b="1">
+                <a:solidFill>
+                  <a:srgbClr val="16202A"/>
+                </a:solidFill>
+                <a:latin typeface="Microsoft YaHei"/>
+                <a:ea typeface="Microsoft YaHei"/>
+                <a:cs typeface="Microsoft YaHei"/>
+              </a:rPr>
+              <a:t>给反馈</a:t>
+            </a:r>
+          </a:p>
+          <a:p>
+            <a:pPr algn="ctr" latinLnBrk="0">
+              <a:lnSpc>
+                <a:spcPct val="100000"/>
+              </a:lnSpc>
+              <a:spcBef>
+                <a:spcPts val="0"/>
+              </a:spcBef>
+              <a:spcAft>
+                <a:spcPts val="0"/>
+              </a:spcAft>
+            </a:pPr>
+            <a:r>
+              <a:rPr sz="1000" b="0">
+                <a:solidFill>
+                  <a:srgbClr val="66727F"/>
+                </a:solidFill>
+                <a:latin typeface="Microsoft YaHei"/>
+                <a:ea typeface="Microsoft YaHei"/>
+                <a:cs typeface="Microsoft YaHei"/>
+              </a:rPr>
+              <a:t>打分 · 指出慢在哪</a:t>
+            </a:r>
+          </a:p>
+        </p:txBody>
+      </p:sp>
+      <p:sp>
+        <p:nvSpPr>
+          <p:cNvPr id="13" name="Arc 12"/>
+          <p:cNvSpPr/>
+          <p:nvPr/>
+        </p:nvSpPr>
+        <p:spPr>
+          <a:xfrm>
+            <a:off x="1371599" y="2404872"/>
+            <a:ext cx="5669280" cy="3511296"/>
+          </a:xfrm>
+          <a:prstGeom prst="arc">
+            <a:avLst>
+              <a:gd name="adj1" fmla="val 18010129"/>
+              <a:gd name="adj2" fmla="val 20263467"/>
+            </a:avLst>
+          </a:prstGeom>
+          <a:noFill/>
+          <a:ln w="19050">
+            <a:solidFill>
+              <a:srgbClr val="C0612C"/>
+            </a:solidFill>
+            <a:tailEnd type="triangle" w="med" len="med"/>
+          </a:ln>
+        </p:spPr>
+        <p:txBody>
+          <a:bodyPr rtlCol="0" anchor="ctr"/>
+          <a:lstStyle/>
+          <a:p>
+            <a:pPr algn="ctr"/>
+          </a:p>
+        </p:txBody>
+      </p:sp>
+      <p:sp>
+        <p:nvSpPr>
+          <p:cNvPr id="14" name="Arc 13"/>
+          <p:cNvSpPr/>
+          <p:nvPr/>
+        </p:nvSpPr>
+        <p:spPr>
+          <a:xfrm>
+            <a:off x="1371599" y="2404872"/>
+            <a:ext cx="5669280" cy="3511296"/>
+          </a:xfrm>
+          <a:prstGeom prst="arc">
+            <a:avLst>
+              <a:gd name="adj1" fmla="val 21452696"/>
+              <a:gd name="adj2" fmla="val 1386262"/>
+            </a:avLst>
+          </a:prstGeom>
+          <a:noFill/>
+          <a:ln w="19050">
+            <a:solidFill>
+              <a:srgbClr val="C0612C"/>
+            </a:solidFill>
+            <a:tailEnd type="triangle" w="med" len="med"/>
+          </a:ln>
+        </p:spPr>
+        <p:txBody>
+          <a:bodyPr rtlCol="0" anchor="ctr"/>
+          <a:lstStyle/>
+          <a:p>
+            <a:pPr algn="ctr"/>
+          </a:p>
+        </p:txBody>
+      </p:sp>
+      <p:sp>
+        <p:nvSpPr>
+          <p:cNvPr id="15" name="Arc 14"/>
+          <p:cNvSpPr/>
+          <p:nvPr/>
+        </p:nvSpPr>
+        <p:spPr>
+          <a:xfrm>
+            <a:off x="1371599" y="2404872"/>
+            <a:ext cx="5669280" cy="3511296"/>
+          </a:xfrm>
+          <a:prstGeom prst="arc">
+            <a:avLst>
+              <a:gd name="adj1" fmla="val 4048999"/>
+              <a:gd name="adj2" fmla="val 6751000"/>
+            </a:avLst>
+          </a:prstGeom>
+          <a:noFill/>
+          <a:ln w="19050">
+            <a:solidFill>
+              <a:srgbClr val="C0612C"/>
+            </a:solidFill>
+            <a:tailEnd type="triangle" w="med" len="med"/>
+          </a:ln>
+        </p:spPr>
+        <p:txBody>
+          <a:bodyPr rtlCol="0" anchor="ctr"/>
+          <a:lstStyle/>
+          <a:p>
+            <a:pPr algn="ctr"/>
+          </a:p>
+        </p:txBody>
+      </p:sp>
+      <p:sp>
+        <p:nvSpPr>
+          <p:cNvPr id="16" name="Arc 15"/>
+          <p:cNvSpPr/>
+          <p:nvPr/>
+        </p:nvSpPr>
+        <p:spPr>
+          <a:xfrm>
+            <a:off x="1371599" y="2404872"/>
+            <a:ext cx="5669280" cy="3511296"/>
+          </a:xfrm>
+          <a:prstGeom prst="arc">
+            <a:avLst>
+              <a:gd name="adj1" fmla="val 9413737"/>
+              <a:gd name="adj2" fmla="val 10947303"/>
+            </a:avLst>
+          </a:prstGeom>
+          <a:noFill/>
+          <a:ln w="19050">
+            <a:solidFill>
+              <a:srgbClr val="C0612C"/>
+            </a:solidFill>
+            <a:tailEnd type="triangle" w="med" len="med"/>
+          </a:ln>
+        </p:spPr>
+        <p:txBody>
+          <a:bodyPr rtlCol="0" anchor="ctr"/>
+          <a:lstStyle/>
+          <a:p>
+            <a:pPr algn="ctr"/>
+          </a:p>
+        </p:txBody>
+      </p:sp>
+      <p:sp>
+        <p:nvSpPr>
+          <p:cNvPr id="17" name="Arc 16"/>
+          <p:cNvSpPr/>
+          <p:nvPr/>
+        </p:nvSpPr>
+        <p:spPr>
+          <a:xfrm>
+            <a:off x="1371599" y="2404872"/>
+            <a:ext cx="5669280" cy="3511296"/>
+          </a:xfrm>
+          <a:prstGeom prst="arc">
+            <a:avLst>
+              <a:gd name="adj1" fmla="val 12136532"/>
+              <a:gd name="adj2" fmla="val 14389870"/>
+            </a:avLst>
+          </a:prstGeom>
+          <a:noFill/>
+          <a:ln w="19050">
+            <a:solidFill>
+              <a:srgbClr val="C0612C"/>
+            </a:solidFill>
+            <a:tailEnd type="triangle" w="med" len="med"/>
+          </a:ln>
+        </p:spPr>
+        <p:txBody>
+          <a:bodyPr rtlCol="0" anchor="ctr"/>
+          <a:lstStyle/>
+          <a:p>
+            <a:pPr algn="ctr"/>
+          </a:p>
+        </p:txBody>
+      </p:sp>
+      <p:sp>
+        <p:nvSpPr>
+          <p:cNvPr id="18" name="Rectangle 17"/>
+          <p:cNvSpPr/>
+          <p:nvPr/>
+        </p:nvSpPr>
+        <p:spPr>
+          <a:xfrm>
+            <a:off x="8321040" y="2066543"/>
+            <a:ext cx="3322015" cy="3849624"/>
+          </a:xfrm>
+          <a:prstGeom prst="rect">
+            <a:avLst/>
+          </a:prstGeom>
+          <a:solidFill>
+            <a:srgbClr val="F8EADF"/>
+          </a:solidFill>
+          <a:ln>
+            <a:noFill/>
+          </a:ln>
+        </p:spPr>
+        <p:txBody>
+          <a:bodyPr rtlCol="0" anchor="ctr"/>
+          <a:lstStyle/>
+          <a:p>
+            <a:pPr algn="ctr"/>
+          </a:p>
+        </p:txBody>
+      </p:sp>
+      <p:sp>
+        <p:nvSpPr>
+          <p:cNvPr id="19" name="TextBox 18"/>
           <p:cNvSpPr txBox="1"/>
           <p:nvPr/>
         </p:nvSpPr>
         <p:spPr>
           <a:xfrm>
-            <a:off x="548640" y="2066543"/>
-            <a:ext cx="5029200" cy="256032"/>
+            <a:off x="8558784" y="2212848"/>
+            <a:ext cx="2864815" cy="292608"/>
           </a:xfrm>
           <a:prstGeom prst="rect">
             <a:avLst/>
@@ -3880,63 +4653,133 @@
               </a:spcAft>
             </a:pPr>
             <a:r>
-              <a:rPr sz="1050" b="0">
-                <a:solidFill>
-                  <a:srgbClr val="66727F"/>
+              <a:rPr sz="1400" b="1">
+                <a:solidFill>
+                  <a:srgbClr val="16202A"/>
                 </a:solidFill>
                 <a:latin typeface="Microsoft YaHei"/>
                 <a:ea typeface="Microsoft YaHei"/>
                 <a:cs typeface="Microsoft YaHei"/>
               </a:rPr>
-              <a:t>入口：一句需求，或拿现有实现当第 0 轮基线</a:t>
-            </a:r>
-          </a:p>
-        </p:txBody>
-      </p:sp>
-      <p:cxnSp>
-        <p:nvCxnSpPr>
-          <p:cNvPr id="7" name="Connector 6"/>
-          <p:cNvCxnSpPr/>
-          <p:nvPr/>
-        </p:nvCxnSpPr>
-        <p:spPr>
-          <a:xfrm>
-            <a:off x="1161288" y="2587752"/>
-            <a:ext cx="0" cy="3090672"/>
-          </a:xfrm>
-          <a:prstGeom prst="line">
-            <a:avLst/>
-          </a:prstGeom>
-          <a:ln w="15875">
-            <a:solidFill>
-              <a:srgbClr val="C5CCD4"/>
-            </a:solidFill>
-          </a:ln>
-        </p:spPr>
-      </p:cxnSp>
-      <p:sp>
-        <p:nvSpPr>
-          <p:cNvPr id="8" name="Oval 7"/>
+              <a:t>效果</a:t>
+            </a:r>
+            <a:r>
+              <a:rPr sz="1050" b="0">
+                <a:solidFill>
+                  <a:srgbClr val="8C96A1"/>
+                </a:solidFill>
+                <a:latin typeface="Microsoft YaHei"/>
+                <a:ea typeface="Microsoft YaHei"/>
+                <a:cs typeface="Microsoft YaHei"/>
+              </a:rPr>
+              <a:t>　数字待补</a:t>
+            </a:r>
+          </a:p>
+        </p:txBody>
+      </p:sp>
+      <p:sp>
+        <p:nvSpPr>
+          <p:cNvPr id="20" name="Rectangle 19"/>
           <p:cNvSpPr/>
           <p:nvPr/>
         </p:nvSpPr>
         <p:spPr>
           <a:xfrm>
-            <a:off x="1005840" y="2432304"/>
-            <a:ext cx="310896" cy="310896"/>
-          </a:xfrm>
-          <a:prstGeom prst="ellipse">
+            <a:off x="8558784" y="2743200"/>
+            <a:ext cx="2846527" cy="582930"/>
+          </a:xfrm>
+          <a:prstGeom prst="rect">
             <a:avLst/>
           </a:prstGeom>
           <a:solidFill>
-            <a:srgbClr val="C0612C"/>
+            <a:srgbClr val="FFFFFF"/>
+          </a:solidFill>
+          <a:ln w="9525">
+            <a:solidFill>
+              <a:srgbClr val="DDE2E7"/>
+            </a:solidFill>
+          </a:ln>
+        </p:spPr>
+        <p:txBody>
+          <a:bodyPr rtlCol="0" anchor="ctr"/>
+          <a:lstStyle/>
+          <a:p>
+            <a:pPr algn="ctr"/>
+          </a:p>
+        </p:txBody>
+      </p:sp>
+      <p:sp>
+        <p:nvSpPr>
+          <p:cNvPr id="21" name="TextBox 20"/>
+          <p:cNvSpPr txBox="1"/>
+          <p:nvPr/>
+        </p:nvSpPr>
+        <p:spPr>
+          <a:xfrm>
+            <a:off x="8723376" y="2743200"/>
+            <a:ext cx="1913839" cy="582930"/>
+          </a:xfrm>
+          <a:prstGeom prst="rect">
+            <a:avLst/>
+          </a:prstGeom>
+          <a:noFill/>
+        </p:spPr>
+        <p:txBody>
+          <a:bodyPr wrap="square" anchor="ctr" lIns="0" tIns="0" rIns="0" bIns="0">
+            <a:noAutofit/>
+          </a:bodyPr>
+          <a:lstStyle/>
+          <a:p>
+            <a:pPr algn="l" latinLnBrk="0">
+              <a:lnSpc>
+                <a:spcPct val="100000"/>
+              </a:lnSpc>
+              <a:spcBef>
+                <a:spcPts val="0"/>
+              </a:spcBef>
+              <a:spcAft>
+                <a:spcPts val="0"/>
+              </a:spcAft>
+            </a:pPr>
+            <a:r>
+              <a:rPr sz="1150" b="0">
+                <a:solidFill>
+                  <a:srgbClr val="35424F"/>
+                </a:solidFill>
+                <a:latin typeface="Microsoft YaHei"/>
+                <a:ea typeface="Microsoft YaHei"/>
+                <a:cs typeface="Microsoft YaHei"/>
+              </a:rPr>
+              <a:t>已达标算子数</a:t>
+            </a:r>
+          </a:p>
+        </p:txBody>
+      </p:sp>
+      <p:sp>
+        <p:nvSpPr>
+          <p:cNvPr id="22" name="Rounded Rectangle 21"/>
+          <p:cNvSpPr/>
+          <p:nvPr/>
+        </p:nvSpPr>
+        <p:spPr>
+          <a:xfrm>
+            <a:off x="10472623" y="2852928"/>
+            <a:ext cx="768096" cy="363474"/>
+          </a:xfrm>
+          <a:prstGeom prst="roundRect">
+            <a:avLst>
+              <a:gd name="adj" fmla="val 30000"/>
+            </a:avLst>
+          </a:prstGeom>
+          <a:solidFill>
+            <a:srgbClr val="EEF1F4"/>
           </a:solidFill>
           <a:ln>
             <a:noFill/>
           </a:ln>
         </p:spPr>
         <p:txBody>
-          <a:bodyPr rtlCol="0" anchor="ctr" wrap="square" lIns="0" tIns="0" rIns="0" bIns="0">
+          <a:bodyPr rtlCol="0" anchor="ctr" wrap="square" tIns="36576" bIns="36576">
             <a:noAutofit/>
           </a:bodyPr>
           <a:lstStyle/>
@@ -3953,29 +4796,60 @@
               </a:spcAft>
             </a:pPr>
             <a:r>
-              <a:rPr sz="1100" b="1">
-                <a:solidFill>
-                  <a:srgbClr val="FFFFFF"/>
+              <a:rPr sz="1500" b="1">
+                <a:solidFill>
+                  <a:srgbClr val="8C96A1"/>
                 </a:solidFill>
                 <a:latin typeface="Arial"/>
                 <a:ea typeface="Microsoft YaHei"/>
                 <a:cs typeface="Microsoft YaHei"/>
               </a:rPr>
-              <a:t>1</a:t>
-            </a:r>
-          </a:p>
-        </p:txBody>
-      </p:sp>
-      <p:sp>
-        <p:nvSpPr>
-          <p:cNvPr id="9" name="TextBox 8"/>
+              <a:t>—</a:t>
+            </a:r>
+          </a:p>
+        </p:txBody>
+      </p:sp>
+      <p:sp>
+        <p:nvSpPr>
+          <p:cNvPr id="23" name="Rectangle 22"/>
+          <p:cNvSpPr/>
+          <p:nvPr/>
+        </p:nvSpPr>
+        <p:spPr>
+          <a:xfrm>
+            <a:off x="8558784" y="3435858"/>
+            <a:ext cx="2846527" cy="582930"/>
+          </a:xfrm>
+          <a:prstGeom prst="rect">
+            <a:avLst/>
+          </a:prstGeom>
+          <a:solidFill>
+            <a:srgbClr val="FFFFFF"/>
+          </a:solidFill>
+          <a:ln w="9525">
+            <a:solidFill>
+              <a:srgbClr val="DDE2E7"/>
+            </a:solidFill>
+          </a:ln>
+        </p:spPr>
+        <p:txBody>
+          <a:bodyPr rtlCol="0" anchor="ctr"/>
+          <a:lstStyle/>
+          <a:p>
+            <a:pPr algn="ctr"/>
+          </a:p>
+        </p:txBody>
+      </p:sp>
+      <p:sp>
+        <p:nvSpPr>
+          <p:cNvPr id="24" name="TextBox 23"/>
           <p:cNvSpPr txBox="1"/>
           <p:nvPr/>
         </p:nvSpPr>
         <p:spPr>
           <a:xfrm>
-            <a:off x="1463040" y="2395728"/>
-            <a:ext cx="4572000" cy="274320"/>
+            <a:off x="8723376" y="3435858"/>
+            <a:ext cx="1913839" cy="582930"/>
           </a:xfrm>
           <a:prstGeom prst="rect">
             <a:avLst/>
@@ -4000,29 +4874,114 @@
               </a:spcAft>
             </a:pPr>
             <a:r>
-              <a:rPr sz="1300" b="1">
-                <a:solidFill>
-                  <a:srgbClr val="16202A"/>
+              <a:rPr sz="1150" b="0">
+                <a:solidFill>
+                  <a:srgbClr val="35424F"/>
                 </a:solidFill>
                 <a:latin typeface="Microsoft YaHei"/>
                 <a:ea typeface="Microsoft YaHei"/>
                 <a:cs typeface="Microsoft YaHei"/>
               </a:rPr>
-              <a:t>生成</a:t>
-            </a:r>
-          </a:p>
-        </p:txBody>
-      </p:sp>
-      <p:sp>
-        <p:nvSpPr>
-          <p:cNvPr id="10" name="TextBox 9"/>
+              <a:t>平均达标轮数</a:t>
+            </a:r>
+          </a:p>
+        </p:txBody>
+      </p:sp>
+      <p:sp>
+        <p:nvSpPr>
+          <p:cNvPr id="25" name="Rounded Rectangle 24"/>
+          <p:cNvSpPr/>
+          <p:nvPr/>
+        </p:nvSpPr>
+        <p:spPr>
+          <a:xfrm>
+            <a:off x="10472623" y="3545586"/>
+            <a:ext cx="768096" cy="363474"/>
+          </a:xfrm>
+          <a:prstGeom prst="roundRect">
+            <a:avLst>
+              <a:gd name="adj" fmla="val 30000"/>
+            </a:avLst>
+          </a:prstGeom>
+          <a:solidFill>
+            <a:srgbClr val="EEF1F4"/>
+          </a:solidFill>
+          <a:ln>
+            <a:noFill/>
+          </a:ln>
+        </p:spPr>
+        <p:txBody>
+          <a:bodyPr rtlCol="0" anchor="ctr" wrap="square" tIns="36576" bIns="36576">
+            <a:noAutofit/>
+          </a:bodyPr>
+          <a:lstStyle/>
+          <a:p>
+            <a:pPr algn="ctr" latinLnBrk="0">
+              <a:lnSpc>
+                <a:spcPct val="100000"/>
+              </a:lnSpc>
+              <a:spcBef>
+                <a:spcPts val="0"/>
+              </a:spcBef>
+              <a:spcAft>
+                <a:spcPts val="0"/>
+              </a:spcAft>
+            </a:pPr>
+            <a:r>
+              <a:rPr sz="1500" b="1">
+                <a:solidFill>
+                  <a:srgbClr val="8C96A1"/>
+                </a:solidFill>
+                <a:latin typeface="Arial"/>
+                <a:ea typeface="Microsoft YaHei"/>
+                <a:cs typeface="Microsoft YaHei"/>
+              </a:rPr>
+              <a:t>—</a:t>
+            </a:r>
+          </a:p>
+        </p:txBody>
+      </p:sp>
+      <p:sp>
+        <p:nvSpPr>
+          <p:cNvPr id="26" name="Rectangle 25"/>
+          <p:cNvSpPr/>
+          <p:nvPr/>
+        </p:nvSpPr>
+        <p:spPr>
+          <a:xfrm>
+            <a:off x="8558784" y="4128516"/>
+            <a:ext cx="2846527" cy="582930"/>
+          </a:xfrm>
+          <a:prstGeom prst="rect">
+            <a:avLst/>
+          </a:prstGeom>
+          <a:solidFill>
+            <a:srgbClr val="FFFFFF"/>
+          </a:solidFill>
+          <a:ln w="9525">
+            <a:solidFill>
+              <a:srgbClr val="DDE2E7"/>
+            </a:solidFill>
+          </a:ln>
+        </p:spPr>
+        <p:txBody>
+          <a:bodyPr rtlCol="0" anchor="ctr"/>
+          <a:lstStyle/>
+          <a:p>
+            <a:pPr algn="ctr"/>
+          </a:p>
+        </p:txBody>
+      </p:sp>
+      <p:sp>
+        <p:nvSpPr>
+          <p:cNvPr id="27" name="TextBox 26"/>
           <p:cNvSpPr txBox="1"/>
           <p:nvPr/>
         </p:nvSpPr>
         <p:spPr>
           <a:xfrm>
-            <a:off x="1463040" y="2670048"/>
-            <a:ext cx="4572000" cy="256032"/>
+            <a:off x="8723376" y="4128516"/>
+            <a:ext cx="1913839" cy="582930"/>
           </a:xfrm>
           <a:prstGeom prst="rect">
             <a:avLst/>
@@ -4047,7 +5006,7 @@
               </a:spcAft>
             </a:pPr>
             <a:r>
-              <a:rPr sz="1050" b="0">
+              <a:rPr sz="1150" b="0">
                 <a:solidFill>
                   <a:srgbClr val="35424F"/>
                 </a:solidFill>
@@ -4055,34 +5014,36 @@
                 <a:ea typeface="Microsoft YaHei"/>
                 <a:cs typeface="Microsoft YaHei"/>
               </a:rPr>
-              <a:t>LLM 照硬件说明卡写出内核</a:t>
-            </a:r>
-          </a:p>
-        </p:txBody>
-      </p:sp>
-      <p:sp>
-        <p:nvSpPr>
-          <p:cNvPr id="11" name="Oval 10"/>
+              <a:t>相对基线加速</a:t>
+            </a:r>
+          </a:p>
+        </p:txBody>
+      </p:sp>
+      <p:sp>
+        <p:nvSpPr>
+          <p:cNvPr id="28" name="Rounded Rectangle 27"/>
           <p:cNvSpPr/>
           <p:nvPr/>
         </p:nvSpPr>
         <p:spPr>
           <a:xfrm>
-            <a:off x="1005840" y="3204972"/>
-            <a:ext cx="310896" cy="310896"/>
-          </a:xfrm>
-          <a:prstGeom prst="ellipse">
-            <a:avLst/>
+            <a:off x="10472623" y="4238244"/>
+            <a:ext cx="768096" cy="363474"/>
+          </a:xfrm>
+          <a:prstGeom prst="roundRect">
+            <a:avLst>
+              <a:gd name="adj" fmla="val 30000"/>
+            </a:avLst>
           </a:prstGeom>
           <a:solidFill>
-            <a:srgbClr val="C0612C"/>
+            <a:srgbClr val="EEF1F4"/>
           </a:solidFill>
           <a:ln>
             <a:noFill/>
           </a:ln>
         </p:spPr>
         <p:txBody>
-          <a:bodyPr rtlCol="0" anchor="ctr" wrap="square" lIns="0" tIns="0" rIns="0" bIns="0">
+          <a:bodyPr rtlCol="0" anchor="ctr" wrap="square" tIns="36576" bIns="36576">
             <a:noAutofit/>
           </a:bodyPr>
           <a:lstStyle/>
@@ -4099,29 +5060,60 @@
               </a:spcAft>
             </a:pPr>
             <a:r>
-              <a:rPr sz="1100" b="1">
-                <a:solidFill>
-                  <a:srgbClr val="FFFFFF"/>
+              <a:rPr sz="1500" b="1">
+                <a:solidFill>
+                  <a:srgbClr val="8C96A1"/>
                 </a:solidFill>
                 <a:latin typeface="Arial"/>
                 <a:ea typeface="Microsoft YaHei"/>
                 <a:cs typeface="Microsoft YaHei"/>
               </a:rPr>
-              <a:t>2</a:t>
-            </a:r>
-          </a:p>
-        </p:txBody>
-      </p:sp>
-      <p:sp>
-        <p:nvSpPr>
-          <p:cNvPr id="12" name="TextBox 11"/>
+              <a:t>—</a:t>
+            </a:r>
+          </a:p>
+        </p:txBody>
+      </p:sp>
+      <p:sp>
+        <p:nvSpPr>
+          <p:cNvPr id="29" name="Rectangle 28"/>
+          <p:cNvSpPr/>
+          <p:nvPr/>
+        </p:nvSpPr>
+        <p:spPr>
+          <a:xfrm>
+            <a:off x="8558784" y="4821174"/>
+            <a:ext cx="2846527" cy="582930"/>
+          </a:xfrm>
+          <a:prstGeom prst="rect">
+            <a:avLst/>
+          </a:prstGeom>
+          <a:solidFill>
+            <a:srgbClr val="FFFFFF"/>
+          </a:solidFill>
+          <a:ln w="9525">
+            <a:solidFill>
+              <a:srgbClr val="DDE2E7"/>
+            </a:solidFill>
+          </a:ln>
+        </p:spPr>
+        <p:txBody>
+          <a:bodyPr rtlCol="0" anchor="ctr"/>
+          <a:lstStyle/>
+          <a:p>
+            <a:pPr algn="ctr"/>
+          </a:p>
+        </p:txBody>
+      </p:sp>
+      <p:sp>
+        <p:nvSpPr>
+          <p:cNvPr id="30" name="TextBox 29"/>
           <p:cNvSpPr txBox="1"/>
           <p:nvPr/>
         </p:nvSpPr>
         <p:spPr>
           <a:xfrm>
-            <a:off x="1463040" y="3168396"/>
-            <a:ext cx="4572000" cy="274320"/>
+            <a:off x="8723376" y="4821174"/>
+            <a:ext cx="1913839" cy="582930"/>
           </a:xfrm>
           <a:prstGeom prst="rect">
             <a:avLst/>
@@ -4146,29 +5138,83 @@
               </a:spcAft>
             </a:pPr>
             <a:r>
-              <a:rPr sz="1300" b="1">
-                <a:solidFill>
-                  <a:srgbClr val="16202A"/>
+              <a:rPr sz="1150" b="0">
+                <a:solidFill>
+                  <a:srgbClr val="35424F"/>
                 </a:solidFill>
                 <a:latin typeface="Microsoft YaHei"/>
                 <a:ea typeface="Microsoft YaHei"/>
                 <a:cs typeface="Microsoft YaHei"/>
               </a:rPr>
-              <a:t>编译</a:t>
-            </a:r>
-          </a:p>
-        </p:txBody>
-      </p:sp>
-      <p:sp>
-        <p:nvSpPr>
-          <p:cNvPr id="13" name="TextBox 12"/>
+              <a:t>理论上限达成率</a:t>
+            </a:r>
+          </a:p>
+        </p:txBody>
+      </p:sp>
+      <p:sp>
+        <p:nvSpPr>
+          <p:cNvPr id="31" name="Rounded Rectangle 30"/>
+          <p:cNvSpPr/>
+          <p:nvPr/>
+        </p:nvSpPr>
+        <p:spPr>
+          <a:xfrm>
+            <a:off x="10472623" y="4930902"/>
+            <a:ext cx="768096" cy="363474"/>
+          </a:xfrm>
+          <a:prstGeom prst="roundRect">
+            <a:avLst>
+              <a:gd name="adj" fmla="val 30000"/>
+            </a:avLst>
+          </a:prstGeom>
+          <a:solidFill>
+            <a:srgbClr val="EEF1F4"/>
+          </a:solidFill>
+          <a:ln>
+            <a:noFill/>
+          </a:ln>
+        </p:spPr>
+        <p:txBody>
+          <a:bodyPr rtlCol="0" anchor="ctr" wrap="square" tIns="36576" bIns="36576">
+            <a:noAutofit/>
+          </a:bodyPr>
+          <a:lstStyle/>
+          <a:p>
+            <a:pPr algn="ctr" latinLnBrk="0">
+              <a:lnSpc>
+                <a:spcPct val="100000"/>
+              </a:lnSpc>
+              <a:spcBef>
+                <a:spcPts val="0"/>
+              </a:spcBef>
+              <a:spcAft>
+                <a:spcPts val="0"/>
+              </a:spcAft>
+            </a:pPr>
+            <a:r>
+              <a:rPr sz="1500" b="1">
+                <a:solidFill>
+                  <a:srgbClr val="8C96A1"/>
+                </a:solidFill>
+                <a:latin typeface="Arial"/>
+                <a:ea typeface="Microsoft YaHei"/>
+                <a:cs typeface="Microsoft YaHei"/>
+              </a:rPr>
+              <a:t>—</a:t>
+            </a:r>
+          </a:p>
+        </p:txBody>
+      </p:sp>
+      <p:sp>
+        <p:nvSpPr>
+          <p:cNvPr id="32" name="TextBox 31"/>
           <p:cNvSpPr txBox="1"/>
           <p:nvPr/>
         </p:nvSpPr>
         <p:spPr>
           <a:xfrm>
-            <a:off x="1463040" y="3442715"/>
-            <a:ext cx="4572000" cy="256032"/>
+            <a:off x="8558784" y="5532120"/>
+            <a:ext cx="2846527" cy="274320"/>
           </a:xfrm>
           <a:prstGeom prst="rect">
             <a:avLst/>
@@ -4195,79 +5241,27 @@
             <a:r>
               <a:rPr sz="1050" b="0">
                 <a:solidFill>
-                  <a:srgbClr val="35424F"/>
+                  <a:srgbClr val="66727F"/>
                 </a:solidFill>
                 <a:latin typeface="Microsoft YaHei"/>
                 <a:ea typeface="Microsoft YaHei"/>
                 <a:cs typeface="Microsoft YaHei"/>
               </a:rPr>
-              <a:t>编译并拉起程序，跑通才往下走</a:t>
-            </a:r>
-          </a:p>
-        </p:txBody>
-      </p:sp>
-      <p:sp>
-        <p:nvSpPr>
-          <p:cNvPr id="14" name="Oval 13"/>
-          <p:cNvSpPr/>
-          <p:nvPr/>
-        </p:nvSpPr>
-        <p:spPr>
-          <a:xfrm>
-            <a:off x="1005840" y="3977639"/>
-            <a:ext cx="310896" cy="310896"/>
-          </a:xfrm>
-          <a:prstGeom prst="ellipse">
-            <a:avLst/>
-          </a:prstGeom>
-          <a:solidFill>
-            <a:srgbClr val="C0612C"/>
-          </a:solidFill>
-          <a:ln>
-            <a:noFill/>
-          </a:ln>
-        </p:spPr>
-        <p:txBody>
-          <a:bodyPr rtlCol="0" anchor="ctr" wrap="square" lIns="0" tIns="0" rIns="0" bIns="0">
-            <a:noAutofit/>
-          </a:bodyPr>
-          <a:lstStyle/>
-          <a:p>
-            <a:pPr algn="ctr" latinLnBrk="0">
-              <a:lnSpc>
-                <a:spcPct val="100000"/>
-              </a:lnSpc>
-              <a:spcBef>
-                <a:spcPts val="0"/>
-              </a:spcBef>
-              <a:spcAft>
-                <a:spcPts val="0"/>
-              </a:spcAft>
-            </a:pPr>
-            <a:r>
-              <a:rPr sz="1100" b="1">
-                <a:solidFill>
-                  <a:srgbClr val="FFFFFF"/>
-                </a:solidFill>
-                <a:latin typeface="Arial"/>
-                <a:ea typeface="Microsoft YaHei"/>
-                <a:cs typeface="Microsoft YaHei"/>
-              </a:rPr>
-              <a:t>3</a:t>
-            </a:r>
-          </a:p>
-        </p:txBody>
-      </p:sp>
-      <p:sp>
-        <p:nvSpPr>
-          <p:cNvPr id="15" name="TextBox 14"/>
+              <a:t>口径：真机、生产形状上的实测</a:t>
+            </a:r>
+          </a:p>
+        </p:txBody>
+      </p:sp>
+      <p:sp>
+        <p:nvSpPr>
+          <p:cNvPr id="33" name="TextBox 32"/>
           <p:cNvSpPr txBox="1"/>
           <p:nvPr/>
         </p:nvSpPr>
         <p:spPr>
           <a:xfrm>
-            <a:off x="1463040" y="3941063"/>
-            <a:ext cx="4572000" cy="274320"/>
+            <a:off x="548640" y="6382512"/>
+            <a:ext cx="9905695" cy="256032"/>
           </a:xfrm>
           <a:prstGeom prst="rect">
             <a:avLst/>
@@ -4292,1076 +5286,6 @@
               </a:spcAft>
             </a:pPr>
             <a:r>
-              <a:rPr sz="1300" b="1">
-                <a:solidFill>
-                  <a:srgbClr val="16202A"/>
-                </a:solidFill>
-                <a:latin typeface="Microsoft YaHei"/>
-                <a:ea typeface="Microsoft YaHei"/>
-                <a:cs typeface="Microsoft YaHei"/>
-              </a:rPr>
-              <a:t>对数值</a:t>
-            </a:r>
-          </a:p>
-        </p:txBody>
-      </p:sp>
-      <p:sp>
-        <p:nvSpPr>
-          <p:cNvPr id="16" name="TextBox 15"/>
-          <p:cNvSpPr txBox="1"/>
-          <p:nvPr/>
-        </p:nvSpPr>
-        <p:spPr>
-          <a:xfrm>
-            <a:off x="1463040" y="4215383"/>
-            <a:ext cx="4572000" cy="256032"/>
-          </a:xfrm>
-          <a:prstGeom prst="rect">
-            <a:avLst/>
-          </a:prstGeom>
-          <a:noFill/>
-        </p:spPr>
-        <p:txBody>
-          <a:bodyPr wrap="square" anchor="ctr" lIns="0" tIns="0" rIns="0" bIns="0">
-            <a:noAutofit/>
-          </a:bodyPr>
-          <a:lstStyle/>
-          <a:p>
-            <a:pPr algn="l" latinLnBrk="0">
-              <a:lnSpc>
-                <a:spcPct val="100000"/>
-              </a:lnSpc>
-              <a:spcBef>
-                <a:spcPts val="0"/>
-              </a:spcBef>
-              <a:spcAft>
-                <a:spcPts val="0"/>
-              </a:spcAft>
-            </a:pPr>
-            <a:r>
-              <a:rPr sz="1050" b="0">
-                <a:solidFill>
-                  <a:srgbClr val="35424F"/>
-                </a:solidFill>
-                <a:latin typeface="Microsoft YaHei"/>
-                <a:ea typeface="Microsoft YaHei"/>
-                <a:cs typeface="Microsoft YaHei"/>
-              </a:rPr>
-              <a:t>多种形状、精度逐一对 golden</a:t>
-            </a:r>
-          </a:p>
-        </p:txBody>
-      </p:sp>
-      <p:sp>
-        <p:nvSpPr>
-          <p:cNvPr id="17" name="Oval 16"/>
-          <p:cNvSpPr/>
-          <p:nvPr/>
-        </p:nvSpPr>
-        <p:spPr>
-          <a:xfrm>
-            <a:off x="1005840" y="4750308"/>
-            <a:ext cx="310896" cy="310896"/>
-          </a:xfrm>
-          <a:prstGeom prst="ellipse">
-            <a:avLst/>
-          </a:prstGeom>
-          <a:solidFill>
-            <a:srgbClr val="C0612C"/>
-          </a:solidFill>
-          <a:ln>
-            <a:noFill/>
-          </a:ln>
-        </p:spPr>
-        <p:txBody>
-          <a:bodyPr rtlCol="0" anchor="ctr" wrap="square" lIns="0" tIns="0" rIns="0" bIns="0">
-            <a:noAutofit/>
-          </a:bodyPr>
-          <a:lstStyle/>
-          <a:p>
-            <a:pPr algn="ctr" latinLnBrk="0">
-              <a:lnSpc>
-                <a:spcPct val="100000"/>
-              </a:lnSpc>
-              <a:spcBef>
-                <a:spcPts val="0"/>
-              </a:spcBef>
-              <a:spcAft>
-                <a:spcPts val="0"/>
-              </a:spcAft>
-            </a:pPr>
-            <a:r>
-              <a:rPr sz="1100" b="1">
-                <a:solidFill>
-                  <a:srgbClr val="FFFFFF"/>
-                </a:solidFill>
-                <a:latin typeface="Arial"/>
-                <a:ea typeface="Microsoft YaHei"/>
-                <a:cs typeface="Microsoft YaHei"/>
-              </a:rPr>
-              <a:t>4</a:t>
-            </a:r>
-          </a:p>
-        </p:txBody>
-      </p:sp>
-      <p:sp>
-        <p:nvSpPr>
-          <p:cNvPr id="18" name="TextBox 17"/>
-          <p:cNvSpPr txBox="1"/>
-          <p:nvPr/>
-        </p:nvSpPr>
-        <p:spPr>
-          <a:xfrm>
-            <a:off x="1463040" y="4713732"/>
-            <a:ext cx="4572000" cy="274320"/>
-          </a:xfrm>
-          <a:prstGeom prst="rect">
-            <a:avLst/>
-          </a:prstGeom>
-          <a:noFill/>
-        </p:spPr>
-        <p:txBody>
-          <a:bodyPr wrap="square" anchor="ctr" lIns="0" tIns="0" rIns="0" bIns="0">
-            <a:noAutofit/>
-          </a:bodyPr>
-          <a:lstStyle/>
-          <a:p>
-            <a:pPr algn="l" latinLnBrk="0">
-              <a:lnSpc>
-                <a:spcPct val="100000"/>
-              </a:lnSpc>
-              <a:spcBef>
-                <a:spcPts val="0"/>
-              </a:spcBef>
-              <a:spcAft>
-                <a:spcPts val="0"/>
-              </a:spcAft>
-            </a:pPr>
-            <a:r>
-              <a:rPr sz="1300" b="1">
-                <a:solidFill>
-                  <a:srgbClr val="16202A"/>
-                </a:solidFill>
-                <a:latin typeface="Microsoft YaHei"/>
-                <a:ea typeface="Microsoft YaHei"/>
-                <a:cs typeface="Microsoft YaHei"/>
-              </a:rPr>
-              <a:t>测性能</a:t>
-            </a:r>
-          </a:p>
-        </p:txBody>
-      </p:sp>
-      <p:sp>
-        <p:nvSpPr>
-          <p:cNvPr id="19" name="TextBox 18"/>
-          <p:cNvSpPr txBox="1"/>
-          <p:nvPr/>
-        </p:nvSpPr>
-        <p:spPr>
-          <a:xfrm>
-            <a:off x="1463040" y="4988052"/>
-            <a:ext cx="4572000" cy="256032"/>
-          </a:xfrm>
-          <a:prstGeom prst="rect">
-            <a:avLst/>
-          </a:prstGeom>
-          <a:noFill/>
-        </p:spPr>
-        <p:txBody>
-          <a:bodyPr wrap="square" anchor="ctr" lIns="0" tIns="0" rIns="0" bIns="0">
-            <a:noAutofit/>
-          </a:bodyPr>
-          <a:lstStyle/>
-          <a:p>
-            <a:pPr algn="l" latinLnBrk="0">
-              <a:lnSpc>
-                <a:spcPct val="100000"/>
-              </a:lnSpc>
-              <a:spcBef>
-                <a:spcPts val="0"/>
-              </a:spcBef>
-              <a:spcAft>
-                <a:spcPts val="0"/>
-              </a:spcAft>
-            </a:pPr>
-            <a:r>
-              <a:rPr sz="1050" b="0">
-                <a:solidFill>
-                  <a:srgbClr val="35424F"/>
-                </a:solidFill>
-                <a:latin typeface="Microsoft YaHei"/>
-                <a:ea typeface="Microsoft YaHei"/>
-                <a:cs typeface="Microsoft YaHei"/>
-              </a:rPr>
-              <a:t>取中位延迟，和理论上限比</a:t>
-            </a:r>
-          </a:p>
-        </p:txBody>
-      </p:sp>
-      <p:sp>
-        <p:nvSpPr>
-          <p:cNvPr id="20" name="Oval 19"/>
-          <p:cNvSpPr/>
-          <p:nvPr/>
-        </p:nvSpPr>
-        <p:spPr>
-          <a:xfrm>
-            <a:off x="1005840" y="5522976"/>
-            <a:ext cx="310896" cy="310896"/>
-          </a:xfrm>
-          <a:prstGeom prst="ellipse">
-            <a:avLst/>
-          </a:prstGeom>
-          <a:solidFill>
-            <a:srgbClr val="C0612C"/>
-          </a:solidFill>
-          <a:ln>
-            <a:noFill/>
-          </a:ln>
-        </p:spPr>
-        <p:txBody>
-          <a:bodyPr rtlCol="0" anchor="ctr" wrap="square" lIns="0" tIns="0" rIns="0" bIns="0">
-            <a:noAutofit/>
-          </a:bodyPr>
-          <a:lstStyle/>
-          <a:p>
-            <a:pPr algn="ctr" latinLnBrk="0">
-              <a:lnSpc>
-                <a:spcPct val="100000"/>
-              </a:lnSpc>
-              <a:spcBef>
-                <a:spcPts val="0"/>
-              </a:spcBef>
-              <a:spcAft>
-                <a:spcPts val="0"/>
-              </a:spcAft>
-            </a:pPr>
-            <a:r>
-              <a:rPr sz="1100" b="1">
-                <a:solidFill>
-                  <a:srgbClr val="FFFFFF"/>
-                </a:solidFill>
-                <a:latin typeface="Arial"/>
-                <a:ea typeface="Microsoft YaHei"/>
-                <a:cs typeface="Microsoft YaHei"/>
-              </a:rPr>
-              <a:t>5</a:t>
-            </a:r>
-          </a:p>
-        </p:txBody>
-      </p:sp>
-      <p:sp>
-        <p:nvSpPr>
-          <p:cNvPr id="21" name="TextBox 20"/>
-          <p:cNvSpPr txBox="1"/>
-          <p:nvPr/>
-        </p:nvSpPr>
-        <p:spPr>
-          <a:xfrm>
-            <a:off x="1463040" y="5486400"/>
-            <a:ext cx="4572000" cy="274320"/>
-          </a:xfrm>
-          <a:prstGeom prst="rect">
-            <a:avLst/>
-          </a:prstGeom>
-          <a:noFill/>
-        </p:spPr>
-        <p:txBody>
-          <a:bodyPr wrap="square" anchor="ctr" lIns="0" tIns="0" rIns="0" bIns="0">
-            <a:noAutofit/>
-          </a:bodyPr>
-          <a:lstStyle/>
-          <a:p>
-            <a:pPr algn="l" latinLnBrk="0">
-              <a:lnSpc>
-                <a:spcPct val="100000"/>
-              </a:lnSpc>
-              <a:spcBef>
-                <a:spcPts val="0"/>
-              </a:spcBef>
-              <a:spcAft>
-                <a:spcPts val="0"/>
-              </a:spcAft>
-            </a:pPr>
-            <a:r>
-              <a:rPr sz="1300" b="1">
-                <a:solidFill>
-                  <a:srgbClr val="16202A"/>
-                </a:solidFill>
-                <a:latin typeface="Microsoft YaHei"/>
-                <a:ea typeface="Microsoft YaHei"/>
-                <a:cs typeface="Microsoft YaHei"/>
-              </a:rPr>
-              <a:t>给反馈</a:t>
-            </a:r>
-          </a:p>
-        </p:txBody>
-      </p:sp>
-      <p:sp>
-        <p:nvSpPr>
-          <p:cNvPr id="22" name="TextBox 21"/>
-          <p:cNvSpPr txBox="1"/>
-          <p:nvPr/>
-        </p:nvSpPr>
-        <p:spPr>
-          <a:xfrm>
-            <a:off x="1463040" y="5760720"/>
-            <a:ext cx="4572000" cy="256032"/>
-          </a:xfrm>
-          <a:prstGeom prst="rect">
-            <a:avLst/>
-          </a:prstGeom>
-          <a:noFill/>
-        </p:spPr>
-        <p:txBody>
-          <a:bodyPr wrap="square" anchor="ctr" lIns="0" tIns="0" rIns="0" bIns="0">
-            <a:noAutofit/>
-          </a:bodyPr>
-          <a:lstStyle/>
-          <a:p>
-            <a:pPr algn="l" latinLnBrk="0">
-              <a:lnSpc>
-                <a:spcPct val="100000"/>
-              </a:lnSpc>
-              <a:spcBef>
-                <a:spcPts val="0"/>
-              </a:spcBef>
-              <a:spcAft>
-                <a:spcPts val="0"/>
-              </a:spcAft>
-            </a:pPr>
-            <a:r>
-              <a:rPr sz="1050" b="0">
-                <a:solidFill>
-                  <a:srgbClr val="35424F"/>
-                </a:solidFill>
-                <a:latin typeface="Microsoft YaHei"/>
-                <a:ea typeface="Microsoft YaHei"/>
-                <a:cs typeface="Microsoft YaHei"/>
-              </a:rPr>
-              <a:t>打分、指出慢在哪，带进下一轮</a:t>
-            </a:r>
-          </a:p>
-        </p:txBody>
-      </p:sp>
-      <p:sp>
-        <p:nvSpPr>
-          <p:cNvPr id="23" name="Freeform 22"/>
-          <p:cNvSpPr/>
-          <p:nvPr/>
-        </p:nvSpPr>
-        <p:spPr>
-          <a:xfrm>
-            <a:off x="594360" y="2587752"/>
-            <a:ext cx="566928" cy="3337560"/>
-          </a:xfrm>
-          <a:custGeom>
-            <a:avLst/>
-            <a:gdLst/>
-            <a:ahLst/>
-            <a:cxnLst/>
-            <a:rect l="l" t="t" r="r" b="b"/>
-            <a:pathLst>
-              <a:path w="566928" h="3337560">
-                <a:moveTo>
-                  <a:pt x="566928" y="3337560"/>
-                </a:moveTo>
-                <a:lnTo>
-                  <a:pt x="0" y="3337560"/>
-                </a:lnTo>
-                <a:lnTo>
-                  <a:pt x="0" y="0"/>
-                </a:lnTo>
-                <a:lnTo>
-                  <a:pt x="374904" y="0"/>
-                </a:lnTo>
-              </a:path>
-            </a:pathLst>
-          </a:custGeom>
-          <a:noFill/>
-          <a:ln w="15875">
-            <a:solidFill>
-              <a:srgbClr val="C0612C"/>
-            </a:solidFill>
-            <a:tailEnd type="triangle" w="med" len="med"/>
-          </a:ln>
-        </p:spPr>
-        <p:txBody>
-          <a:bodyPr rtlCol="0" anchor="ctr"/>
-          <a:lstStyle/>
-          <a:p>
-            <a:pPr algn="ctr"/>
-          </a:p>
-        </p:txBody>
-      </p:sp>
-      <p:sp>
-        <p:nvSpPr>
-          <p:cNvPr id="24" name="Rectangle 23"/>
-          <p:cNvSpPr/>
-          <p:nvPr/>
-        </p:nvSpPr>
-        <p:spPr>
-          <a:xfrm>
-            <a:off x="5897880" y="2066543"/>
-            <a:ext cx="5745175" cy="3785616"/>
-          </a:xfrm>
-          <a:prstGeom prst="rect">
-            <a:avLst/>
-          </a:prstGeom>
-          <a:solidFill>
-            <a:srgbClr val="F8EADF"/>
-          </a:solidFill>
-          <a:ln>
-            <a:noFill/>
-          </a:ln>
-        </p:spPr>
-        <p:txBody>
-          <a:bodyPr rtlCol="0" anchor="ctr"/>
-          <a:lstStyle/>
-          <a:p>
-            <a:pPr algn="ctr"/>
-          </a:p>
-        </p:txBody>
-      </p:sp>
-      <p:sp>
-        <p:nvSpPr>
-          <p:cNvPr id="25" name="TextBox 24"/>
-          <p:cNvSpPr txBox="1"/>
-          <p:nvPr/>
-        </p:nvSpPr>
-        <p:spPr>
-          <a:xfrm>
-            <a:off x="6135624" y="2212848"/>
-            <a:ext cx="5287975" cy="292608"/>
-          </a:xfrm>
-          <a:prstGeom prst="rect">
-            <a:avLst/>
-          </a:prstGeom>
-          <a:noFill/>
-        </p:spPr>
-        <p:txBody>
-          <a:bodyPr wrap="square" anchor="ctr" lIns="0" tIns="0" rIns="0" bIns="0">
-            <a:noAutofit/>
-          </a:bodyPr>
-          <a:lstStyle/>
-          <a:p>
-            <a:pPr algn="l" latinLnBrk="0">
-              <a:lnSpc>
-                <a:spcPct val="100000"/>
-              </a:lnSpc>
-              <a:spcBef>
-                <a:spcPts val="0"/>
-              </a:spcBef>
-              <a:spcAft>
-                <a:spcPts val="0"/>
-              </a:spcAft>
-            </a:pPr>
-            <a:r>
-              <a:rPr sz="1400" b="1">
-                <a:solidFill>
-                  <a:srgbClr val="16202A"/>
-                </a:solidFill>
-                <a:latin typeface="Microsoft YaHei"/>
-                <a:ea typeface="Microsoft YaHei"/>
-                <a:cs typeface="Microsoft YaHei"/>
-              </a:rPr>
-              <a:t>效果</a:t>
-            </a:r>
-            <a:r>
-              <a:rPr sz="1050" b="0">
-                <a:solidFill>
-                  <a:srgbClr val="8C96A1"/>
-                </a:solidFill>
-                <a:latin typeface="Microsoft YaHei"/>
-                <a:ea typeface="Microsoft YaHei"/>
-                <a:cs typeface="Microsoft YaHei"/>
-              </a:rPr>
-              <a:t>　数字待补</a:t>
-            </a:r>
-          </a:p>
-        </p:txBody>
-      </p:sp>
-      <p:sp>
-        <p:nvSpPr>
-          <p:cNvPr id="26" name="Rectangle 25"/>
-          <p:cNvSpPr/>
-          <p:nvPr/>
-        </p:nvSpPr>
-        <p:spPr>
-          <a:xfrm>
-            <a:off x="6135624" y="2688336"/>
-            <a:ext cx="2552547" cy="1188720"/>
-          </a:xfrm>
-          <a:prstGeom prst="rect">
-            <a:avLst/>
-          </a:prstGeom>
-          <a:solidFill>
-            <a:srgbClr val="FFFFFF"/>
-          </a:solidFill>
-          <a:ln w="9525">
-            <a:solidFill>
-              <a:srgbClr val="DDE2E7"/>
-            </a:solidFill>
-          </a:ln>
-        </p:spPr>
-        <p:txBody>
-          <a:bodyPr rtlCol="0" anchor="ctr"/>
-          <a:lstStyle/>
-          <a:p>
-            <a:pPr algn="ctr"/>
-          </a:p>
-        </p:txBody>
-      </p:sp>
-      <p:sp>
-        <p:nvSpPr>
-          <p:cNvPr id="27" name="TextBox 26"/>
-          <p:cNvSpPr txBox="1"/>
-          <p:nvPr/>
-        </p:nvSpPr>
-        <p:spPr>
-          <a:xfrm>
-            <a:off x="6135624" y="2926080"/>
-            <a:ext cx="2552547" cy="457200"/>
-          </a:xfrm>
-          <a:prstGeom prst="rect">
-            <a:avLst/>
-          </a:prstGeom>
-          <a:noFill/>
-        </p:spPr>
-        <p:txBody>
-          <a:bodyPr wrap="square" anchor="ctr" lIns="0" tIns="0" rIns="0" bIns="0">
-            <a:noAutofit/>
-          </a:bodyPr>
-          <a:lstStyle/>
-          <a:p>
-            <a:pPr algn="ctr" latinLnBrk="0">
-              <a:lnSpc>
-                <a:spcPct val="100000"/>
-              </a:lnSpc>
-              <a:spcBef>
-                <a:spcPts val="0"/>
-              </a:spcBef>
-              <a:spcAft>
-                <a:spcPts val="0"/>
-              </a:spcAft>
-            </a:pPr>
-            <a:r>
-              <a:rPr sz="2800" b="1">
-                <a:solidFill>
-                  <a:srgbClr val="C5CCD4"/>
-                </a:solidFill>
-                <a:latin typeface="Arial"/>
-                <a:ea typeface="Microsoft YaHei"/>
-                <a:cs typeface="Microsoft YaHei"/>
-              </a:rPr>
-              <a:t>—</a:t>
-            </a:r>
-          </a:p>
-        </p:txBody>
-      </p:sp>
-      <p:sp>
-        <p:nvSpPr>
-          <p:cNvPr id="28" name="TextBox 27"/>
-          <p:cNvSpPr txBox="1"/>
-          <p:nvPr/>
-        </p:nvSpPr>
-        <p:spPr>
-          <a:xfrm>
-            <a:off x="6135624" y="3438144"/>
-            <a:ext cx="2552547" cy="274320"/>
-          </a:xfrm>
-          <a:prstGeom prst="rect">
-            <a:avLst/>
-          </a:prstGeom>
-          <a:noFill/>
-        </p:spPr>
-        <p:txBody>
-          <a:bodyPr wrap="square" anchor="ctr" lIns="0" tIns="0" rIns="0" bIns="0">
-            <a:noAutofit/>
-          </a:bodyPr>
-          <a:lstStyle/>
-          <a:p>
-            <a:pPr algn="ctr" latinLnBrk="0">
-              <a:lnSpc>
-                <a:spcPct val="100000"/>
-              </a:lnSpc>
-              <a:spcBef>
-                <a:spcPts val="0"/>
-              </a:spcBef>
-              <a:spcAft>
-                <a:spcPts val="0"/>
-              </a:spcAft>
-            </a:pPr>
-            <a:r>
-              <a:rPr sz="1100" b="0">
-                <a:solidFill>
-                  <a:srgbClr val="35424F"/>
-                </a:solidFill>
-                <a:latin typeface="Microsoft YaHei"/>
-                <a:ea typeface="Microsoft YaHei"/>
-                <a:cs typeface="Microsoft YaHei"/>
-              </a:rPr>
-              <a:t>已达标算子数</a:t>
-            </a:r>
-          </a:p>
-        </p:txBody>
-      </p:sp>
-      <p:sp>
-        <p:nvSpPr>
-          <p:cNvPr id="29" name="Rectangle 28"/>
-          <p:cNvSpPr/>
-          <p:nvPr/>
-        </p:nvSpPr>
-        <p:spPr>
-          <a:xfrm>
-            <a:off x="8852763" y="2688336"/>
-            <a:ext cx="2552547" cy="1188720"/>
-          </a:xfrm>
-          <a:prstGeom prst="rect">
-            <a:avLst/>
-          </a:prstGeom>
-          <a:solidFill>
-            <a:srgbClr val="FFFFFF"/>
-          </a:solidFill>
-          <a:ln w="9525">
-            <a:solidFill>
-              <a:srgbClr val="DDE2E7"/>
-            </a:solidFill>
-          </a:ln>
-        </p:spPr>
-        <p:txBody>
-          <a:bodyPr rtlCol="0" anchor="ctr"/>
-          <a:lstStyle/>
-          <a:p>
-            <a:pPr algn="ctr"/>
-          </a:p>
-        </p:txBody>
-      </p:sp>
-      <p:sp>
-        <p:nvSpPr>
-          <p:cNvPr id="30" name="TextBox 29"/>
-          <p:cNvSpPr txBox="1"/>
-          <p:nvPr/>
-        </p:nvSpPr>
-        <p:spPr>
-          <a:xfrm>
-            <a:off x="8852763" y="2926080"/>
-            <a:ext cx="2552547" cy="457200"/>
-          </a:xfrm>
-          <a:prstGeom prst="rect">
-            <a:avLst/>
-          </a:prstGeom>
-          <a:noFill/>
-        </p:spPr>
-        <p:txBody>
-          <a:bodyPr wrap="square" anchor="ctr" lIns="0" tIns="0" rIns="0" bIns="0">
-            <a:noAutofit/>
-          </a:bodyPr>
-          <a:lstStyle/>
-          <a:p>
-            <a:pPr algn="ctr" latinLnBrk="0">
-              <a:lnSpc>
-                <a:spcPct val="100000"/>
-              </a:lnSpc>
-              <a:spcBef>
-                <a:spcPts val="0"/>
-              </a:spcBef>
-              <a:spcAft>
-                <a:spcPts val="0"/>
-              </a:spcAft>
-            </a:pPr>
-            <a:r>
-              <a:rPr sz="2800" b="1">
-                <a:solidFill>
-                  <a:srgbClr val="C5CCD4"/>
-                </a:solidFill>
-                <a:latin typeface="Arial"/>
-                <a:ea typeface="Microsoft YaHei"/>
-                <a:cs typeface="Microsoft YaHei"/>
-              </a:rPr>
-              <a:t>—</a:t>
-            </a:r>
-          </a:p>
-        </p:txBody>
-      </p:sp>
-      <p:sp>
-        <p:nvSpPr>
-          <p:cNvPr id="31" name="TextBox 30"/>
-          <p:cNvSpPr txBox="1"/>
-          <p:nvPr/>
-        </p:nvSpPr>
-        <p:spPr>
-          <a:xfrm>
-            <a:off x="8852763" y="3438144"/>
-            <a:ext cx="2552547" cy="274320"/>
-          </a:xfrm>
-          <a:prstGeom prst="rect">
-            <a:avLst/>
-          </a:prstGeom>
-          <a:noFill/>
-        </p:spPr>
-        <p:txBody>
-          <a:bodyPr wrap="square" anchor="ctr" lIns="0" tIns="0" rIns="0" bIns="0">
-            <a:noAutofit/>
-          </a:bodyPr>
-          <a:lstStyle/>
-          <a:p>
-            <a:pPr algn="ctr" latinLnBrk="0">
-              <a:lnSpc>
-                <a:spcPct val="100000"/>
-              </a:lnSpc>
-              <a:spcBef>
-                <a:spcPts val="0"/>
-              </a:spcBef>
-              <a:spcAft>
-                <a:spcPts val="0"/>
-              </a:spcAft>
-            </a:pPr>
-            <a:r>
-              <a:rPr sz="1100" b="0">
-                <a:solidFill>
-                  <a:srgbClr val="35424F"/>
-                </a:solidFill>
-                <a:latin typeface="Microsoft YaHei"/>
-                <a:ea typeface="Microsoft YaHei"/>
-                <a:cs typeface="Microsoft YaHei"/>
-              </a:rPr>
-              <a:t>平均达标轮数</a:t>
-            </a:r>
-          </a:p>
-        </p:txBody>
-      </p:sp>
-      <p:sp>
-        <p:nvSpPr>
-          <p:cNvPr id="32" name="Rectangle 31"/>
-          <p:cNvSpPr/>
-          <p:nvPr/>
-        </p:nvSpPr>
-        <p:spPr>
-          <a:xfrm>
-            <a:off x="6135624" y="4023360"/>
-            <a:ext cx="2552547" cy="1188720"/>
-          </a:xfrm>
-          <a:prstGeom prst="rect">
-            <a:avLst/>
-          </a:prstGeom>
-          <a:solidFill>
-            <a:srgbClr val="FFFFFF"/>
-          </a:solidFill>
-          <a:ln w="9525">
-            <a:solidFill>
-              <a:srgbClr val="DDE2E7"/>
-            </a:solidFill>
-          </a:ln>
-        </p:spPr>
-        <p:txBody>
-          <a:bodyPr rtlCol="0" anchor="ctr"/>
-          <a:lstStyle/>
-          <a:p>
-            <a:pPr algn="ctr"/>
-          </a:p>
-        </p:txBody>
-      </p:sp>
-      <p:sp>
-        <p:nvSpPr>
-          <p:cNvPr id="33" name="TextBox 32"/>
-          <p:cNvSpPr txBox="1"/>
-          <p:nvPr/>
-        </p:nvSpPr>
-        <p:spPr>
-          <a:xfrm>
-            <a:off x="6135624" y="4261104"/>
-            <a:ext cx="2552547" cy="457200"/>
-          </a:xfrm>
-          <a:prstGeom prst="rect">
-            <a:avLst/>
-          </a:prstGeom>
-          <a:noFill/>
-        </p:spPr>
-        <p:txBody>
-          <a:bodyPr wrap="square" anchor="ctr" lIns="0" tIns="0" rIns="0" bIns="0">
-            <a:noAutofit/>
-          </a:bodyPr>
-          <a:lstStyle/>
-          <a:p>
-            <a:pPr algn="ctr" latinLnBrk="0">
-              <a:lnSpc>
-                <a:spcPct val="100000"/>
-              </a:lnSpc>
-              <a:spcBef>
-                <a:spcPts val="0"/>
-              </a:spcBef>
-              <a:spcAft>
-                <a:spcPts val="0"/>
-              </a:spcAft>
-            </a:pPr>
-            <a:r>
-              <a:rPr sz="2800" b="1">
-                <a:solidFill>
-                  <a:srgbClr val="C5CCD4"/>
-                </a:solidFill>
-                <a:latin typeface="Arial"/>
-                <a:ea typeface="Microsoft YaHei"/>
-                <a:cs typeface="Microsoft YaHei"/>
-              </a:rPr>
-              <a:t>—</a:t>
-            </a:r>
-          </a:p>
-        </p:txBody>
-      </p:sp>
-      <p:sp>
-        <p:nvSpPr>
-          <p:cNvPr id="34" name="TextBox 33"/>
-          <p:cNvSpPr txBox="1"/>
-          <p:nvPr/>
-        </p:nvSpPr>
-        <p:spPr>
-          <a:xfrm>
-            <a:off x="6135624" y="4773168"/>
-            <a:ext cx="2552547" cy="274320"/>
-          </a:xfrm>
-          <a:prstGeom prst="rect">
-            <a:avLst/>
-          </a:prstGeom>
-          <a:noFill/>
-        </p:spPr>
-        <p:txBody>
-          <a:bodyPr wrap="square" anchor="ctr" lIns="0" tIns="0" rIns="0" bIns="0">
-            <a:noAutofit/>
-          </a:bodyPr>
-          <a:lstStyle/>
-          <a:p>
-            <a:pPr algn="ctr" latinLnBrk="0">
-              <a:lnSpc>
-                <a:spcPct val="100000"/>
-              </a:lnSpc>
-              <a:spcBef>
-                <a:spcPts val="0"/>
-              </a:spcBef>
-              <a:spcAft>
-                <a:spcPts val="0"/>
-              </a:spcAft>
-            </a:pPr>
-            <a:r>
-              <a:rPr sz="1100" b="0">
-                <a:solidFill>
-                  <a:srgbClr val="35424F"/>
-                </a:solidFill>
-                <a:latin typeface="Microsoft YaHei"/>
-                <a:ea typeface="Microsoft YaHei"/>
-                <a:cs typeface="Microsoft YaHei"/>
-              </a:rPr>
-              <a:t>相对基线加速</a:t>
-            </a:r>
-          </a:p>
-        </p:txBody>
-      </p:sp>
-      <p:sp>
-        <p:nvSpPr>
-          <p:cNvPr id="35" name="Rectangle 34"/>
-          <p:cNvSpPr/>
-          <p:nvPr/>
-        </p:nvSpPr>
-        <p:spPr>
-          <a:xfrm>
-            <a:off x="8852763" y="4023360"/>
-            <a:ext cx="2552547" cy="1188720"/>
-          </a:xfrm>
-          <a:prstGeom prst="rect">
-            <a:avLst/>
-          </a:prstGeom>
-          <a:solidFill>
-            <a:srgbClr val="FFFFFF"/>
-          </a:solidFill>
-          <a:ln w="9525">
-            <a:solidFill>
-              <a:srgbClr val="DDE2E7"/>
-            </a:solidFill>
-          </a:ln>
-        </p:spPr>
-        <p:txBody>
-          <a:bodyPr rtlCol="0" anchor="ctr"/>
-          <a:lstStyle/>
-          <a:p>
-            <a:pPr algn="ctr"/>
-          </a:p>
-        </p:txBody>
-      </p:sp>
-      <p:sp>
-        <p:nvSpPr>
-          <p:cNvPr id="36" name="TextBox 35"/>
-          <p:cNvSpPr txBox="1"/>
-          <p:nvPr/>
-        </p:nvSpPr>
-        <p:spPr>
-          <a:xfrm>
-            <a:off x="8852763" y="4261104"/>
-            <a:ext cx="2552547" cy="457200"/>
-          </a:xfrm>
-          <a:prstGeom prst="rect">
-            <a:avLst/>
-          </a:prstGeom>
-          <a:noFill/>
-        </p:spPr>
-        <p:txBody>
-          <a:bodyPr wrap="square" anchor="ctr" lIns="0" tIns="0" rIns="0" bIns="0">
-            <a:noAutofit/>
-          </a:bodyPr>
-          <a:lstStyle/>
-          <a:p>
-            <a:pPr algn="ctr" latinLnBrk="0">
-              <a:lnSpc>
-                <a:spcPct val="100000"/>
-              </a:lnSpc>
-              <a:spcBef>
-                <a:spcPts val="0"/>
-              </a:spcBef>
-              <a:spcAft>
-                <a:spcPts val="0"/>
-              </a:spcAft>
-            </a:pPr>
-            <a:r>
-              <a:rPr sz="2800" b="1">
-                <a:solidFill>
-                  <a:srgbClr val="C5CCD4"/>
-                </a:solidFill>
-                <a:latin typeface="Arial"/>
-                <a:ea typeface="Microsoft YaHei"/>
-                <a:cs typeface="Microsoft YaHei"/>
-              </a:rPr>
-              <a:t>—</a:t>
-            </a:r>
-          </a:p>
-        </p:txBody>
-      </p:sp>
-      <p:sp>
-        <p:nvSpPr>
-          <p:cNvPr id="37" name="TextBox 36"/>
-          <p:cNvSpPr txBox="1"/>
-          <p:nvPr/>
-        </p:nvSpPr>
-        <p:spPr>
-          <a:xfrm>
-            <a:off x="8852763" y="4773168"/>
-            <a:ext cx="2552547" cy="274320"/>
-          </a:xfrm>
-          <a:prstGeom prst="rect">
-            <a:avLst/>
-          </a:prstGeom>
-          <a:noFill/>
-        </p:spPr>
-        <p:txBody>
-          <a:bodyPr wrap="square" anchor="ctr" lIns="0" tIns="0" rIns="0" bIns="0">
-            <a:noAutofit/>
-          </a:bodyPr>
-          <a:lstStyle/>
-          <a:p>
-            <a:pPr algn="ctr" latinLnBrk="0">
-              <a:lnSpc>
-                <a:spcPct val="100000"/>
-              </a:lnSpc>
-              <a:spcBef>
-                <a:spcPts val="0"/>
-              </a:spcBef>
-              <a:spcAft>
-                <a:spcPts val="0"/>
-              </a:spcAft>
-            </a:pPr>
-            <a:r>
-              <a:rPr sz="1100" b="0">
-                <a:solidFill>
-                  <a:srgbClr val="35424F"/>
-                </a:solidFill>
-                <a:latin typeface="Microsoft YaHei"/>
-                <a:ea typeface="Microsoft YaHei"/>
-                <a:cs typeface="Microsoft YaHei"/>
-              </a:rPr>
-              <a:t>理论上限达成率</a:t>
-            </a:r>
-          </a:p>
-        </p:txBody>
-      </p:sp>
-      <p:sp>
-        <p:nvSpPr>
-          <p:cNvPr id="38" name="TextBox 37"/>
-          <p:cNvSpPr txBox="1"/>
-          <p:nvPr/>
-        </p:nvSpPr>
-        <p:spPr>
-          <a:xfrm>
-            <a:off x="6135624" y="5431536"/>
-            <a:ext cx="5269687" cy="274320"/>
-          </a:xfrm>
-          <a:prstGeom prst="rect">
-            <a:avLst/>
-          </a:prstGeom>
-          <a:noFill/>
-        </p:spPr>
-        <p:txBody>
-          <a:bodyPr wrap="square" anchor="ctr" lIns="0" tIns="0" rIns="0" bIns="0">
-            <a:noAutofit/>
-          </a:bodyPr>
-          <a:lstStyle/>
-          <a:p>
-            <a:pPr algn="l" latinLnBrk="0">
-              <a:lnSpc>
-                <a:spcPct val="100000"/>
-              </a:lnSpc>
-              <a:spcBef>
-                <a:spcPts val="0"/>
-              </a:spcBef>
-              <a:spcAft>
-                <a:spcPts val="0"/>
-              </a:spcAft>
-            </a:pPr>
-            <a:r>
-              <a:rPr sz="1050" b="0">
-                <a:solidFill>
-                  <a:srgbClr val="66727F"/>
-                </a:solidFill>
-                <a:latin typeface="Microsoft YaHei"/>
-                <a:ea typeface="Microsoft YaHei"/>
-                <a:cs typeface="Microsoft YaHei"/>
-              </a:rPr>
-              <a:t>口径：真机、生产形状上的实测</a:t>
-            </a:r>
-          </a:p>
-        </p:txBody>
-      </p:sp>
-      <p:sp>
-        <p:nvSpPr>
-          <p:cNvPr id="39" name="TextBox 38"/>
-          <p:cNvSpPr txBox="1"/>
-          <p:nvPr/>
-        </p:nvSpPr>
-        <p:spPr>
-          <a:xfrm>
-            <a:off x="548640" y="6382512"/>
-            <a:ext cx="9905695" cy="256032"/>
-          </a:xfrm>
-          <a:prstGeom prst="rect">
-            <a:avLst/>
-          </a:prstGeom>
-          <a:noFill/>
-        </p:spPr>
-        <p:txBody>
-          <a:bodyPr wrap="square" anchor="ctr" lIns="0" tIns="0" rIns="0" bIns="0">
-            <a:noAutofit/>
-          </a:bodyPr>
-          <a:lstStyle/>
-          <a:p>
-            <a:pPr algn="l" latinLnBrk="0">
-              <a:lnSpc>
-                <a:spcPct val="100000"/>
-              </a:lnSpc>
-              <a:spcBef>
-                <a:spcPts val="0"/>
-              </a:spcBef>
-              <a:spcAft>
-                <a:spcPts val="0"/>
-              </a:spcAft>
-            </a:pPr>
-            <a:r>
               <a:rPr sz="1000" b="0">
                 <a:solidFill>
                   <a:srgbClr val="66727F"/>
@@ -5377,7 +5301,7 @@
       </p:sp>
       <p:sp>
         <p:nvSpPr>
-          <p:cNvPr id="40" name="TextBox 39"/>
+          <p:cNvPr id="34" name="TextBox 33"/>
           <p:cNvSpPr txBox="1"/>
           <p:nvPr/>
         </p:nvSpPr>

--- a/slides/xpugen_operator_agent.pptx
+++ b/slides/xpugen_operator_agent.pptx
@@ -515,7 +515,7 @@
                 <a:ea typeface="Microsoft YaHei"/>
                 <a:cs typeface="Microsoft YaHei"/>
               </a:rPr>
-              <a:t>【附页 · xpugen · 约 70 秒（1:10）】</a:t>
+              <a:t>【附页 · xpugen · 约 125 秒（2:05）】</a:t>
             </a:r>
           </a:p>
           <a:p>
@@ -551,7 +551,7 @@
                 <a:ea typeface="Microsoft YaHei"/>
                 <a:cs typeface="Microsoft YaHei"/>
               </a:rPr>
-              <a:t>左边这个圈就是它一轮迭代。入口有两条：从一句需求开始，或者从现有实现反推出规格，第 0 轮直接拿现有实现当基线，后面在它上面改。</a:t>
+              <a:t>先说清结构：这里只有一个 LLM，就是左边这个生成。右边编译、对数值、测速、看机制全是确定性的评测流程，不是 agent，不会自由发挥。</a:t>
             </a:r>
           </a:p>
           <a:p>
@@ -569,7 +569,7 @@
                 <a:ea typeface="Microsoft YaHei"/>
                 <a:cs typeface="Microsoft YaHei"/>
               </a:rPr>
-              <a:t>转一圈是这样：LLM 照硬件说明卡写内核，编译跑起来，多种形状和精度逐一和 golden 对数值，再测延迟、跟理论上限比，最后把打分和慢在哪带进下一轮。最多八轮。</a:t>
+              <a:t>左边动手之前还有一道门：先把需求问清楚、至少比过两个方案，才允许写内核。入口有两条，从一句需求开始，或者从现有实现反推出规格，第 0 轮直接拿它当基线。</a:t>
             </a:r>
           </a:p>
           <a:p>
@@ -587,7 +587,7 @@
                 <a:ea typeface="Microsoft YaHei"/>
                 <a:cs typeface="Microsoft YaHei"/>
               </a:rPr>
-              <a:t>右边是效果。（按实测数字讲：已经有多少个算子达标、平均几轮、相对原来的实现快多少、离理论上限还差多少。口径都是真机、生产形状上的实测。）</a:t>
+              <a:t>右边编译跑通、多种形状和精度逐一对 CPU golden；性能上分两路取证——真机回答快了多少，模拟器看逐单元 busy、跨引擎并行，回答为什么慢，两边对不上以真机为准。</a:t>
             </a:r>
           </a:p>
           <a:p>
@@ -597,6 +597,60 @@
               </a:spcAft>
             </a:pPr>
             <a:r>
+              <a:rPr sz="1200" b="0">
+                <a:solidFill>
+                  <a:srgbClr val="16202A"/>
+                </a:solidFill>
+                <a:latin typeface="Microsoft YaHei"/>
+                <a:ea typeface="Microsoft YaHei"/>
+                <a:cs typeface="Microsoft YaHei"/>
+              </a:rPr>
+              <a:t>这些结果打成结构化反馈回到生成：精度默认八轮收敛，性能调优是持续迭代，连着五十轮没进展才敢说卡住了。</a:t>
+            </a:r>
+          </a:p>
+          <a:p>
+            <a:pPr>
+              <a:spcAft>
+                <a:spcPts val="600"/>
+              </a:spcAft>
+            </a:pPr>
+            <a:r>
+              <a:rPr sz="1200" b="0">
+                <a:solidFill>
+                  <a:srgbClr val="16202A"/>
+                </a:solidFill>
+                <a:latin typeface="Microsoft YaHei"/>
+                <a:ea typeface="Microsoft YaHei"/>
+                <a:cs typeface="Microsoft YaHei"/>
+              </a:rPr>
+              <a:t>底下一行是架构：生成和评测都不碰硬件，只认 backend 这一层的四个接口，换芯片只写一个后端加一张硬件说明卡。</a:t>
+            </a:r>
+          </a:p>
+          <a:p>
+            <a:pPr>
+              <a:spcAft>
+                <a:spcPts val="600"/>
+              </a:spcAft>
+            </a:pPr>
+            <a:r>
+              <a:rPr sz="1200" b="0">
+                <a:solidFill>
+                  <a:srgbClr val="16202A"/>
+                </a:solidFill>
+                <a:latin typeface="Microsoft YaHei"/>
+                <a:ea typeface="Microsoft YaHei"/>
+                <a:cs typeface="Microsoft YaHei"/>
+              </a:rPr>
+              <a:t>右边是目前的实测，还在样例阶段：验证过四个算子，rmsnorm 相对基线一点二四倍，理论上限达成率从零点四七提到零点五八。规模化的达标统计还没有，所以这里不报聚合数字。</a:t>
+            </a:r>
+          </a:p>
+          <a:p>
+            <a:pPr>
+              <a:spcAft>
+                <a:spcPts val="600"/>
+              </a:spcAft>
+            </a:pPr>
+            <a:r>
               <a:rPr sz="1200" b="1">
                 <a:solidFill>
                   <a:srgbClr val="66727F"/>
@@ -623,7 +677,7 @@
                 <a:ea typeface="Microsoft YaHei"/>
                 <a:cs typeface="Microsoft YaHei"/>
               </a:rPr>
-              <a:t>换芯片要改什么：生成和评测这套流程完全不碰硬件，只认四个接口——编译、运行、采性能、算理论上限。每款芯片照这四个接口写一个后端、再填一张硬件说明卡，主流程一行不改。现在没有硬件也能在 CPU 上跑通整条闭环，M100 真机已接，P800 还没接。</a:t>
+              <a:t>轮数口径：max_turns 默认 8、--max-turns 可改，管的是过 L1 精度的收敛上限；性能调优不设 8 轮上限，铁律是连续 50 轮没有进展才允许下 stalled 结论。</a:t>
             </a:r>
           </a:p>
           <a:p>
@@ -641,7 +695,25 @@
                 <a:ea typeface="Microsoft YaHei"/>
                 <a:cs typeface="Microsoft YaHei"/>
               </a:rPr>
-              <a:t>数字凭什么信：精度参考只用 CPU 实现，绝不拿 CUDA 当标准，精度不过关就不看性能；模拟器只用来看清改动动了哪一块，收益一律以真机实测为准，两边对不上听真机的。而且每轮改了什么、前后数据、结论都必须落盘，写不进去这一轮就算失败。</a:t>
+              <a:t>rmsnorm 实测：延迟 741.2 → 595.6，相对基线 1.24 倍；理论上限达成率 0.47 → 0.58。验证过的算子是 relu、relu_sdnn、rmsnorm、hc_post 这几个样例。</a:t>
+            </a:r>
+          </a:p>
+          <a:p>
+            <a:pPr>
+              <a:spcAft>
+                <a:spcPts val="600"/>
+              </a:spcAft>
+            </a:pPr>
+            <a:r>
+              <a:rPr sz="1200" b="0">
+                <a:solidFill>
+                  <a:srgbClr val="66727F"/>
+                </a:solidFill>
+                <a:latin typeface="Microsoft YaHei"/>
+                <a:ea typeface="Microsoft YaHei"/>
+                <a:cs typeface="Microsoft YaHei"/>
+              </a:rPr>
+              <a:t>硬件状态：没有硬件也能在 CPU 上跑通整条闭环，M100 真机已接，P800 还没接。精度参考只用 CPU 实现，绝不拿 CUDA 当标准；每轮改了什么、前后数据、结论都必须落盘，写不进去这一轮就算失败。</a:t>
             </a:r>
           </a:p>
         </p:txBody>
@@ -3783,7 +3855,7 @@
                 <a:ea typeface="Microsoft YaHei"/>
                 <a:cs typeface="Microsoft YaHei"/>
               </a:rPr>
-              <a:t>生成的是 M100 的 SDNN4 .xpu 内核，不是 CUDA；CUDA / Triton / torch 只作算法参考与基线对照</a:t>
+              <a:t>生成 M100 的 SDNN4 .xpu 内核，不是 CUDA；只有「生成」是 LLM，编译 / 对数值 / 测速都是确定性流程</a:t>
             </a:r>
           </a:p>
         </p:txBody>
@@ -3796,7 +3868,7 @@
         </p:nvSpPr>
         <p:spPr>
           <a:xfrm>
-            <a:off x="548640" y="1682496"/>
+            <a:off x="548640" y="1664208"/>
             <a:ext cx="7406640" cy="274320"/>
           </a:xfrm>
           <a:prstGeom prst="rect">
@@ -3841,23 +3913,23 @@
                 <a:ea typeface="Microsoft YaHei"/>
                 <a:cs typeface="Microsoft YaHei"/>
               </a:rPr>
-              <a:t>一句需求，或现有实现当基线</a:t>
-            </a:r>
-          </a:p>
-        </p:txBody>
-      </p:sp>
-      <p:sp>
-        <p:nvSpPr>
-          <p:cNvPr id="6" name="Oval 5"/>
+              <a:t>一句需求，或拿现有实现当第 0 轮基线　·　精度默认 8 轮收敛（可调），性能调优持续迭代</a:t>
+            </a:r>
+          </a:p>
+        </p:txBody>
+      </p:sp>
+      <p:sp>
+        <p:nvSpPr>
+          <p:cNvPr id="6" name="Rectangle 5"/>
           <p:cNvSpPr/>
           <p:nvPr/>
         </p:nvSpPr>
         <p:spPr>
           <a:xfrm>
-            <a:off x="3419856" y="3374136"/>
-            <a:ext cx="1572768" cy="1572768"/>
-          </a:xfrm>
-          <a:prstGeom prst="ellipse">
+            <a:off x="548640" y="2560320"/>
+            <a:ext cx="3429000" cy="2212848"/>
+          </a:xfrm>
+          <a:prstGeom prst="rect">
             <a:avLst/>
           </a:prstGeom>
           <a:solidFill>
@@ -3883,8 +3955,8 @@
         </p:nvSpPr>
         <p:spPr>
           <a:xfrm>
-            <a:off x="3419856" y="3374136"/>
-            <a:ext cx="1572768" cy="1572768"/>
+            <a:off x="768096" y="2688336"/>
+            <a:ext cx="2990088" cy="292608"/>
           </a:xfrm>
           <a:prstGeom prst="rect">
             <a:avLst/>
@@ -3897,7 +3969,7 @@
           </a:bodyPr>
           <a:lstStyle/>
           <a:p>
-            <a:pPr algn="ctr" latinLnBrk="0">
+            <a:pPr algn="l" latinLnBrk="0">
               <a:lnSpc>
                 <a:spcPct val="100000"/>
               </a:lnSpc>
@@ -3905,21 +3977,702 @@
                 <a:spcPts val="0"/>
               </a:spcBef>
               <a:spcAft>
-                <a:spcPts val="300"/>
+                <a:spcPts val="0"/>
               </a:spcAft>
             </a:pPr>
             <a:r>
-              <a:rPr sz="1100" b="1">
+              <a:rPr sz="1300" b="1">
                 <a:solidFill>
                   <a:srgbClr val="C0612C"/>
+                </a:solidFill>
+                <a:latin typeface="Consolas"/>
+                <a:ea typeface="Microsoft YaHei"/>
+                <a:cs typeface="Microsoft YaHei"/>
+              </a:rPr>
+              <a:t>agent/</a:t>
+            </a:r>
+            <a:r>
+              <a:rPr sz="1300" b="1">
+                <a:solidFill>
+                  <a:srgbClr val="16202A"/>
                 </a:solidFill>
                 <a:latin typeface="Microsoft YaHei"/>
                 <a:ea typeface="Microsoft YaHei"/>
                 <a:cs typeface="Microsoft YaHei"/>
               </a:rPr>
-              <a:t>算子级闭环</a:t>
-            </a:r>
-          </a:p>
+              <a:t>　只有这一个 LLM</a:t>
+            </a:r>
+          </a:p>
+        </p:txBody>
+      </p:sp>
+      <p:sp>
+        <p:nvSpPr>
+          <p:cNvPr id="8" name="TextBox 7"/>
+          <p:cNvSpPr txBox="1"/>
+          <p:nvPr/>
+        </p:nvSpPr>
+        <p:spPr>
+          <a:xfrm>
+            <a:off x="768096" y="3218687"/>
+            <a:ext cx="2990088" cy="274320"/>
+          </a:xfrm>
+          <a:prstGeom prst="rect">
+            <a:avLst/>
+          </a:prstGeom>
+          <a:noFill/>
+        </p:spPr>
+        <p:txBody>
+          <a:bodyPr wrap="square" anchor="ctr" lIns="0" tIns="0" rIns="0" bIns="0">
+            <a:noAutofit/>
+          </a:bodyPr>
+          <a:lstStyle/>
+          <a:p>
+            <a:pPr algn="l" latinLnBrk="0">
+              <a:lnSpc>
+                <a:spcPct val="100000"/>
+              </a:lnSpc>
+              <a:spcBef>
+                <a:spcPts val="0"/>
+              </a:spcBef>
+              <a:spcAft>
+                <a:spcPts val="0"/>
+              </a:spcAft>
+            </a:pPr>
+            <a:r>
+              <a:rPr sz="1250" b="1">
+                <a:solidFill>
+                  <a:srgbClr val="16202A"/>
+                </a:solidFill>
+                <a:latin typeface="Microsoft YaHei"/>
+                <a:ea typeface="Microsoft YaHei"/>
+                <a:cs typeface="Microsoft YaHei"/>
+              </a:rPr>
+              <a:t>0 确认门</a:t>
+            </a:r>
+            <a:r>
+              <a:rPr sz="1000" b="0">
+                <a:solidFill>
+                  <a:srgbClr val="C0612C"/>
+                </a:solidFill>
+                <a:latin typeface="Consolas"/>
+                <a:ea typeface="Microsoft YaHei"/>
+                <a:cs typeface="Microsoft YaHei"/>
+              </a:rPr>
+              <a:t>　grill + plan</a:t>
+            </a:r>
+          </a:p>
+        </p:txBody>
+      </p:sp>
+      <p:sp>
+        <p:nvSpPr>
+          <p:cNvPr id="9" name="TextBox 8"/>
+          <p:cNvSpPr txBox="1"/>
+          <p:nvPr/>
+        </p:nvSpPr>
+        <p:spPr>
+          <a:xfrm>
+            <a:off x="768096" y="3493007"/>
+            <a:ext cx="2990088" cy="256032"/>
+          </a:xfrm>
+          <a:prstGeom prst="rect">
+            <a:avLst/>
+          </a:prstGeom>
+          <a:noFill/>
+        </p:spPr>
+        <p:txBody>
+          <a:bodyPr wrap="square" anchor="ctr" lIns="0" tIns="0" rIns="0" bIns="0">
+            <a:noAutofit/>
+          </a:bodyPr>
+          <a:lstStyle/>
+          <a:p>
+            <a:pPr algn="l" latinLnBrk="0">
+              <a:lnSpc>
+                <a:spcPct val="100000"/>
+              </a:lnSpc>
+              <a:spcBef>
+                <a:spcPts val="0"/>
+              </a:spcBef>
+              <a:spcAft>
+                <a:spcPts val="0"/>
+              </a:spcAft>
+            </a:pPr>
+            <a:r>
+              <a:rPr sz="1050" b="0">
+                <a:solidFill>
+                  <a:srgbClr val="35424F"/>
+                </a:solidFill>
+                <a:latin typeface="Microsoft YaHei"/>
+                <a:ea typeface="Microsoft YaHei"/>
+                <a:cs typeface="Microsoft YaHei"/>
+              </a:rPr>
+              <a:t>动手前先问清需求，至少比两个方案</a:t>
+            </a:r>
+          </a:p>
+        </p:txBody>
+      </p:sp>
+      <p:sp>
+        <p:nvSpPr>
+          <p:cNvPr id="10" name="TextBox 9"/>
+          <p:cNvSpPr txBox="1"/>
+          <p:nvPr/>
+        </p:nvSpPr>
+        <p:spPr>
+          <a:xfrm>
+            <a:off x="768096" y="4041648"/>
+            <a:ext cx="2990088" cy="274320"/>
+          </a:xfrm>
+          <a:prstGeom prst="rect">
+            <a:avLst/>
+          </a:prstGeom>
+          <a:noFill/>
+        </p:spPr>
+        <p:txBody>
+          <a:bodyPr wrap="square" anchor="ctr" lIns="0" tIns="0" rIns="0" bIns="0">
+            <a:noAutofit/>
+          </a:bodyPr>
+          <a:lstStyle/>
+          <a:p>
+            <a:pPr algn="l" latinLnBrk="0">
+              <a:lnSpc>
+                <a:spcPct val="100000"/>
+              </a:lnSpc>
+              <a:spcBef>
+                <a:spcPts val="0"/>
+              </a:spcBef>
+              <a:spcAft>
+                <a:spcPts val="0"/>
+              </a:spcAft>
+            </a:pPr>
+            <a:r>
+              <a:rPr sz="1250" b="1">
+                <a:solidFill>
+                  <a:srgbClr val="16202A"/>
+                </a:solidFill>
+                <a:latin typeface="Microsoft YaHei"/>
+                <a:ea typeface="Microsoft YaHei"/>
+                <a:cs typeface="Microsoft YaHei"/>
+              </a:rPr>
+              <a:t>1 生成</a:t>
+            </a:r>
+            <a:r>
+              <a:rPr sz="1000" b="0">
+                <a:solidFill>
+                  <a:srgbClr val="C0612C"/>
+                </a:solidFill>
+                <a:latin typeface="Consolas"/>
+                <a:ea typeface="Microsoft YaHei"/>
+                <a:cs typeface="Microsoft YaHei"/>
+              </a:rPr>
+              <a:t>　write kernel</a:t>
+            </a:r>
+          </a:p>
+        </p:txBody>
+      </p:sp>
+      <p:sp>
+        <p:nvSpPr>
+          <p:cNvPr id="11" name="TextBox 10"/>
+          <p:cNvSpPr txBox="1"/>
+          <p:nvPr/>
+        </p:nvSpPr>
+        <p:spPr>
+          <a:xfrm>
+            <a:off x="768096" y="4315968"/>
+            <a:ext cx="2990088" cy="256032"/>
+          </a:xfrm>
+          <a:prstGeom prst="rect">
+            <a:avLst/>
+          </a:prstGeom>
+          <a:noFill/>
+        </p:spPr>
+        <p:txBody>
+          <a:bodyPr wrap="square" anchor="ctr" lIns="0" tIns="0" rIns="0" bIns="0">
+            <a:noAutofit/>
+          </a:bodyPr>
+          <a:lstStyle/>
+          <a:p>
+            <a:pPr algn="l" latinLnBrk="0">
+              <a:lnSpc>
+                <a:spcPct val="100000"/>
+              </a:lnSpc>
+              <a:spcBef>
+                <a:spcPts val="0"/>
+              </a:spcBef>
+              <a:spcAft>
+                <a:spcPts val="0"/>
+              </a:spcAft>
+            </a:pPr>
+            <a:r>
+              <a:rPr sz="1050" b="0">
+                <a:solidFill>
+                  <a:srgbClr val="35424F"/>
+                </a:solidFill>
+                <a:latin typeface="Microsoft YaHei"/>
+                <a:ea typeface="Microsoft YaHei"/>
+                <a:cs typeface="Microsoft YaHei"/>
+              </a:rPr>
+              <a:t>照硬件说明卡写出 .xpu 内核</a:t>
+            </a:r>
+          </a:p>
+        </p:txBody>
+      </p:sp>
+      <p:sp>
+        <p:nvSpPr>
+          <p:cNvPr id="12" name="Rectangle 11"/>
+          <p:cNvSpPr/>
+          <p:nvPr/>
+        </p:nvSpPr>
+        <p:spPr>
+          <a:xfrm>
+            <a:off x="4526279" y="2560320"/>
+            <a:ext cx="3429000" cy="2212848"/>
+          </a:xfrm>
+          <a:prstGeom prst="rect">
+            <a:avLst/>
+          </a:prstGeom>
+          <a:solidFill>
+            <a:srgbClr val="F6F7F9"/>
+          </a:solidFill>
+          <a:ln>
+            <a:noFill/>
+          </a:ln>
+        </p:spPr>
+        <p:txBody>
+          <a:bodyPr rtlCol="0" anchor="ctr"/>
+          <a:lstStyle/>
+          <a:p>
+            <a:pPr algn="ctr"/>
+          </a:p>
+        </p:txBody>
+      </p:sp>
+      <p:sp>
+        <p:nvSpPr>
+          <p:cNvPr id="13" name="TextBox 12"/>
+          <p:cNvSpPr txBox="1"/>
+          <p:nvPr/>
+        </p:nvSpPr>
+        <p:spPr>
+          <a:xfrm>
+            <a:off x="4745736" y="2688336"/>
+            <a:ext cx="2990088" cy="292608"/>
+          </a:xfrm>
+          <a:prstGeom prst="rect">
+            <a:avLst/>
+          </a:prstGeom>
+          <a:noFill/>
+        </p:spPr>
+        <p:txBody>
+          <a:bodyPr wrap="square" anchor="ctr" lIns="0" tIns="0" rIns="0" bIns="0">
+            <a:noAutofit/>
+          </a:bodyPr>
+          <a:lstStyle/>
+          <a:p>
+            <a:pPr algn="l" latinLnBrk="0">
+              <a:lnSpc>
+                <a:spcPct val="100000"/>
+              </a:lnSpc>
+              <a:spcBef>
+                <a:spcPts val="0"/>
+              </a:spcBef>
+              <a:spcAft>
+                <a:spcPts val="0"/>
+              </a:spcAft>
+            </a:pPr>
+            <a:r>
+              <a:rPr sz="1300" b="1">
+                <a:solidFill>
+                  <a:srgbClr val="66727F"/>
+                </a:solidFill>
+                <a:latin typeface="Consolas"/>
+                <a:ea typeface="Microsoft YaHei"/>
+                <a:cs typeface="Microsoft YaHei"/>
+              </a:rPr>
+              <a:t>harness/</a:t>
+            </a:r>
+            <a:r>
+              <a:rPr sz="1300" b="1">
+                <a:solidFill>
+                  <a:srgbClr val="16202A"/>
+                </a:solidFill>
+                <a:latin typeface="Microsoft YaHei"/>
+                <a:ea typeface="Microsoft YaHei"/>
+                <a:cs typeface="Microsoft YaHei"/>
+              </a:rPr>
+              <a:t>　确定性评测，不是 agent</a:t>
+            </a:r>
+          </a:p>
+        </p:txBody>
+      </p:sp>
+      <p:sp>
+        <p:nvSpPr>
+          <p:cNvPr id="14" name="TextBox 13"/>
+          <p:cNvSpPr txBox="1"/>
+          <p:nvPr/>
+        </p:nvSpPr>
+        <p:spPr>
+          <a:xfrm>
+            <a:off x="4745736" y="3090672"/>
+            <a:ext cx="2990088" cy="274320"/>
+          </a:xfrm>
+          <a:prstGeom prst="rect">
+            <a:avLst/>
+          </a:prstGeom>
+          <a:noFill/>
+        </p:spPr>
+        <p:txBody>
+          <a:bodyPr wrap="square" anchor="ctr" lIns="0" tIns="0" rIns="0" bIns="0">
+            <a:noAutofit/>
+          </a:bodyPr>
+          <a:lstStyle/>
+          <a:p>
+            <a:pPr algn="l" latinLnBrk="0">
+              <a:lnSpc>
+                <a:spcPct val="100000"/>
+              </a:lnSpc>
+              <a:spcBef>
+                <a:spcPts val="0"/>
+              </a:spcBef>
+              <a:spcAft>
+                <a:spcPts val="0"/>
+              </a:spcAft>
+            </a:pPr>
+            <a:r>
+              <a:rPr sz="1150" b="1">
+                <a:solidFill>
+                  <a:srgbClr val="16202A"/>
+                </a:solidFill>
+                <a:latin typeface="Microsoft YaHei"/>
+                <a:ea typeface="Microsoft YaHei"/>
+                <a:cs typeface="Microsoft YaHei"/>
+              </a:rPr>
+              <a:t>L0 编译</a:t>
+            </a:r>
+            <a:r>
+              <a:rPr sz="1050" b="0">
+                <a:solidFill>
+                  <a:srgbClr val="35424F"/>
+                </a:solidFill>
+                <a:latin typeface="Microsoft YaHei"/>
+                <a:ea typeface="Microsoft YaHei"/>
+                <a:cs typeface="Microsoft YaHei"/>
+              </a:rPr>
+              <a:t>　编译并拉起，跑通才往下</a:t>
+            </a:r>
+          </a:p>
+        </p:txBody>
+      </p:sp>
+      <p:sp>
+        <p:nvSpPr>
+          <p:cNvPr id="15" name="TextBox 14"/>
+          <p:cNvSpPr txBox="1"/>
+          <p:nvPr/>
+        </p:nvSpPr>
+        <p:spPr>
+          <a:xfrm>
+            <a:off x="4745736" y="3438144"/>
+            <a:ext cx="2990088" cy="274320"/>
+          </a:xfrm>
+          <a:prstGeom prst="rect">
+            <a:avLst/>
+          </a:prstGeom>
+          <a:noFill/>
+        </p:spPr>
+        <p:txBody>
+          <a:bodyPr wrap="square" anchor="ctr" lIns="0" tIns="0" rIns="0" bIns="0">
+            <a:noAutofit/>
+          </a:bodyPr>
+          <a:lstStyle/>
+          <a:p>
+            <a:pPr algn="l" latinLnBrk="0">
+              <a:lnSpc>
+                <a:spcPct val="100000"/>
+              </a:lnSpc>
+              <a:spcBef>
+                <a:spcPts val="0"/>
+              </a:spcBef>
+              <a:spcAft>
+                <a:spcPts val="0"/>
+              </a:spcAft>
+            </a:pPr>
+            <a:r>
+              <a:rPr sz="1150" b="1">
+                <a:solidFill>
+                  <a:srgbClr val="16202A"/>
+                </a:solidFill>
+                <a:latin typeface="Microsoft YaHei"/>
+                <a:ea typeface="Microsoft YaHei"/>
+                <a:cs typeface="Microsoft YaHei"/>
+              </a:rPr>
+              <a:t>L1 精度</a:t>
+            </a:r>
+            <a:r>
+              <a:rPr sz="1050" b="0">
+                <a:solidFill>
+                  <a:srgbClr val="35424F"/>
+                </a:solidFill>
+                <a:latin typeface="Microsoft YaHei"/>
+                <a:ea typeface="Microsoft YaHei"/>
+                <a:cs typeface="Microsoft YaHei"/>
+              </a:rPr>
+              <a:t>　多形状多精度对 CPU golden</a:t>
+            </a:r>
+          </a:p>
+        </p:txBody>
+      </p:sp>
+      <p:sp>
+        <p:nvSpPr>
+          <p:cNvPr id="16" name="TextBox 15"/>
+          <p:cNvSpPr txBox="1"/>
+          <p:nvPr/>
+        </p:nvSpPr>
+        <p:spPr>
+          <a:xfrm>
+            <a:off x="4745736" y="3785615"/>
+            <a:ext cx="2990088" cy="274320"/>
+          </a:xfrm>
+          <a:prstGeom prst="rect">
+            <a:avLst/>
+          </a:prstGeom>
+          <a:noFill/>
+        </p:spPr>
+        <p:txBody>
+          <a:bodyPr wrap="square" anchor="ctr" lIns="0" tIns="0" rIns="0" bIns="0">
+            <a:noAutofit/>
+          </a:bodyPr>
+          <a:lstStyle/>
+          <a:p>
+            <a:pPr algn="l" latinLnBrk="0">
+              <a:lnSpc>
+                <a:spcPct val="100000"/>
+              </a:lnSpc>
+              <a:spcBef>
+                <a:spcPts val="0"/>
+              </a:spcBef>
+              <a:spcAft>
+                <a:spcPts val="0"/>
+              </a:spcAft>
+            </a:pPr>
+            <a:r>
+              <a:rPr sz="1150" b="1">
+                <a:solidFill>
+                  <a:srgbClr val="16202A"/>
+                </a:solidFill>
+                <a:latin typeface="Microsoft YaHei"/>
+                <a:ea typeface="Microsoft YaHei"/>
+                <a:cs typeface="Microsoft YaHei"/>
+              </a:rPr>
+              <a:t>bench 收益</a:t>
+            </a:r>
+            <a:r>
+              <a:rPr sz="1050" b="0">
+                <a:solidFill>
+                  <a:srgbClr val="35424F"/>
+                </a:solidFill>
+                <a:latin typeface="Microsoft YaHei"/>
+                <a:ea typeface="Microsoft YaHei"/>
+                <a:cs typeface="Microsoft YaHei"/>
+              </a:rPr>
+              <a:t>　真机答「快了多少」</a:t>
+            </a:r>
+          </a:p>
+        </p:txBody>
+      </p:sp>
+      <p:sp>
+        <p:nvSpPr>
+          <p:cNvPr id="17" name="TextBox 16"/>
+          <p:cNvSpPr txBox="1"/>
+          <p:nvPr/>
+        </p:nvSpPr>
+        <p:spPr>
+          <a:xfrm>
+            <a:off x="4745736" y="4133087"/>
+            <a:ext cx="2990088" cy="274320"/>
+          </a:xfrm>
+          <a:prstGeom prst="rect">
+            <a:avLst/>
+          </a:prstGeom>
+          <a:noFill/>
+        </p:spPr>
+        <p:txBody>
+          <a:bodyPr wrap="square" anchor="ctr" lIns="0" tIns="0" rIns="0" bIns="0">
+            <a:noAutofit/>
+          </a:bodyPr>
+          <a:lstStyle/>
+          <a:p>
+            <a:pPr algn="l" latinLnBrk="0">
+              <a:lnSpc>
+                <a:spcPct val="100000"/>
+              </a:lnSpc>
+              <a:spcBef>
+                <a:spcPts val="0"/>
+              </a:spcBef>
+              <a:spcAft>
+                <a:spcPts val="0"/>
+              </a:spcAft>
+            </a:pPr>
+            <a:r>
+              <a:rPr sz="1150" b="1">
+                <a:solidFill>
+                  <a:srgbClr val="16202A"/>
+                </a:solidFill>
+                <a:latin typeface="Microsoft YaHei"/>
+                <a:ea typeface="Microsoft YaHei"/>
+                <a:cs typeface="Microsoft YaHei"/>
+              </a:rPr>
+              <a:t>profile 机制</a:t>
+            </a:r>
+            <a:r>
+              <a:rPr sz="1050" b="0">
+                <a:solidFill>
+                  <a:srgbClr val="35424F"/>
+                </a:solidFill>
+                <a:latin typeface="Microsoft YaHei"/>
+                <a:ea typeface="Microsoft YaHei"/>
+                <a:cs typeface="Microsoft YaHei"/>
+              </a:rPr>
+              <a:t>　模拟器答「为什么慢」</a:t>
+            </a:r>
+          </a:p>
+        </p:txBody>
+      </p:sp>
+      <p:cxnSp>
+        <p:nvCxnSpPr>
+          <p:cNvPr id="18" name="Connector 17"/>
+          <p:cNvCxnSpPr/>
+          <p:nvPr/>
+        </p:nvCxnSpPr>
+        <p:spPr>
+          <a:xfrm>
+            <a:off x="4745736" y="4425696"/>
+            <a:ext cx="2990087" cy="0"/>
+          </a:xfrm>
+          <a:prstGeom prst="line">
+            <a:avLst/>
+          </a:prstGeom>
+          <a:ln w="12700">
+            <a:solidFill>
+              <a:srgbClr val="DDE2E7"/>
+            </a:solidFill>
+          </a:ln>
+        </p:spPr>
+      </p:cxnSp>
+      <p:sp>
+        <p:nvSpPr>
+          <p:cNvPr id="19" name="TextBox 18"/>
+          <p:cNvSpPr txBox="1"/>
+          <p:nvPr/>
+        </p:nvSpPr>
+        <p:spPr>
+          <a:xfrm>
+            <a:off x="4745736" y="4462272"/>
+            <a:ext cx="2990088" cy="256032"/>
+          </a:xfrm>
+          <a:prstGeom prst="rect">
+            <a:avLst/>
+          </a:prstGeom>
+          <a:noFill/>
+        </p:spPr>
+        <p:txBody>
+          <a:bodyPr wrap="square" anchor="ctr" lIns="0" tIns="0" rIns="0" bIns="0">
+            <a:noAutofit/>
+          </a:bodyPr>
+          <a:lstStyle/>
+          <a:p>
+            <a:pPr algn="l" latinLnBrk="0">
+              <a:lnSpc>
+                <a:spcPct val="100000"/>
+              </a:lnSpc>
+              <a:spcBef>
+                <a:spcPts val="0"/>
+              </a:spcBef>
+              <a:spcAft>
+                <a:spcPts val="0"/>
+              </a:spcAft>
+            </a:pPr>
+            <a:r>
+              <a:rPr sz="1000" b="0">
+                <a:solidFill>
+                  <a:srgbClr val="66727F"/>
+                </a:solidFill>
+                <a:latin typeface="Microsoft YaHei"/>
+                <a:ea typeface="Microsoft YaHei"/>
+                <a:cs typeface="Microsoft YaHei"/>
+              </a:rPr>
+              <a:t>机制看模拟器 · 收益看真机，以真机为准</a:t>
+            </a:r>
+          </a:p>
+        </p:txBody>
+      </p:sp>
+      <p:sp>
+        <p:nvSpPr>
+          <p:cNvPr id="20" name="Freeform 19"/>
+          <p:cNvSpPr/>
+          <p:nvPr/>
+        </p:nvSpPr>
+        <p:spPr>
+          <a:xfrm>
+            <a:off x="2263140" y="2304287"/>
+            <a:ext cx="3977639" cy="256033"/>
+          </a:xfrm>
+          <a:custGeom>
+            <a:avLst/>
+            <a:gdLst/>
+            <a:ahLst/>
+            <a:cxnLst/>
+            <a:rect l="l" t="t" r="r" b="b"/>
+            <a:pathLst>
+              <a:path w="3977639" h="256033">
+                <a:moveTo>
+                  <a:pt x="0" y="256033"/>
+                </a:moveTo>
+                <a:lnTo>
+                  <a:pt x="0" y="0"/>
+                </a:lnTo>
+                <a:lnTo>
+                  <a:pt x="3977639" y="0"/>
+                </a:lnTo>
+                <a:lnTo>
+                  <a:pt x="3977639" y="219457"/>
+                </a:lnTo>
+              </a:path>
+            </a:pathLst>
+          </a:custGeom>
+          <a:noFill/>
+          <a:ln w="19050">
+            <a:solidFill>
+              <a:srgbClr val="C0612C"/>
+            </a:solidFill>
+            <a:tailEnd type="triangle" w="med" len="med"/>
+          </a:ln>
+        </p:spPr>
+        <p:txBody>
+          <a:bodyPr rtlCol="0" anchor="ctr"/>
+          <a:lstStyle/>
+          <a:p>
+            <a:pPr algn="ctr"/>
+          </a:p>
+        </p:txBody>
+      </p:sp>
+      <p:sp>
+        <p:nvSpPr>
+          <p:cNvPr id="21" name="TextBox 20"/>
+          <p:cNvSpPr txBox="1"/>
+          <p:nvPr/>
+        </p:nvSpPr>
+        <p:spPr>
+          <a:xfrm>
+            <a:off x="2263140" y="1993392"/>
+            <a:ext cx="3977639" cy="274320"/>
+          </a:xfrm>
+          <a:prstGeom prst="rect">
+            <a:avLst/>
+          </a:prstGeom>
+          <a:noFill/>
+        </p:spPr>
+        <p:txBody>
+          <a:bodyPr wrap="square" anchor="ctr" lIns="0" tIns="0" rIns="0" bIns="0">
+            <a:noAutofit/>
+          </a:bodyPr>
+          <a:lstStyle/>
           <a:p>
             <a:pPr algn="ctr" latinLnBrk="0">
               <a:lnSpc>
@@ -3933,17 +4686,90 @@
               </a:spcAft>
             </a:pPr>
             <a:r>
-              <a:rPr sz="1300" b="1">
-                <a:solidFill>
-                  <a:srgbClr val="16202A"/>
+              <a:rPr sz="1050" b="0">
+                <a:solidFill>
+                  <a:srgbClr val="35424F"/>
                 </a:solidFill>
                 <a:latin typeface="Microsoft YaHei"/>
                 <a:ea typeface="Microsoft YaHei"/>
                 <a:cs typeface="Microsoft YaHei"/>
               </a:rPr>
-              <a:t>一个算子</a:t>
-            </a:r>
-          </a:p>
+              <a:t>交出 .xpu 内核</a:t>
+            </a:r>
+          </a:p>
+        </p:txBody>
+      </p:sp>
+      <p:sp>
+        <p:nvSpPr>
+          <p:cNvPr id="22" name="Freeform 21"/>
+          <p:cNvSpPr/>
+          <p:nvPr/>
+        </p:nvSpPr>
+        <p:spPr>
+          <a:xfrm>
+            <a:off x="2263140" y="4773168"/>
+            <a:ext cx="3977639" cy="256032"/>
+          </a:xfrm>
+          <a:custGeom>
+            <a:avLst/>
+            <a:gdLst/>
+            <a:ahLst/>
+            <a:cxnLst/>
+            <a:rect l="l" t="t" r="r" b="b"/>
+            <a:pathLst>
+              <a:path w="3977639" h="256032">
+                <a:moveTo>
+                  <a:pt x="3977639" y="0"/>
+                </a:moveTo>
+                <a:lnTo>
+                  <a:pt x="3977639" y="256032"/>
+                </a:lnTo>
+                <a:lnTo>
+                  <a:pt x="0" y="256032"/>
+                </a:lnTo>
+                <a:lnTo>
+                  <a:pt x="0" y="36576"/>
+                </a:lnTo>
+              </a:path>
+            </a:pathLst>
+          </a:custGeom>
+          <a:noFill/>
+          <a:ln w="19050">
+            <a:solidFill>
+              <a:srgbClr val="C0612C"/>
+            </a:solidFill>
+            <a:tailEnd type="triangle" w="med" len="med"/>
+          </a:ln>
+        </p:spPr>
+        <p:txBody>
+          <a:bodyPr rtlCol="0" anchor="ctr"/>
+          <a:lstStyle/>
+          <a:p>
+            <a:pPr algn="ctr"/>
+          </a:p>
+        </p:txBody>
+      </p:sp>
+      <p:sp>
+        <p:nvSpPr>
+          <p:cNvPr id="23" name="TextBox 22"/>
+          <p:cNvSpPr txBox="1"/>
+          <p:nvPr/>
+        </p:nvSpPr>
+        <p:spPr>
+          <a:xfrm>
+            <a:off x="2263140" y="5065776"/>
+            <a:ext cx="3977639" cy="274320"/>
+          </a:xfrm>
+          <a:prstGeom prst="rect">
+            <a:avLst/>
+          </a:prstGeom>
+          <a:noFill/>
+        </p:spPr>
+        <p:txBody>
+          <a:bodyPr wrap="square" anchor="ctr" lIns="0" tIns="0" rIns="0" bIns="0">
+            <a:noAutofit/>
+          </a:bodyPr>
+          <a:lstStyle/>
           <a:p>
             <a:pPr algn="ctr" latinLnBrk="0">
               <a:lnSpc>
@@ -3957,51 +4783,73 @@
               </a:spcAft>
             </a:pPr>
             <a:r>
-              <a:rPr sz="1300" b="1">
-                <a:solidFill>
-                  <a:srgbClr val="16202A"/>
+              <a:rPr sz="1050" b="0">
+                <a:solidFill>
+                  <a:srgbClr val="35424F"/>
                 </a:solidFill>
                 <a:latin typeface="Microsoft YaHei"/>
                 <a:ea typeface="Microsoft YaHei"/>
                 <a:cs typeface="Microsoft YaHei"/>
               </a:rPr>
-              <a:t>最多 8 轮</a:t>
-            </a:r>
-          </a:p>
-        </p:txBody>
-      </p:sp>
-      <p:sp>
-        <p:nvSpPr>
-          <p:cNvPr id="8" name="Rounded Rectangle 7"/>
+              <a:t>结构化反馈：打分 + 模拟器机制证据，带进下一轮</a:t>
+            </a:r>
+          </a:p>
+        </p:txBody>
+      </p:sp>
+      <p:sp>
+        <p:nvSpPr>
+          <p:cNvPr id="24" name="Rectangle 23"/>
           <p:cNvSpPr/>
           <p:nvPr/>
         </p:nvSpPr>
         <p:spPr>
           <a:xfrm>
-            <a:off x="3337559" y="2066543"/>
-            <a:ext cx="1737360" cy="676656"/>
-          </a:xfrm>
-          <a:prstGeom prst="roundRect">
-            <a:avLst>
-              <a:gd name="adj" fmla="val 35000"/>
-            </a:avLst>
+            <a:off x="548640" y="5449824"/>
+            <a:ext cx="7406640" cy="548640"/>
+          </a:xfrm>
+          <a:prstGeom prst="rect">
+            <a:avLst/>
           </a:prstGeom>
           <a:solidFill>
             <a:srgbClr val="FFFFFF"/>
           </a:solidFill>
-          <a:ln w="15875">
+          <a:ln w="9525">
             <a:solidFill>
-              <a:srgbClr val="C0612C"/>
+              <a:srgbClr val="DDE2E7"/>
             </a:solidFill>
           </a:ln>
         </p:spPr>
         <p:txBody>
-          <a:bodyPr rtlCol="0" anchor="ctr" wrap="square" lIns="45720" tIns="18288" rIns="45720" bIns="18288">
+          <a:bodyPr rtlCol="0" anchor="ctr"/>
+          <a:lstStyle/>
+          <a:p>
+            <a:pPr algn="ctr"/>
+          </a:p>
+        </p:txBody>
+      </p:sp>
+      <p:sp>
+        <p:nvSpPr>
+          <p:cNvPr id="25" name="TextBox 24"/>
+          <p:cNvSpPr txBox="1"/>
+          <p:nvPr/>
+        </p:nvSpPr>
+        <p:spPr>
+          <a:xfrm>
+            <a:off x="768096" y="5522976"/>
+            <a:ext cx="6967727" cy="438912"/>
+          </a:xfrm>
+          <a:prstGeom prst="rect">
+            <a:avLst/>
+          </a:prstGeom>
+          <a:noFill/>
+        </p:spPr>
+        <p:txBody>
+          <a:bodyPr wrap="square" anchor="t" lIns="0" tIns="0" rIns="0" bIns="0">
             <a:noAutofit/>
           </a:bodyPr>
           <a:lstStyle/>
           <a:p>
-            <a:pPr algn="ctr" latinLnBrk="0">
+            <a:pPr algn="l" latinLnBrk="0">
               <a:lnSpc>
                 <a:spcPct val="100000"/>
               </a:lnSpc>
@@ -4013,18 +4861,18 @@
               </a:spcAft>
             </a:pPr>
             <a:r>
-              <a:rPr sz="1250" b="1">
-                <a:solidFill>
-                  <a:srgbClr val="C0612C"/>
-                </a:solidFill>
-                <a:latin typeface="Arial"/>
+              <a:rPr sz="1050" b="1">
+                <a:solidFill>
+                  <a:srgbClr val="16202A"/>
+                </a:solidFill>
+                <a:latin typeface="Consolas"/>
                 <a:ea typeface="Microsoft YaHei"/>
                 <a:cs typeface="Microsoft YaHei"/>
               </a:rPr>
-              <a:t>1 </a:t>
-            </a:r>
-            <a:r>
-              <a:rPr sz="1250" b="1">
+              <a:t>backend/</a:t>
+            </a:r>
+            <a:r>
+              <a:rPr sz="1050" b="1">
                 <a:solidFill>
                   <a:srgbClr val="16202A"/>
                 </a:solidFill>
@@ -4032,614 +4880,9 @@
                 <a:ea typeface="Microsoft YaHei"/>
                 <a:cs typeface="Microsoft YaHei"/>
               </a:rPr>
-              <a:t>生成</a:t>
-            </a:r>
-          </a:p>
-          <a:p>
-            <a:pPr algn="ctr" latinLnBrk="0">
-              <a:lnSpc>
-                <a:spcPct val="100000"/>
-              </a:lnSpc>
-              <a:spcBef>
-                <a:spcPts val="0"/>
-              </a:spcBef>
-              <a:spcAft>
-                <a:spcPts val="0"/>
-              </a:spcAft>
-            </a:pPr>
-            <a:r>
-              <a:rPr sz="1000" b="0">
-                <a:solidFill>
-                  <a:srgbClr val="66727F"/>
-                </a:solidFill>
-                <a:latin typeface="Microsoft YaHei"/>
-                <a:ea typeface="Microsoft YaHei"/>
-                <a:cs typeface="Microsoft YaHei"/>
-              </a:rPr>
-              <a:t>照硬件说明卡写内核</a:t>
-            </a:r>
-          </a:p>
-        </p:txBody>
-      </p:sp>
-      <p:sp>
-        <p:nvSpPr>
-          <p:cNvPr id="9" name="Rounded Rectangle 8"/>
-          <p:cNvSpPr/>
-          <p:nvPr/>
-        </p:nvSpPr>
-        <p:spPr>
-          <a:xfrm>
-            <a:off x="6033462" y="3279666"/>
-            <a:ext cx="1737360" cy="676656"/>
-          </a:xfrm>
-          <a:prstGeom prst="roundRect">
-            <a:avLst>
-              <a:gd name="adj" fmla="val 35000"/>
-            </a:avLst>
-          </a:prstGeom>
-          <a:solidFill>
-            <a:srgbClr val="FFFFFF"/>
-          </a:solidFill>
-          <a:ln w="15875">
-            <a:solidFill>
-              <a:srgbClr val="C0612C"/>
-            </a:solidFill>
-          </a:ln>
-        </p:spPr>
-        <p:txBody>
-          <a:bodyPr rtlCol="0" anchor="ctr" wrap="square" lIns="45720" tIns="18288" rIns="45720" bIns="18288">
-            <a:noAutofit/>
-          </a:bodyPr>
-          <a:lstStyle/>
-          <a:p>
-            <a:pPr algn="ctr" latinLnBrk="0">
-              <a:lnSpc>
-                <a:spcPct val="100000"/>
-              </a:lnSpc>
-              <a:spcBef>
-                <a:spcPts val="0"/>
-              </a:spcBef>
-              <a:spcAft>
-                <a:spcPts val="200"/>
-              </a:spcAft>
-            </a:pPr>
-            <a:r>
-              <a:rPr sz="1250" b="1">
-                <a:solidFill>
-                  <a:srgbClr val="C0612C"/>
-                </a:solidFill>
-                <a:latin typeface="Arial"/>
-                <a:ea typeface="Microsoft YaHei"/>
-                <a:cs typeface="Microsoft YaHei"/>
-              </a:rPr>
-              <a:t>2 </a:t>
-            </a:r>
-            <a:r>
-              <a:rPr sz="1250" b="1">
-                <a:solidFill>
-                  <a:srgbClr val="16202A"/>
-                </a:solidFill>
-                <a:latin typeface="Microsoft YaHei"/>
-                <a:ea typeface="Microsoft YaHei"/>
-                <a:cs typeface="Microsoft YaHei"/>
-              </a:rPr>
-              <a:t>编译</a:t>
-            </a:r>
-          </a:p>
-          <a:p>
-            <a:pPr algn="ctr" latinLnBrk="0">
-              <a:lnSpc>
-                <a:spcPct val="100000"/>
-              </a:lnSpc>
-              <a:spcBef>
-                <a:spcPts val="0"/>
-              </a:spcBef>
-              <a:spcAft>
-                <a:spcPts val="0"/>
-              </a:spcAft>
-            </a:pPr>
-            <a:r>
-              <a:rPr sz="1000" b="0">
-                <a:solidFill>
-                  <a:srgbClr val="66727F"/>
-                </a:solidFill>
-                <a:latin typeface="Microsoft YaHei"/>
-                <a:ea typeface="Microsoft YaHei"/>
-                <a:cs typeface="Microsoft YaHei"/>
-              </a:rPr>
-              <a:t>编译并拉起程序</a:t>
-            </a:r>
-          </a:p>
-        </p:txBody>
-      </p:sp>
-      <p:sp>
-        <p:nvSpPr>
-          <p:cNvPr id="10" name="Rounded Rectangle 9"/>
-          <p:cNvSpPr/>
-          <p:nvPr/>
-        </p:nvSpPr>
-        <p:spPr>
-          <a:xfrm>
-            <a:off x="5003719" y="5242541"/>
-            <a:ext cx="1737360" cy="676656"/>
-          </a:xfrm>
-          <a:prstGeom prst="roundRect">
-            <a:avLst>
-              <a:gd name="adj" fmla="val 35000"/>
-            </a:avLst>
-          </a:prstGeom>
-          <a:solidFill>
-            <a:srgbClr val="FFFFFF"/>
-          </a:solidFill>
-          <a:ln w="15875">
-            <a:solidFill>
-              <a:srgbClr val="C0612C"/>
-            </a:solidFill>
-          </a:ln>
-        </p:spPr>
-        <p:txBody>
-          <a:bodyPr rtlCol="0" anchor="ctr" wrap="square" lIns="45720" tIns="18288" rIns="45720" bIns="18288">
-            <a:noAutofit/>
-          </a:bodyPr>
-          <a:lstStyle/>
-          <a:p>
-            <a:pPr algn="ctr" latinLnBrk="0">
-              <a:lnSpc>
-                <a:spcPct val="100000"/>
-              </a:lnSpc>
-              <a:spcBef>
-                <a:spcPts val="0"/>
-              </a:spcBef>
-              <a:spcAft>
-                <a:spcPts val="200"/>
-              </a:spcAft>
-            </a:pPr>
-            <a:r>
-              <a:rPr sz="1250" b="1">
-                <a:solidFill>
-                  <a:srgbClr val="C0612C"/>
-                </a:solidFill>
-                <a:latin typeface="Arial"/>
-                <a:ea typeface="Microsoft YaHei"/>
-                <a:cs typeface="Microsoft YaHei"/>
-              </a:rPr>
-              <a:t>3 </a:t>
-            </a:r>
-            <a:r>
-              <a:rPr sz="1250" b="1">
-                <a:solidFill>
-                  <a:srgbClr val="16202A"/>
-                </a:solidFill>
-                <a:latin typeface="Microsoft YaHei"/>
-                <a:ea typeface="Microsoft YaHei"/>
-                <a:cs typeface="Microsoft YaHei"/>
-              </a:rPr>
-              <a:t>对数值</a:t>
-            </a:r>
-          </a:p>
-          <a:p>
-            <a:pPr algn="ctr" latinLnBrk="0">
-              <a:lnSpc>
-                <a:spcPct val="100000"/>
-              </a:lnSpc>
-              <a:spcBef>
-                <a:spcPts val="0"/>
-              </a:spcBef>
-              <a:spcAft>
-                <a:spcPts val="0"/>
-              </a:spcAft>
-            </a:pPr>
-            <a:r>
-              <a:rPr sz="1000" b="0">
-                <a:solidFill>
-                  <a:srgbClr val="66727F"/>
-                </a:solidFill>
-                <a:latin typeface="Microsoft YaHei"/>
-                <a:ea typeface="Microsoft YaHei"/>
-                <a:cs typeface="Microsoft YaHei"/>
-              </a:rPr>
-              <a:t>多形状多精度对 golden</a:t>
-            </a:r>
-          </a:p>
-        </p:txBody>
-      </p:sp>
-      <p:sp>
-        <p:nvSpPr>
-          <p:cNvPr id="11" name="Rounded Rectangle 10"/>
-          <p:cNvSpPr/>
-          <p:nvPr/>
-        </p:nvSpPr>
-        <p:spPr>
-          <a:xfrm>
-            <a:off x="1671400" y="5242541"/>
-            <a:ext cx="1737360" cy="676656"/>
-          </a:xfrm>
-          <a:prstGeom prst="roundRect">
-            <a:avLst>
-              <a:gd name="adj" fmla="val 35000"/>
-            </a:avLst>
-          </a:prstGeom>
-          <a:solidFill>
-            <a:srgbClr val="FFFFFF"/>
-          </a:solidFill>
-          <a:ln w="15875">
-            <a:solidFill>
-              <a:srgbClr val="C0612C"/>
-            </a:solidFill>
-          </a:ln>
-        </p:spPr>
-        <p:txBody>
-          <a:bodyPr rtlCol="0" anchor="ctr" wrap="square" lIns="45720" tIns="18288" rIns="45720" bIns="18288">
-            <a:noAutofit/>
-          </a:bodyPr>
-          <a:lstStyle/>
-          <a:p>
-            <a:pPr algn="ctr" latinLnBrk="0">
-              <a:lnSpc>
-                <a:spcPct val="100000"/>
-              </a:lnSpc>
-              <a:spcBef>
-                <a:spcPts val="0"/>
-              </a:spcBef>
-              <a:spcAft>
-                <a:spcPts val="200"/>
-              </a:spcAft>
-            </a:pPr>
-            <a:r>
-              <a:rPr sz="1250" b="1">
-                <a:solidFill>
-                  <a:srgbClr val="C0612C"/>
-                </a:solidFill>
-                <a:latin typeface="Arial"/>
-                <a:ea typeface="Microsoft YaHei"/>
-                <a:cs typeface="Microsoft YaHei"/>
-              </a:rPr>
-              <a:t>4 </a:t>
-            </a:r>
-            <a:r>
-              <a:rPr sz="1250" b="1">
-                <a:solidFill>
-                  <a:srgbClr val="16202A"/>
-                </a:solidFill>
-                <a:latin typeface="Microsoft YaHei"/>
-                <a:ea typeface="Microsoft YaHei"/>
-                <a:cs typeface="Microsoft YaHei"/>
-              </a:rPr>
-              <a:t>测性能</a:t>
-            </a:r>
-          </a:p>
-          <a:p>
-            <a:pPr algn="ctr" latinLnBrk="0">
-              <a:lnSpc>
-                <a:spcPct val="100000"/>
-              </a:lnSpc>
-              <a:spcBef>
-                <a:spcPts val="0"/>
-              </a:spcBef>
-              <a:spcAft>
-                <a:spcPts val="0"/>
-              </a:spcAft>
-            </a:pPr>
-            <a:r>
-              <a:rPr sz="1000" b="0">
-                <a:solidFill>
-                  <a:srgbClr val="66727F"/>
-                </a:solidFill>
-                <a:latin typeface="Microsoft YaHei"/>
-                <a:ea typeface="Microsoft YaHei"/>
-                <a:cs typeface="Microsoft YaHei"/>
-              </a:rPr>
-              <a:t>中位延迟 · 比理论上限</a:t>
-            </a:r>
-          </a:p>
-        </p:txBody>
-      </p:sp>
-      <p:sp>
-        <p:nvSpPr>
-          <p:cNvPr id="12" name="Rounded Rectangle 11"/>
-          <p:cNvSpPr/>
-          <p:nvPr/>
-        </p:nvSpPr>
-        <p:spPr>
-          <a:xfrm>
-            <a:off x="641657" y="3279666"/>
-            <a:ext cx="1737360" cy="676656"/>
-          </a:xfrm>
-          <a:prstGeom prst="roundRect">
-            <a:avLst>
-              <a:gd name="adj" fmla="val 35000"/>
-            </a:avLst>
-          </a:prstGeom>
-          <a:solidFill>
-            <a:srgbClr val="FFFFFF"/>
-          </a:solidFill>
-          <a:ln w="15875">
-            <a:solidFill>
-              <a:srgbClr val="C0612C"/>
-            </a:solidFill>
-          </a:ln>
-        </p:spPr>
-        <p:txBody>
-          <a:bodyPr rtlCol="0" anchor="ctr" wrap="square" lIns="45720" tIns="18288" rIns="45720" bIns="18288">
-            <a:noAutofit/>
-          </a:bodyPr>
-          <a:lstStyle/>
-          <a:p>
-            <a:pPr algn="ctr" latinLnBrk="0">
-              <a:lnSpc>
-                <a:spcPct val="100000"/>
-              </a:lnSpc>
-              <a:spcBef>
-                <a:spcPts val="0"/>
-              </a:spcBef>
-              <a:spcAft>
-                <a:spcPts val="200"/>
-              </a:spcAft>
-            </a:pPr>
-            <a:r>
-              <a:rPr sz="1250" b="1">
-                <a:solidFill>
-                  <a:srgbClr val="C0612C"/>
-                </a:solidFill>
-                <a:latin typeface="Arial"/>
-                <a:ea typeface="Microsoft YaHei"/>
-                <a:cs typeface="Microsoft YaHei"/>
-              </a:rPr>
-              <a:t>5 </a:t>
-            </a:r>
-            <a:r>
-              <a:rPr sz="1250" b="1">
-                <a:solidFill>
-                  <a:srgbClr val="16202A"/>
-                </a:solidFill>
-                <a:latin typeface="Microsoft YaHei"/>
-                <a:ea typeface="Microsoft YaHei"/>
-                <a:cs typeface="Microsoft YaHei"/>
-              </a:rPr>
-              <a:t>给反馈</a:t>
-            </a:r>
-          </a:p>
-          <a:p>
-            <a:pPr algn="ctr" latinLnBrk="0">
-              <a:lnSpc>
-                <a:spcPct val="100000"/>
-              </a:lnSpc>
-              <a:spcBef>
-                <a:spcPts val="0"/>
-              </a:spcBef>
-              <a:spcAft>
-                <a:spcPts val="0"/>
-              </a:spcAft>
-            </a:pPr>
-            <a:r>
-              <a:rPr sz="1000" b="0">
-                <a:solidFill>
-                  <a:srgbClr val="66727F"/>
-                </a:solidFill>
-                <a:latin typeface="Microsoft YaHei"/>
-                <a:ea typeface="Microsoft YaHei"/>
-                <a:cs typeface="Microsoft YaHei"/>
-              </a:rPr>
-              <a:t>打分 · 指出慢在哪</a:t>
-            </a:r>
-          </a:p>
-        </p:txBody>
-      </p:sp>
-      <p:sp>
-        <p:nvSpPr>
-          <p:cNvPr id="13" name="Arc 12"/>
-          <p:cNvSpPr/>
-          <p:nvPr/>
-        </p:nvSpPr>
-        <p:spPr>
-          <a:xfrm>
-            <a:off x="1371599" y="2404872"/>
-            <a:ext cx="5669280" cy="3511296"/>
-          </a:xfrm>
-          <a:prstGeom prst="arc">
-            <a:avLst>
-              <a:gd name="adj1" fmla="val 18010129"/>
-              <a:gd name="adj2" fmla="val 20263467"/>
-            </a:avLst>
-          </a:prstGeom>
-          <a:noFill/>
-          <a:ln w="19050">
-            <a:solidFill>
-              <a:srgbClr val="C0612C"/>
-            </a:solidFill>
-            <a:tailEnd type="triangle" w="med" len="med"/>
-          </a:ln>
-        </p:spPr>
-        <p:txBody>
-          <a:bodyPr rtlCol="0" anchor="ctr"/>
-          <a:lstStyle/>
-          <a:p>
-            <a:pPr algn="ctr"/>
-          </a:p>
-        </p:txBody>
-      </p:sp>
-      <p:sp>
-        <p:nvSpPr>
-          <p:cNvPr id="14" name="Arc 13"/>
-          <p:cNvSpPr/>
-          <p:nvPr/>
-        </p:nvSpPr>
-        <p:spPr>
-          <a:xfrm>
-            <a:off x="1371599" y="2404872"/>
-            <a:ext cx="5669280" cy="3511296"/>
-          </a:xfrm>
-          <a:prstGeom prst="arc">
-            <a:avLst>
-              <a:gd name="adj1" fmla="val 21452696"/>
-              <a:gd name="adj2" fmla="val 1386262"/>
-            </a:avLst>
-          </a:prstGeom>
-          <a:noFill/>
-          <a:ln w="19050">
-            <a:solidFill>
-              <a:srgbClr val="C0612C"/>
-            </a:solidFill>
-            <a:tailEnd type="triangle" w="med" len="med"/>
-          </a:ln>
-        </p:spPr>
-        <p:txBody>
-          <a:bodyPr rtlCol="0" anchor="ctr"/>
-          <a:lstStyle/>
-          <a:p>
-            <a:pPr algn="ctr"/>
-          </a:p>
-        </p:txBody>
-      </p:sp>
-      <p:sp>
-        <p:nvSpPr>
-          <p:cNvPr id="15" name="Arc 14"/>
-          <p:cNvSpPr/>
-          <p:nvPr/>
-        </p:nvSpPr>
-        <p:spPr>
-          <a:xfrm>
-            <a:off x="1371599" y="2404872"/>
-            <a:ext cx="5669280" cy="3511296"/>
-          </a:xfrm>
-          <a:prstGeom prst="arc">
-            <a:avLst>
-              <a:gd name="adj1" fmla="val 4048999"/>
-              <a:gd name="adj2" fmla="val 6751000"/>
-            </a:avLst>
-          </a:prstGeom>
-          <a:noFill/>
-          <a:ln w="19050">
-            <a:solidFill>
-              <a:srgbClr val="C0612C"/>
-            </a:solidFill>
-            <a:tailEnd type="triangle" w="med" len="med"/>
-          </a:ln>
-        </p:spPr>
-        <p:txBody>
-          <a:bodyPr rtlCol="0" anchor="ctr"/>
-          <a:lstStyle/>
-          <a:p>
-            <a:pPr algn="ctr"/>
-          </a:p>
-        </p:txBody>
-      </p:sp>
-      <p:sp>
-        <p:nvSpPr>
-          <p:cNvPr id="16" name="Arc 15"/>
-          <p:cNvSpPr/>
-          <p:nvPr/>
-        </p:nvSpPr>
-        <p:spPr>
-          <a:xfrm>
-            <a:off x="1371599" y="2404872"/>
-            <a:ext cx="5669280" cy="3511296"/>
-          </a:xfrm>
-          <a:prstGeom prst="arc">
-            <a:avLst>
-              <a:gd name="adj1" fmla="val 9413737"/>
-              <a:gd name="adj2" fmla="val 10947303"/>
-            </a:avLst>
-          </a:prstGeom>
-          <a:noFill/>
-          <a:ln w="19050">
-            <a:solidFill>
-              <a:srgbClr val="C0612C"/>
-            </a:solidFill>
-            <a:tailEnd type="triangle" w="med" len="med"/>
-          </a:ln>
-        </p:spPr>
-        <p:txBody>
-          <a:bodyPr rtlCol="0" anchor="ctr"/>
-          <a:lstStyle/>
-          <a:p>
-            <a:pPr algn="ctr"/>
-          </a:p>
-        </p:txBody>
-      </p:sp>
-      <p:sp>
-        <p:nvSpPr>
-          <p:cNvPr id="17" name="Arc 16"/>
-          <p:cNvSpPr/>
-          <p:nvPr/>
-        </p:nvSpPr>
-        <p:spPr>
-          <a:xfrm>
-            <a:off x="1371599" y="2404872"/>
-            <a:ext cx="5669280" cy="3511296"/>
-          </a:xfrm>
-          <a:prstGeom prst="arc">
-            <a:avLst>
-              <a:gd name="adj1" fmla="val 12136532"/>
-              <a:gd name="adj2" fmla="val 14389870"/>
-            </a:avLst>
-          </a:prstGeom>
-          <a:noFill/>
-          <a:ln w="19050">
-            <a:solidFill>
-              <a:srgbClr val="C0612C"/>
-            </a:solidFill>
-            <a:tailEnd type="triangle" w="med" len="med"/>
-          </a:ln>
-        </p:spPr>
-        <p:txBody>
-          <a:bodyPr rtlCol="0" anchor="ctr"/>
-          <a:lstStyle/>
-          <a:p>
-            <a:pPr algn="ctr"/>
-          </a:p>
-        </p:txBody>
-      </p:sp>
-      <p:sp>
-        <p:nvSpPr>
-          <p:cNvPr id="18" name="Rectangle 17"/>
-          <p:cNvSpPr/>
-          <p:nvPr/>
-        </p:nvSpPr>
-        <p:spPr>
-          <a:xfrm>
-            <a:off x="8321040" y="2066543"/>
-            <a:ext cx="3322015" cy="3849624"/>
-          </a:xfrm>
-          <a:prstGeom prst="rect">
-            <a:avLst/>
-          </a:prstGeom>
-          <a:solidFill>
-            <a:srgbClr val="F8EADF"/>
-          </a:solidFill>
-          <a:ln>
-            <a:noFill/>
-          </a:ln>
-        </p:spPr>
-        <p:txBody>
-          <a:bodyPr rtlCol="0" anchor="ctr"/>
-          <a:lstStyle/>
-          <a:p>
-            <a:pPr algn="ctr"/>
-          </a:p>
-        </p:txBody>
-      </p:sp>
-      <p:sp>
-        <p:nvSpPr>
-          <p:cNvPr id="19" name="TextBox 18"/>
-          <p:cNvSpPr txBox="1"/>
-          <p:nvPr/>
-        </p:nvSpPr>
-        <p:spPr>
-          <a:xfrm>
-            <a:off x="8558784" y="2212848"/>
-            <a:ext cx="2864815" cy="292608"/>
-          </a:xfrm>
-          <a:prstGeom prst="rect">
-            <a:avLst/>
-          </a:prstGeom>
-          <a:noFill/>
-        </p:spPr>
-        <p:txBody>
-          <a:bodyPr wrap="square" anchor="ctr" lIns="0" tIns="0" rIns="0" bIns="0">
-            <a:noAutofit/>
-          </a:bodyPr>
-          <a:lstStyle/>
+              <a:t>　唯一的耦合层：编译 · 运行 · 采性能 · 理论上限</a:t>
+            </a:r>
+          </a:p>
           <a:p>
             <a:pPr algn="l" latinLnBrk="0">
               <a:lnSpc>
@@ -4653,6 +4896,82 @@
               </a:spcAft>
             </a:pPr>
             <a:r>
+              <a:rPr sz="1050" b="0">
+                <a:solidFill>
+                  <a:srgbClr val="66727F"/>
+                </a:solidFill>
+                <a:latin typeface="Microsoft YaHei"/>
+                <a:ea typeface="Microsoft YaHei"/>
+                <a:cs typeface="Microsoft YaHei"/>
+              </a:rPr>
+              <a:t>换芯片只写一个后端 + 一张硬件说明卡，agent/ 与 harness/ 零改动</a:t>
+            </a:r>
+          </a:p>
+        </p:txBody>
+      </p:sp>
+      <p:sp>
+        <p:nvSpPr>
+          <p:cNvPr id="26" name="Rectangle 25"/>
+          <p:cNvSpPr/>
+          <p:nvPr/>
+        </p:nvSpPr>
+        <p:spPr>
+          <a:xfrm>
+            <a:off x="8321040" y="2011680"/>
+            <a:ext cx="3322015" cy="3986784"/>
+          </a:xfrm>
+          <a:prstGeom prst="rect">
+            <a:avLst/>
+          </a:prstGeom>
+          <a:solidFill>
+            <a:srgbClr val="F8EADF"/>
+          </a:solidFill>
+          <a:ln>
+            <a:noFill/>
+          </a:ln>
+        </p:spPr>
+        <p:txBody>
+          <a:bodyPr rtlCol="0" anchor="ctr"/>
+          <a:lstStyle/>
+          <a:p>
+            <a:pPr algn="ctr"/>
+          </a:p>
+        </p:txBody>
+      </p:sp>
+      <p:sp>
+        <p:nvSpPr>
+          <p:cNvPr id="27" name="TextBox 26"/>
+          <p:cNvSpPr txBox="1"/>
+          <p:nvPr/>
+        </p:nvSpPr>
+        <p:spPr>
+          <a:xfrm>
+            <a:off x="8558784" y="2157984"/>
+            <a:ext cx="2864815" cy="292608"/>
+          </a:xfrm>
+          <a:prstGeom prst="rect">
+            <a:avLst/>
+          </a:prstGeom>
+          <a:noFill/>
+        </p:spPr>
+        <p:txBody>
+          <a:bodyPr wrap="square" anchor="ctr" lIns="0" tIns="0" rIns="0" bIns="0">
+            <a:noAutofit/>
+          </a:bodyPr>
+          <a:lstStyle/>
+          <a:p>
+            <a:pPr algn="l" latinLnBrk="0">
+              <a:lnSpc>
+                <a:spcPct val="100000"/>
+              </a:lnSpc>
+              <a:spcBef>
+                <a:spcPts val="0"/>
+              </a:spcBef>
+              <a:spcAft>
+                <a:spcPts val="0"/>
+              </a:spcAft>
+            </a:pPr>
+            <a:r>
               <a:rPr sz="1400" b="1">
                 <a:solidFill>
                   <a:srgbClr val="16202A"/>
@@ -4672,21 +4991,21 @@
                 <a:ea typeface="Microsoft YaHei"/>
                 <a:cs typeface="Microsoft YaHei"/>
               </a:rPr>
-              <a:t>　数字待补</a:t>
-            </a:r>
-          </a:p>
-        </p:txBody>
-      </p:sp>
-      <p:sp>
-        <p:nvSpPr>
-          <p:cNvPr id="20" name="Rectangle 19"/>
+              <a:t>　样例阶段</a:t>
+            </a:r>
+          </a:p>
+        </p:txBody>
+      </p:sp>
+      <p:sp>
+        <p:nvSpPr>
+          <p:cNvPr id="28" name="Rectangle 27"/>
           <p:cNvSpPr/>
           <p:nvPr/>
         </p:nvSpPr>
         <p:spPr>
           <a:xfrm>
-            <a:off x="8558784" y="2743200"/>
-            <a:ext cx="2846527" cy="582930"/>
+            <a:off x="8558784" y="2706624"/>
+            <a:ext cx="2846527" cy="896112"/>
           </a:xfrm>
           <a:prstGeom prst="rect">
             <a:avLst/>
@@ -4710,14 +5029,14 @@
       </p:sp>
       <p:sp>
         <p:nvSpPr>
-          <p:cNvPr id="21" name="TextBox 20"/>
+          <p:cNvPr id="29" name="TextBox 28"/>
           <p:cNvSpPr txBox="1"/>
           <p:nvPr/>
         </p:nvSpPr>
         <p:spPr>
           <a:xfrm>
-            <a:off x="8723376" y="2743200"/>
-            <a:ext cx="1913839" cy="582930"/>
+            <a:off x="8723376" y="2706624"/>
+            <a:ext cx="2517343" cy="896112"/>
           </a:xfrm>
           <a:prstGeom prst="rect">
             <a:avLst/>
@@ -4729,6 +5048,30 @@
             <a:noAutofit/>
           </a:bodyPr>
           <a:lstStyle/>
+          <a:p>
+            <a:pPr algn="l" latinLnBrk="0">
+              <a:lnSpc>
+                <a:spcPct val="100000"/>
+              </a:lnSpc>
+              <a:spcBef>
+                <a:spcPts val="0"/>
+              </a:spcBef>
+              <a:spcAft>
+                <a:spcPts val="200"/>
+              </a:spcAft>
+            </a:pPr>
+            <a:r>
+              <a:rPr sz="1050" b="0">
+                <a:solidFill>
+                  <a:srgbClr val="66727F"/>
+                </a:solidFill>
+                <a:latin typeface="Microsoft YaHei"/>
+                <a:ea typeface="Microsoft YaHei"/>
+                <a:cs typeface="Microsoft YaHei"/>
+              </a:rPr>
+              <a:t>已验证算子</a:t>
+            </a:r>
+          </a:p>
           <a:p>
             <a:pPr algn="l" latinLnBrk="0">
               <a:lnSpc>
@@ -4742,83 +5085,53 @@
               </a:spcAft>
             </a:pPr>
             <a:r>
-              <a:rPr sz="1150" b="0">
-                <a:solidFill>
-                  <a:srgbClr val="35424F"/>
-                </a:solidFill>
-                <a:latin typeface="Microsoft YaHei"/>
+              <a:rPr sz="1600" b="1">
+                <a:solidFill>
+                  <a:srgbClr val="16202A"/>
+                </a:solidFill>
+                <a:latin typeface="Arial"/>
                 <a:ea typeface="Microsoft YaHei"/>
                 <a:cs typeface="Microsoft YaHei"/>
               </a:rPr>
-              <a:t>已达标算子数</a:t>
-            </a:r>
-          </a:p>
-        </p:txBody>
-      </p:sp>
-      <p:sp>
-        <p:nvSpPr>
-          <p:cNvPr id="22" name="Rounded Rectangle 21"/>
-          <p:cNvSpPr/>
-          <p:nvPr/>
-        </p:nvSpPr>
-        <p:spPr>
-          <a:xfrm>
-            <a:off x="10472623" y="2852928"/>
-            <a:ext cx="768096" cy="363474"/>
-          </a:xfrm>
-          <a:prstGeom prst="roundRect">
-            <a:avLst>
-              <a:gd name="adj" fmla="val 30000"/>
-            </a:avLst>
-          </a:prstGeom>
-          <a:solidFill>
-            <a:srgbClr val="EEF1F4"/>
-          </a:solidFill>
-          <a:ln>
-            <a:noFill/>
-          </a:ln>
-        </p:spPr>
-        <p:txBody>
-          <a:bodyPr rtlCol="0" anchor="ctr" wrap="square" tIns="36576" bIns="36576">
-            <a:noAutofit/>
-          </a:bodyPr>
-          <a:lstStyle/>
-          <a:p>
-            <a:pPr algn="ctr" latinLnBrk="0">
+              <a:t>4 个</a:t>
+            </a:r>
+          </a:p>
+          <a:p>
+            <a:pPr algn="l" latinLnBrk="0">
               <a:lnSpc>
                 <a:spcPct val="100000"/>
               </a:lnSpc>
               <a:spcBef>
-                <a:spcPts val="0"/>
+                <a:spcPts val="200"/>
               </a:spcBef>
               <a:spcAft>
                 <a:spcPts val="0"/>
               </a:spcAft>
             </a:pPr>
             <a:r>
-              <a:rPr sz="1500" b="1">
+              <a:rPr sz="950" b="0">
                 <a:solidFill>
                   <a:srgbClr val="8C96A1"/>
                 </a:solidFill>
-                <a:latin typeface="Arial"/>
+                <a:latin typeface="Microsoft YaHei"/>
                 <a:ea typeface="Microsoft YaHei"/>
                 <a:cs typeface="Microsoft YaHei"/>
               </a:rPr>
-              <a:t>—</a:t>
-            </a:r>
-          </a:p>
-        </p:txBody>
-      </p:sp>
-      <p:sp>
-        <p:nvSpPr>
-          <p:cNvPr id="23" name="Rectangle 22"/>
+              <a:t>relu · relu_sdnn · rmsnorm · hc_post</a:t>
+            </a:r>
+          </a:p>
+        </p:txBody>
+      </p:sp>
+      <p:sp>
+        <p:nvSpPr>
+          <p:cNvPr id="30" name="Rectangle 29"/>
           <p:cNvSpPr/>
           <p:nvPr/>
         </p:nvSpPr>
         <p:spPr>
           <a:xfrm>
-            <a:off x="8558784" y="3435858"/>
-            <a:ext cx="2846527" cy="582930"/>
+            <a:off x="8558784" y="3712464"/>
+            <a:ext cx="2846527" cy="896112"/>
           </a:xfrm>
           <a:prstGeom prst="rect">
             <a:avLst/>
@@ -4842,14 +5155,14 @@
       </p:sp>
       <p:sp>
         <p:nvSpPr>
-          <p:cNvPr id="24" name="TextBox 23"/>
+          <p:cNvPr id="31" name="TextBox 30"/>
           <p:cNvSpPr txBox="1"/>
           <p:nvPr/>
         </p:nvSpPr>
         <p:spPr>
           <a:xfrm>
-            <a:off x="8723376" y="3435858"/>
-            <a:ext cx="1913839" cy="582930"/>
+            <a:off x="8723376" y="3712464"/>
+            <a:ext cx="2517343" cy="896112"/>
           </a:xfrm>
           <a:prstGeom prst="rect">
             <a:avLst/>
@@ -4861,6 +5174,30 @@
             <a:noAutofit/>
           </a:bodyPr>
           <a:lstStyle/>
+          <a:p>
+            <a:pPr algn="l" latinLnBrk="0">
+              <a:lnSpc>
+                <a:spcPct val="100000"/>
+              </a:lnSpc>
+              <a:spcBef>
+                <a:spcPts val="0"/>
+              </a:spcBef>
+              <a:spcAft>
+                <a:spcPts val="200"/>
+              </a:spcAft>
+            </a:pPr>
+            <a:r>
+              <a:rPr sz="1050" b="0">
+                <a:solidFill>
+                  <a:srgbClr val="66727F"/>
+                </a:solidFill>
+                <a:latin typeface="Microsoft YaHei"/>
+                <a:ea typeface="Microsoft YaHei"/>
+                <a:cs typeface="Microsoft YaHei"/>
+              </a:rPr>
+              <a:t>rmsnorm 相对基线</a:t>
+            </a:r>
+          </a:p>
           <a:p>
             <a:pPr algn="l" latinLnBrk="0">
               <a:lnSpc>
@@ -4874,83 +5211,53 @@
               </a:spcAft>
             </a:pPr>
             <a:r>
-              <a:rPr sz="1150" b="0">
-                <a:solidFill>
-                  <a:srgbClr val="35424F"/>
-                </a:solidFill>
-                <a:latin typeface="Microsoft YaHei"/>
+              <a:rPr sz="1600" b="1">
+                <a:solidFill>
+                  <a:srgbClr val="16202A"/>
+                </a:solidFill>
+                <a:latin typeface="Arial"/>
                 <a:ea typeface="Microsoft YaHei"/>
                 <a:cs typeface="Microsoft YaHei"/>
               </a:rPr>
-              <a:t>平均达标轮数</a:t>
-            </a:r>
-          </a:p>
-        </p:txBody>
-      </p:sp>
-      <p:sp>
-        <p:nvSpPr>
-          <p:cNvPr id="25" name="Rounded Rectangle 24"/>
-          <p:cNvSpPr/>
-          <p:nvPr/>
-        </p:nvSpPr>
-        <p:spPr>
-          <a:xfrm>
-            <a:off x="10472623" y="3545586"/>
-            <a:ext cx="768096" cy="363474"/>
-          </a:xfrm>
-          <a:prstGeom prst="roundRect">
-            <a:avLst>
-              <a:gd name="adj" fmla="val 30000"/>
-            </a:avLst>
-          </a:prstGeom>
-          <a:solidFill>
-            <a:srgbClr val="EEF1F4"/>
-          </a:solidFill>
-          <a:ln>
-            <a:noFill/>
-          </a:ln>
-        </p:spPr>
-        <p:txBody>
-          <a:bodyPr rtlCol="0" anchor="ctr" wrap="square" tIns="36576" bIns="36576">
-            <a:noAutofit/>
-          </a:bodyPr>
-          <a:lstStyle/>
-          <a:p>
-            <a:pPr algn="ctr" latinLnBrk="0">
+              <a:t>1.24×</a:t>
+            </a:r>
+          </a:p>
+          <a:p>
+            <a:pPr algn="l" latinLnBrk="0">
               <a:lnSpc>
                 <a:spcPct val="100000"/>
               </a:lnSpc>
               <a:spcBef>
-                <a:spcPts val="0"/>
+                <a:spcPts val="200"/>
               </a:spcBef>
               <a:spcAft>
                 <a:spcPts val="0"/>
               </a:spcAft>
             </a:pPr>
             <a:r>
-              <a:rPr sz="1500" b="1">
+              <a:rPr sz="950" b="0">
                 <a:solidFill>
                   <a:srgbClr val="8C96A1"/>
                 </a:solidFill>
-                <a:latin typeface="Arial"/>
+                <a:latin typeface="Microsoft YaHei"/>
                 <a:ea typeface="Microsoft YaHei"/>
                 <a:cs typeface="Microsoft YaHei"/>
               </a:rPr>
-              <a:t>—</a:t>
-            </a:r>
-          </a:p>
-        </p:txBody>
-      </p:sp>
-      <p:sp>
-        <p:nvSpPr>
-          <p:cNvPr id="26" name="Rectangle 25"/>
+              <a:t>741.2 → 595.6</a:t>
+            </a:r>
+          </a:p>
+        </p:txBody>
+      </p:sp>
+      <p:sp>
+        <p:nvSpPr>
+          <p:cNvPr id="32" name="Rectangle 31"/>
           <p:cNvSpPr/>
           <p:nvPr/>
         </p:nvSpPr>
         <p:spPr>
           <a:xfrm>
-            <a:off x="8558784" y="4128516"/>
-            <a:ext cx="2846527" cy="582930"/>
+            <a:off x="8558784" y="4718304"/>
+            <a:ext cx="2846527" cy="640080"/>
           </a:xfrm>
           <a:prstGeom prst="rect">
             <a:avLst/>
@@ -4974,14 +5281,14 @@
       </p:sp>
       <p:sp>
         <p:nvSpPr>
-          <p:cNvPr id="27" name="TextBox 26"/>
+          <p:cNvPr id="33" name="TextBox 32"/>
           <p:cNvSpPr txBox="1"/>
           <p:nvPr/>
         </p:nvSpPr>
         <p:spPr>
           <a:xfrm>
-            <a:off x="8723376" y="4128516"/>
-            <a:ext cx="1913839" cy="582930"/>
+            <a:off x="8723376" y="4718304"/>
+            <a:ext cx="2517343" cy="640080"/>
           </a:xfrm>
           <a:prstGeom prst="rect">
             <a:avLst/>
@@ -4993,6 +5300,30 @@
             <a:noAutofit/>
           </a:bodyPr>
           <a:lstStyle/>
+          <a:p>
+            <a:pPr algn="l" latinLnBrk="0">
+              <a:lnSpc>
+                <a:spcPct val="100000"/>
+              </a:lnSpc>
+              <a:spcBef>
+                <a:spcPts val="0"/>
+              </a:spcBef>
+              <a:spcAft>
+                <a:spcPts val="200"/>
+              </a:spcAft>
+            </a:pPr>
+            <a:r>
+              <a:rPr sz="1050" b="0">
+                <a:solidFill>
+                  <a:srgbClr val="66727F"/>
+                </a:solidFill>
+                <a:latin typeface="Microsoft YaHei"/>
+                <a:ea typeface="Microsoft YaHei"/>
+                <a:cs typeface="Microsoft YaHei"/>
+              </a:rPr>
+              <a:t>理论上限达成率</a:t>
+            </a:r>
+          </a:p>
           <a:p>
             <a:pPr algn="l" latinLnBrk="0">
               <a:lnSpc>
@@ -5006,114 +5337,29 @@
               </a:spcAft>
             </a:pPr>
             <a:r>
-              <a:rPr sz="1150" b="0">
-                <a:solidFill>
-                  <a:srgbClr val="35424F"/>
-                </a:solidFill>
-                <a:latin typeface="Microsoft YaHei"/>
-                <a:ea typeface="Microsoft YaHei"/>
-                <a:cs typeface="Microsoft YaHei"/>
-              </a:rPr>
-              <a:t>相对基线加速</a:t>
-            </a:r>
-          </a:p>
-        </p:txBody>
-      </p:sp>
-      <p:sp>
-        <p:nvSpPr>
-          <p:cNvPr id="28" name="Rounded Rectangle 27"/>
-          <p:cNvSpPr/>
-          <p:nvPr/>
-        </p:nvSpPr>
-        <p:spPr>
-          <a:xfrm>
-            <a:off x="10472623" y="4238244"/>
-            <a:ext cx="768096" cy="363474"/>
-          </a:xfrm>
-          <a:prstGeom prst="roundRect">
-            <a:avLst>
-              <a:gd name="adj" fmla="val 30000"/>
-            </a:avLst>
-          </a:prstGeom>
-          <a:solidFill>
-            <a:srgbClr val="EEF1F4"/>
-          </a:solidFill>
-          <a:ln>
-            <a:noFill/>
-          </a:ln>
-        </p:spPr>
-        <p:txBody>
-          <a:bodyPr rtlCol="0" anchor="ctr" wrap="square" tIns="36576" bIns="36576">
-            <a:noAutofit/>
-          </a:bodyPr>
-          <a:lstStyle/>
-          <a:p>
-            <a:pPr algn="ctr" latinLnBrk="0">
-              <a:lnSpc>
-                <a:spcPct val="100000"/>
-              </a:lnSpc>
-              <a:spcBef>
-                <a:spcPts val="0"/>
-              </a:spcBef>
-              <a:spcAft>
-                <a:spcPts val="0"/>
-              </a:spcAft>
-            </a:pPr>
-            <a:r>
-              <a:rPr sz="1500" b="1">
-                <a:solidFill>
-                  <a:srgbClr val="8C96A1"/>
+              <a:rPr sz="1600" b="1">
+                <a:solidFill>
+                  <a:srgbClr val="16202A"/>
                 </a:solidFill>
                 <a:latin typeface="Arial"/>
                 <a:ea typeface="Microsoft YaHei"/>
                 <a:cs typeface="Microsoft YaHei"/>
               </a:rPr>
-              <a:t>—</a:t>
-            </a:r>
-          </a:p>
-        </p:txBody>
-      </p:sp>
-      <p:sp>
-        <p:nvSpPr>
-          <p:cNvPr id="29" name="Rectangle 28"/>
-          <p:cNvSpPr/>
-          <p:nvPr/>
-        </p:nvSpPr>
-        <p:spPr>
-          <a:xfrm>
-            <a:off x="8558784" y="4821174"/>
-            <a:ext cx="2846527" cy="582930"/>
-          </a:xfrm>
-          <a:prstGeom prst="rect">
-            <a:avLst/>
-          </a:prstGeom>
-          <a:solidFill>
-            <a:srgbClr val="FFFFFF"/>
-          </a:solidFill>
-          <a:ln w="9525">
-            <a:solidFill>
-              <a:srgbClr val="DDE2E7"/>
-            </a:solidFill>
-          </a:ln>
-        </p:spPr>
-        <p:txBody>
-          <a:bodyPr rtlCol="0" anchor="ctr"/>
-          <a:lstStyle/>
-          <a:p>
-            <a:pPr algn="ctr"/>
-          </a:p>
-        </p:txBody>
-      </p:sp>
-      <p:sp>
-        <p:nvSpPr>
-          <p:cNvPr id="30" name="TextBox 29"/>
+              <a:t>0.47 → 0.58</a:t>
+            </a:r>
+          </a:p>
+        </p:txBody>
+      </p:sp>
+      <p:sp>
+        <p:nvSpPr>
+          <p:cNvPr id="34" name="TextBox 33"/>
           <p:cNvSpPr txBox="1"/>
           <p:nvPr/>
         </p:nvSpPr>
         <p:spPr>
           <a:xfrm>
-            <a:off x="8723376" y="4821174"/>
-            <a:ext cx="1913839" cy="582930"/>
+            <a:off x="8558784" y="5504688"/>
+            <a:ext cx="2846527" cy="457200"/>
           </a:xfrm>
           <a:prstGeom prst="rect">
             <a:avLst/>
@@ -5121,7 +5367,7 @@
           <a:noFill/>
         </p:spPr>
         <p:txBody>
-          <a:bodyPr wrap="square" anchor="ctr" lIns="0" tIns="0" rIns="0" bIns="0">
+          <a:bodyPr wrap="square" anchor="t" lIns="0" tIns="0" rIns="0" bIns="0">
             <a:noAutofit/>
           </a:bodyPr>
           <a:lstStyle/>
@@ -5138,83 +5384,29 @@
               </a:spcAft>
             </a:pPr>
             <a:r>
-              <a:rPr sz="1150" b="0">
-                <a:solidFill>
-                  <a:srgbClr val="35424F"/>
+              <a:rPr sz="1050" b="0">
+                <a:solidFill>
+                  <a:srgbClr val="66727F"/>
                 </a:solidFill>
                 <a:latin typeface="Microsoft YaHei"/>
                 <a:ea typeface="Microsoft YaHei"/>
                 <a:cs typeface="Microsoft YaHei"/>
               </a:rPr>
-              <a:t>理论上限达成率</a:t>
-            </a:r>
-          </a:p>
-        </p:txBody>
-      </p:sp>
-      <p:sp>
-        <p:nvSpPr>
-          <p:cNvPr id="31" name="Rounded Rectangle 30"/>
-          <p:cNvSpPr/>
-          <p:nvPr/>
-        </p:nvSpPr>
-        <p:spPr>
-          <a:xfrm>
-            <a:off x="10472623" y="4930902"/>
-            <a:ext cx="768096" cy="363474"/>
-          </a:xfrm>
-          <a:prstGeom prst="roundRect">
-            <a:avLst>
-              <a:gd name="adj" fmla="val 30000"/>
-            </a:avLst>
-          </a:prstGeom>
-          <a:solidFill>
-            <a:srgbClr val="EEF1F4"/>
-          </a:solidFill>
-          <a:ln>
-            <a:noFill/>
-          </a:ln>
-        </p:spPr>
-        <p:txBody>
-          <a:bodyPr rtlCol="0" anchor="ctr" wrap="square" tIns="36576" bIns="36576">
-            <a:noAutofit/>
-          </a:bodyPr>
-          <a:lstStyle/>
-          <a:p>
-            <a:pPr algn="ctr" latinLnBrk="0">
-              <a:lnSpc>
-                <a:spcPct val="100000"/>
-              </a:lnSpc>
-              <a:spcBef>
-                <a:spcPts val="0"/>
-              </a:spcBef>
-              <a:spcAft>
-                <a:spcPts val="0"/>
-              </a:spcAft>
-            </a:pPr>
-            <a:r>
-              <a:rPr sz="1500" b="1">
-                <a:solidFill>
-                  <a:srgbClr val="8C96A1"/>
-                </a:solidFill>
-                <a:latin typeface="Arial"/>
-                <a:ea typeface="Microsoft YaHei"/>
-                <a:cs typeface="Microsoft YaHei"/>
-              </a:rPr>
-              <a:t>—</a:t>
-            </a:r>
-          </a:p>
-        </p:txBody>
-      </p:sp>
-      <p:sp>
-        <p:nvSpPr>
-          <p:cNvPr id="32" name="TextBox 31"/>
+              <a:t>单算子实测，尚无规模化达标统计；口径为真机、生产形状</a:t>
+            </a:r>
+          </a:p>
+        </p:txBody>
+      </p:sp>
+      <p:sp>
+        <p:nvSpPr>
+          <p:cNvPr id="35" name="TextBox 34"/>
           <p:cNvSpPr txBox="1"/>
           <p:nvPr/>
         </p:nvSpPr>
         <p:spPr>
           <a:xfrm>
-            <a:off x="8558784" y="5532120"/>
-            <a:ext cx="2846527" cy="274320"/>
+            <a:off x="548640" y="6382512"/>
+            <a:ext cx="9905695" cy="256032"/>
           </a:xfrm>
           <a:prstGeom prst="rect">
             <a:avLst/>
@@ -5239,53 +5431,6 @@
               </a:spcAft>
             </a:pPr>
             <a:r>
-              <a:rPr sz="1050" b="0">
-                <a:solidFill>
-                  <a:srgbClr val="66727F"/>
-                </a:solidFill>
-                <a:latin typeface="Microsoft YaHei"/>
-                <a:ea typeface="Microsoft YaHei"/>
-                <a:cs typeface="Microsoft YaHei"/>
-              </a:rPr>
-              <a:t>口径：真机、生产形状上的实测</a:t>
-            </a:r>
-          </a:p>
-        </p:txBody>
-      </p:sp>
-      <p:sp>
-        <p:nvSpPr>
-          <p:cNvPr id="33" name="TextBox 32"/>
-          <p:cNvSpPr txBox="1"/>
-          <p:nvPr/>
-        </p:nvSpPr>
-        <p:spPr>
-          <a:xfrm>
-            <a:off x="548640" y="6382512"/>
-            <a:ext cx="9905695" cy="256032"/>
-          </a:xfrm>
-          <a:prstGeom prst="rect">
-            <a:avLst/>
-          </a:prstGeom>
-          <a:noFill/>
-        </p:spPr>
-        <p:txBody>
-          <a:bodyPr wrap="square" anchor="ctr" lIns="0" tIns="0" rIns="0" bIns="0">
-            <a:noAutofit/>
-          </a:bodyPr>
-          <a:lstStyle/>
-          <a:p>
-            <a:pPr algn="l" latinLnBrk="0">
-              <a:lnSpc>
-                <a:spcPct val="100000"/>
-              </a:lnSpc>
-              <a:spcBef>
-                <a:spcPts val="0"/>
-              </a:spcBef>
-              <a:spcAft>
-                <a:spcPts val="0"/>
-              </a:spcAft>
-            </a:pPr>
-            <a:r>
               <a:rPr sz="1000" b="0">
                 <a:solidFill>
                   <a:srgbClr val="66727F"/>
@@ -5301,7 +5446,7 @@
       </p:sp>
       <p:sp>
         <p:nvSpPr>
-          <p:cNvPr id="34" name="TextBox 33"/>
+          <p:cNvPr id="36" name="TextBox 35"/>
           <p:cNvSpPr txBox="1"/>
           <p:nvPr/>
         </p:nvSpPr>

--- a/slides/xpugen_operator_agent.pptx
+++ b/slides/xpugen_operator_agent.pptx
@@ -515,7 +515,7 @@
                 <a:ea typeface="Microsoft YaHei"/>
                 <a:cs typeface="Microsoft YaHei"/>
               </a:rPr>
-              <a:t>【附页 · xpugen · 约 125 秒（2:05）】</a:t>
+              <a:t>【附页 · xpugen · 约 130 秒（2:10）】</a:t>
             </a:r>
           </a:p>
           <a:p>
@@ -551,7 +551,7 @@
                 <a:ea typeface="Microsoft YaHei"/>
                 <a:cs typeface="Microsoft YaHei"/>
               </a:rPr>
-              <a:t>先说清结构：这里只有一个 LLM，就是左边这个生成。右边编译、对数值、测速、看机制全是确定性的评测流程，不是 agent，不会自由发挥。</a:t>
+              <a:t>先说清结构：左边写算子，右边判算子。会「猜」的只有左边这一个模型，右边从编译到测速每一步都是写死的规则，行不行轮不到模型自己说。</a:t>
             </a:r>
           </a:p>
           <a:p>
@@ -569,7 +569,7 @@
                 <a:ea typeface="Microsoft YaHei"/>
                 <a:cs typeface="Microsoft YaHei"/>
               </a:rPr>
-              <a:t>左边动手之前还有一道门：先把需求问清楚、至少比过两个方案，才允许写内核。入口有两条，从一句需求开始，或者从现有实现反推出规格，第 0 轮直接拿它当基线。</a:t>
+              <a:t>左边动手之前还有一道门：先把需求问到没有歧义、至少比过两个方案，才允许写内核。起步有两条路，从一句需求开始，或者从现有实现反推出规格，第 0 轮直接拿它当基线。</a:t>
             </a:r>
           </a:p>
           <a:p>
@@ -587,7 +587,7 @@
                 <a:ea typeface="Microsoft YaHei"/>
                 <a:cs typeface="Microsoft YaHei"/>
               </a:rPr>
-              <a:t>右边编译跑通、多种形状和精度逐一对 CPU golden；性能上分两路取证——真机回答快了多少，模拟器看逐单元 busy、跨引擎并行，回答为什么慢，两边对不上以真机为准。</a:t>
+              <a:t>右边是一级级往上问：能不能跑起来、算得对不对、快了多少、为什么慢。快了多少只认真机；为什么慢才看模拟器，它能看到逐个单元的忙闲和跨引擎的并行，两边对不上以真机为准。</a:t>
             </a:r>
           </a:p>
           <a:p>
@@ -605,7 +605,7 @@
                 <a:ea typeface="Microsoft YaHei"/>
                 <a:cs typeface="Microsoft YaHei"/>
               </a:rPr>
-              <a:t>这些结果打成结构化反馈回到生成：精度默认八轮收敛，性能调优是持续迭代，连着五十轮没进展才敢说卡住了。</a:t>
+              <a:t>判完的分数和卡在哪原样回传给左边，接着改下一轮：精度默认八轮收敛，性能调优是持续迭代，连着五十轮没进展才敢说卡住了。</a:t>
             </a:r>
           </a:p>
           <a:p>
@@ -623,7 +623,7 @@
                 <a:ea typeface="Microsoft YaHei"/>
                 <a:cs typeface="Microsoft YaHei"/>
               </a:rPr>
-              <a:t>底下一行是架构：生成和评测都不碰硬件，只认 backend 这一层的四个接口，换芯片只写一个后端加一张硬件说明卡。</a:t>
+              <a:t>底下一行是架构：写算子、判算子都不碰硬件，认硬件的只有 backend 这一层四件事，换一款芯片只补这一层，加一张硬件说明卡。</a:t>
             </a:r>
           </a:p>
           <a:p>
@@ -3855,7 +3855,7 @@
                 <a:ea typeface="Microsoft YaHei"/>
                 <a:cs typeface="Microsoft YaHei"/>
               </a:rPr>
-              <a:t>生成 M100 的 SDNN4 .xpu 内核，不是 CUDA；只有「生成」是 LLM，编译 / 对数值 / 测速都是确定性流程</a:t>
+              <a:t>写的是 M100 原生内核（SDNN4 .xpu），不是 CUDA；模型只管写，判它行不行的是一套固定流程</a:t>
             </a:r>
           </a:p>
         </p:txBody>
@@ -3902,7 +3902,7 @@
                 <a:ea typeface="Microsoft YaHei"/>
                 <a:cs typeface="Microsoft YaHei"/>
               </a:rPr>
-              <a:t>入口　</a:t>
+              <a:t>怎么起步　</a:t>
             </a:r>
             <a:r>
               <a:rPr sz="1050" b="0">
@@ -3913,7 +3913,7 @@
                 <a:ea typeface="Microsoft YaHei"/>
                 <a:cs typeface="Microsoft YaHei"/>
               </a:rPr>
-              <a:t>一句需求，或拿现有实现当第 0 轮基线　·　精度默认 8 轮收敛（可调），性能调优持续迭代</a:t>
+              <a:t>从一句需求开始，也可以拿现有实现当第 0 轮基线　·　先把精度收住（默认 8 轮），再持续抠性能</a:t>
             </a:r>
           </a:p>
         </p:txBody>
@@ -3983,24 +3983,35 @@
             <a:r>
               <a:rPr sz="1300" b="1">
                 <a:solidFill>
+                  <a:srgbClr val="16202A"/>
+                </a:solidFill>
+                <a:latin typeface="Microsoft YaHei"/>
+                <a:ea typeface="Microsoft YaHei"/>
+                <a:cs typeface="Microsoft YaHei"/>
+              </a:rPr>
+              <a:t>写算子</a:t>
+            </a:r>
+            <a:r>
+              <a:rPr sz="1000" b="0">
+                <a:solidFill>
                   <a:srgbClr val="C0612C"/>
                 </a:solidFill>
                 <a:latin typeface="Consolas"/>
                 <a:ea typeface="Microsoft YaHei"/>
                 <a:cs typeface="Microsoft YaHei"/>
               </a:rPr>
-              <a:t>agent/</a:t>
-            </a:r>
-            <a:r>
-              <a:rPr sz="1300" b="1">
-                <a:solidFill>
-                  <a:srgbClr val="16202A"/>
+              <a:t>　agent/</a:t>
+            </a:r>
+            <a:r>
+              <a:rPr sz="1100" b="0">
+                <a:solidFill>
+                  <a:srgbClr val="35424F"/>
                 </a:solidFill>
                 <a:latin typeface="Microsoft YaHei"/>
                 <a:ea typeface="Microsoft YaHei"/>
                 <a:cs typeface="Microsoft YaHei"/>
               </a:rPr>
-              <a:t>　只有这一个 LLM</a:t>
+              <a:t>　全流程只有这一个模型</a:t>
             </a:r>
           </a:p>
         </p:txBody>
@@ -4047,7 +4058,7 @@
                 <a:ea typeface="Microsoft YaHei"/>
                 <a:cs typeface="Microsoft YaHei"/>
               </a:rPr>
-              <a:t>0 确认门</a:t>
+              <a:t>先问清楚再动手</a:t>
             </a:r>
             <a:r>
               <a:rPr sz="1000" b="0">
@@ -4105,7 +4116,7 @@
                 <a:ea typeface="Microsoft YaHei"/>
                 <a:cs typeface="Microsoft YaHei"/>
               </a:rPr>
-              <a:t>动手前先问清需求，至少比两个方案</a:t>
+              <a:t>把需求问到没有歧义，至少比过两个方案</a:t>
             </a:r>
           </a:p>
         </p:txBody>
@@ -4152,7 +4163,7 @@
                 <a:ea typeface="Microsoft YaHei"/>
                 <a:cs typeface="Microsoft YaHei"/>
               </a:rPr>
-              <a:t>1 生成</a:t>
+              <a:t>照硬件说明卡写内核</a:t>
             </a:r>
             <a:r>
               <a:rPr sz="1000" b="0">
@@ -4210,7 +4221,7 @@
                 <a:ea typeface="Microsoft YaHei"/>
                 <a:cs typeface="Microsoft YaHei"/>
               </a:rPr>
-              <a:t>照硬件说明卡写出 .xpu 内核</a:t>
+              <a:t>说明卡写着这颗芯片有哪些单元、怎么用</a:t>
             </a:r>
           </a:p>
         </p:txBody>
@@ -4280,24 +4291,35 @@
             <a:r>
               <a:rPr sz="1300" b="1">
                 <a:solidFill>
+                  <a:srgbClr val="16202A"/>
+                </a:solidFill>
+                <a:latin typeface="Microsoft YaHei"/>
+                <a:ea typeface="Microsoft YaHei"/>
+                <a:cs typeface="Microsoft YaHei"/>
+              </a:rPr>
+              <a:t>判算子</a:t>
+            </a:r>
+            <a:r>
+              <a:rPr sz="1000" b="0">
+                <a:solidFill>
                   <a:srgbClr val="66727F"/>
                 </a:solidFill>
                 <a:latin typeface="Consolas"/>
                 <a:ea typeface="Microsoft YaHei"/>
                 <a:cs typeface="Microsoft YaHei"/>
               </a:rPr>
-              <a:t>harness/</a:t>
-            </a:r>
-            <a:r>
-              <a:rPr sz="1300" b="1">
-                <a:solidFill>
-                  <a:srgbClr val="16202A"/>
+              <a:t>　harness/</a:t>
+            </a:r>
+            <a:r>
+              <a:rPr sz="1100" b="0">
+                <a:solidFill>
+                  <a:srgbClr val="35424F"/>
                 </a:solidFill>
                 <a:latin typeface="Microsoft YaHei"/>
                 <a:ea typeface="Microsoft YaHei"/>
                 <a:cs typeface="Microsoft YaHei"/>
               </a:rPr>
-              <a:t>　确定性评测，不是 agent</a:t>
+              <a:t>　规则固定，模型说了不算</a:t>
             </a:r>
           </a:p>
         </p:txBody>
@@ -4336,6 +4358,17 @@
               </a:spcAft>
             </a:pPr>
             <a:r>
+              <a:rPr sz="950" b="0">
+                <a:solidFill>
+                  <a:srgbClr val="8C96A1"/>
+                </a:solidFill>
+                <a:latin typeface="Consolas"/>
+                <a:ea typeface="Microsoft YaHei"/>
+                <a:cs typeface="Microsoft YaHei"/>
+              </a:rPr>
+              <a:t>L0</a:t>
+            </a:r>
+            <a:r>
               <a:rPr sz="1150" b="1">
                 <a:solidFill>
                   <a:srgbClr val="16202A"/>
@@ -4344,7 +4377,7 @@
                 <a:ea typeface="Microsoft YaHei"/>
                 <a:cs typeface="Microsoft YaHei"/>
               </a:rPr>
-              <a:t>L0 编译</a:t>
+              <a:t>　能不能跑起来</a:t>
             </a:r>
             <a:r>
               <a:rPr sz="1050" b="0">
@@ -4355,7 +4388,7 @@
                 <a:ea typeface="Microsoft YaHei"/>
                 <a:cs typeface="Microsoft YaHei"/>
               </a:rPr>
-              <a:t>　编译并拉起，跑通才往下</a:t>
+              <a:t>　编译 + 拉起</a:t>
             </a:r>
           </a:p>
         </p:txBody>
@@ -4394,6 +4427,17 @@
               </a:spcAft>
             </a:pPr>
             <a:r>
+              <a:rPr sz="950" b="0">
+                <a:solidFill>
+                  <a:srgbClr val="8C96A1"/>
+                </a:solidFill>
+                <a:latin typeface="Consolas"/>
+                <a:ea typeface="Microsoft YaHei"/>
+                <a:cs typeface="Microsoft YaHei"/>
+              </a:rPr>
+              <a:t>L1</a:t>
+            </a:r>
+            <a:r>
               <a:rPr sz="1150" b="1">
                 <a:solidFill>
                   <a:srgbClr val="16202A"/>
@@ -4402,7 +4446,7 @@
                 <a:ea typeface="Microsoft YaHei"/>
                 <a:cs typeface="Microsoft YaHei"/>
               </a:rPr>
-              <a:t>L1 精度</a:t>
+              <a:t>　算得对不对</a:t>
             </a:r>
             <a:r>
               <a:rPr sz="1050" b="0">
@@ -4413,7 +4457,7 @@
                 <a:ea typeface="Microsoft YaHei"/>
                 <a:cs typeface="Microsoft YaHei"/>
               </a:rPr>
-              <a:t>　多形状多精度对 CPU golden</a:t>
+              <a:t>　多形状多精度对 CPU</a:t>
             </a:r>
           </a:p>
         </p:txBody>
@@ -4452,6 +4496,17 @@
               </a:spcAft>
             </a:pPr>
             <a:r>
+              <a:rPr sz="950" b="0">
+                <a:solidFill>
+                  <a:srgbClr val="8C96A1"/>
+                </a:solidFill>
+                <a:latin typeface="Consolas"/>
+                <a:ea typeface="Microsoft YaHei"/>
+                <a:cs typeface="Microsoft YaHei"/>
+              </a:rPr>
+              <a:t>bench</a:t>
+            </a:r>
+            <a:r>
               <a:rPr sz="1150" b="1">
                 <a:solidFill>
                   <a:srgbClr val="16202A"/>
@@ -4460,7 +4515,7 @@
                 <a:ea typeface="Microsoft YaHei"/>
                 <a:cs typeface="Microsoft YaHei"/>
               </a:rPr>
-              <a:t>bench 收益</a:t>
+              <a:t>　快了多少</a:t>
             </a:r>
             <a:r>
               <a:rPr sz="1050" b="0">
@@ -4471,7 +4526,7 @@
                 <a:ea typeface="Microsoft YaHei"/>
                 <a:cs typeface="Microsoft YaHei"/>
               </a:rPr>
-              <a:t>　真机答「快了多少」</a:t>
+              <a:t>　真机实测</a:t>
             </a:r>
           </a:p>
         </p:txBody>
@@ -4510,6 +4565,17 @@
               </a:spcAft>
             </a:pPr>
             <a:r>
+              <a:rPr sz="950" b="0">
+                <a:solidFill>
+                  <a:srgbClr val="8C96A1"/>
+                </a:solidFill>
+                <a:latin typeface="Consolas"/>
+                <a:ea typeface="Microsoft YaHei"/>
+                <a:cs typeface="Microsoft YaHei"/>
+              </a:rPr>
+              <a:t>profile</a:t>
+            </a:r>
+            <a:r>
               <a:rPr sz="1150" b="1">
                 <a:solidFill>
                   <a:srgbClr val="16202A"/>
@@ -4518,7 +4584,7 @@
                 <a:ea typeface="Microsoft YaHei"/>
                 <a:cs typeface="Microsoft YaHei"/>
               </a:rPr>
-              <a:t>profile 机制</a:t>
+              <a:t>　为什么慢</a:t>
             </a:r>
             <a:r>
               <a:rPr sz="1050" b="0">
@@ -4529,7 +4595,7 @@
                 <a:ea typeface="Microsoft YaHei"/>
                 <a:cs typeface="Microsoft YaHei"/>
               </a:rPr>
-              <a:t>　模拟器答「为什么慢」</a:t>
+              <a:t>　模拟器看卡在哪一步</a:t>
             </a:r>
           </a:p>
         </p:txBody>
@@ -4597,7 +4663,7 @@
                 <a:ea typeface="Microsoft YaHei"/>
                 <a:cs typeface="Microsoft YaHei"/>
               </a:rPr>
-              <a:t>机制看模拟器 · 收益看真机，以真机为准</a:t>
+              <a:t>原因看模拟器，收益只认真机</a:t>
             </a:r>
           </a:p>
         </p:txBody>
@@ -4694,7 +4760,7 @@
                 <a:ea typeface="Microsoft YaHei"/>
                 <a:cs typeface="Microsoft YaHei"/>
               </a:rPr>
-              <a:t>交出 .xpu 内核</a:t>
+              <a:t>把写好的内核交过去</a:t>
             </a:r>
           </a:p>
         </p:txBody>
@@ -4791,7 +4857,7 @@
                 <a:ea typeface="Microsoft YaHei"/>
                 <a:cs typeface="Microsoft YaHei"/>
               </a:rPr>
-              <a:t>结构化反馈：打分 + 模拟器机制证据，带进下一轮</a:t>
+              <a:t>把分数和「卡在哪」原样带回去，接着改下一轮</a:t>
             </a:r>
           </a:p>
         </p:txBody>
@@ -4865,22 +4931,22 @@
                 <a:solidFill>
                   <a:srgbClr val="16202A"/>
                 </a:solidFill>
+                <a:latin typeface="Microsoft YaHei"/>
+                <a:ea typeface="Microsoft YaHei"/>
+                <a:cs typeface="Microsoft YaHei"/>
+              </a:rPr>
+              <a:t>认硬件的只有这一层：编译 · 运行 · 采性能 · 算理论上限</a:t>
+            </a:r>
+            <a:r>
+              <a:rPr sz="1000" b="0">
+                <a:solidFill>
+                  <a:srgbClr val="66727F"/>
+                </a:solidFill>
                 <a:latin typeface="Consolas"/>
                 <a:ea typeface="Microsoft YaHei"/>
                 <a:cs typeface="Microsoft YaHei"/>
               </a:rPr>
-              <a:t>backend/</a:t>
-            </a:r>
-            <a:r>
-              <a:rPr sz="1050" b="1">
-                <a:solidFill>
-                  <a:srgbClr val="16202A"/>
-                </a:solidFill>
-                <a:latin typeface="Microsoft YaHei"/>
-                <a:ea typeface="Microsoft YaHei"/>
-                <a:cs typeface="Microsoft YaHei"/>
-              </a:rPr>
-              <a:t>　唯一的耦合层：编译 · 运行 · 采性能 · 理论上限</a:t>
+              <a:t>　backend/</a:t>
             </a:r>
           </a:p>
           <a:p>
@@ -4904,7 +4970,7 @@
                 <a:ea typeface="Microsoft YaHei"/>
                 <a:cs typeface="Microsoft YaHei"/>
               </a:rPr>
-              <a:t>换芯片只写一个后端 + 一张硬件说明卡，agent/ 与 harness/ 零改动</a:t>
+              <a:t>换一款芯片只补这一层，上面写算子、判算子的流程一行不改</a:t>
             </a:r>
           </a:p>
         </p:txBody>
@@ -5005,7 +5071,7 @@
         <p:spPr>
           <a:xfrm>
             <a:off x="8558784" y="2706624"/>
-            <a:ext cx="2846527" cy="896112"/>
+            <a:ext cx="2846527" cy="810768"/>
           </a:xfrm>
           <a:prstGeom prst="rect">
             <a:avLst/>
@@ -5036,7 +5102,7 @@
         <p:spPr>
           <a:xfrm>
             <a:off x="8723376" y="2706624"/>
-            <a:ext cx="2517343" cy="896112"/>
+            <a:ext cx="2517343" cy="810768"/>
           </a:xfrm>
           <a:prstGeom prst="rect">
             <a:avLst/>
@@ -5130,8 +5196,8 @@
         </p:nvSpPr>
         <p:spPr>
           <a:xfrm>
-            <a:off x="8558784" y="3712464"/>
-            <a:ext cx="2846527" cy="896112"/>
+            <a:off x="8558784" y="3627120"/>
+            <a:ext cx="2846527" cy="810768"/>
           </a:xfrm>
           <a:prstGeom prst="rect">
             <a:avLst/>
@@ -5161,8 +5227,8 @@
         </p:nvSpPr>
         <p:spPr>
           <a:xfrm>
-            <a:off x="8723376" y="3712464"/>
-            <a:ext cx="2517343" cy="896112"/>
+            <a:off x="8723376" y="3627120"/>
+            <a:ext cx="2517343" cy="810768"/>
           </a:xfrm>
           <a:prstGeom prst="rect">
             <a:avLst/>
@@ -5243,7 +5309,7 @@
                 <a:ea typeface="Microsoft YaHei"/>
                 <a:cs typeface="Microsoft YaHei"/>
               </a:rPr>
-              <a:t>741.2 → 595.6</a:t>
+              <a:t>延迟 741.2 → 595.6</a:t>
             </a:r>
           </a:p>
         </p:txBody>
@@ -5256,8 +5322,8 @@
         </p:nvSpPr>
         <p:spPr>
           <a:xfrm>
-            <a:off x="8558784" y="4718304"/>
-            <a:ext cx="2846527" cy="640080"/>
+            <a:off x="8558784" y="4547616"/>
+            <a:ext cx="2846527" cy="810768"/>
           </a:xfrm>
           <a:prstGeom prst="rect">
             <a:avLst/>
@@ -5287,8 +5353,8 @@
         </p:nvSpPr>
         <p:spPr>
           <a:xfrm>
-            <a:off x="8723376" y="4718304"/>
-            <a:ext cx="2517343" cy="640080"/>
+            <a:off x="8723376" y="4547616"/>
+            <a:ext cx="2517343" cy="810768"/>
           </a:xfrm>
           <a:prstGeom prst="rect">
             <a:avLst/>
@@ -5348,6 +5414,30 @@
               <a:t>0.47 → 0.58</a:t>
             </a:r>
           </a:p>
+          <a:p>
+            <a:pPr algn="l" latinLnBrk="0">
+              <a:lnSpc>
+                <a:spcPct val="100000"/>
+              </a:lnSpc>
+              <a:spcBef>
+                <a:spcPts val="200"/>
+              </a:spcBef>
+              <a:spcAft>
+                <a:spcPts val="0"/>
+              </a:spcAft>
+            </a:pPr>
+            <a:r>
+              <a:rPr sz="950" b="0">
+                <a:solidFill>
+                  <a:srgbClr val="8C96A1"/>
+                </a:solidFill>
+                <a:latin typeface="Microsoft YaHei"/>
+                <a:ea typeface="Microsoft YaHei"/>
+                <a:cs typeface="Microsoft YaHei"/>
+              </a:rPr>
+              <a:t>越接近 1，硬件越被榨干</a:t>
+            </a:r>
+          </a:p>
         </p:txBody>
       </p:sp>
       <p:sp>
@@ -5392,7 +5482,7 @@
                 <a:ea typeface="Microsoft YaHei"/>
                 <a:cs typeface="Microsoft YaHei"/>
               </a:rPr>
-              <a:t>单算子实测，尚无规模化达标统计；口径为真机、生产形状</a:t>
+              <a:t>目前是单算子的实测样例，还没有成规模的达标统计；数字都来自真机、生产形状</a:t>
             </a:r>
           </a:p>
         </p:txBody>

--- a/slides/xpugen_operator_agent.pptx
+++ b/slides/xpugen_operator_agent.pptx
@@ -515,7 +515,7 @@
                 <a:ea typeface="Microsoft YaHei"/>
                 <a:cs typeface="Microsoft YaHei"/>
               </a:rPr>
-              <a:t>【附页 · xpugen · 约 130 秒（2:10）】</a:t>
+              <a:t>【附页 · xpugen · 约 135 秒（2:15）】</a:t>
             </a:r>
           </a:p>
           <a:p>
@@ -533,7 +533,7 @@
                 <a:ea typeface="Microsoft YaHei"/>
                 <a:cs typeface="Microsoft YaHei"/>
               </a:rPr>
-              <a:t>这一页是另一个仓库 xpugen：给国产 GPU 写算子的 Agent。它生成的是 M100 的 SDNN4 内核，不是 CUDA；CUDA、Triton、torch 只当算法参考和基线。</a:t>
+              <a:t>这一页是另一个仓库 xpugen：给国产 GPU 写算子的 Agent。它生成的是 M100 的 SDNN4 内核，不是 CUDA；CUDA、Triton、torch 只作算法参考与基线。</a:t>
             </a:r>
           </a:p>
           <a:p>
@@ -551,7 +551,7 @@
                 <a:ea typeface="Microsoft YaHei"/>
                 <a:cs typeface="Microsoft YaHei"/>
               </a:rPr>
-              <a:t>先说清结构：左边写算子，右边判算子。会「猜」的只有左边这一个模型，右边从编译到测速每一步都是写死的规则，行不行轮不到模型自己说。</a:t>
+              <a:t>先说清结构：左边写算子，右边判算子。整条链路里只有左边这一个模型；右边从编译到测速都是固定规则，合不合格由规则判定，不由模型自己说。</a:t>
             </a:r>
           </a:p>
           <a:p>
@@ -569,7 +569,7 @@
                 <a:ea typeface="Microsoft YaHei"/>
                 <a:cs typeface="Microsoft YaHei"/>
               </a:rPr>
-              <a:t>左边动手之前还有一道门：先把需求问到没有歧义、至少比过两个方案，才允许写内核。起步有两条路，从一句需求开始，或者从现有实现反推出规格，第 0 轮直接拿它当基线。</a:t>
+              <a:t>左边在生成之前还有一道确认门：需求澄清到没有歧义、至少比选两个方案，才允许写内核。起步有两条路径：从一句需求开始，或者从现有实现反推出规格，第 0 轮直接以它为基线。</a:t>
             </a:r>
           </a:p>
           <a:p>
@@ -587,7 +587,7 @@
                 <a:ea typeface="Microsoft YaHei"/>
                 <a:cs typeface="Microsoft YaHei"/>
               </a:rPr>
-              <a:t>右边是一级级往上问：能不能跑起来、算得对不对、快了多少、为什么慢。快了多少只认真机；为什么慢才看模拟器，它能看到逐个单元的忙闲和跨引擎的并行，两边对不上以真机为准。</a:t>
+              <a:t>右边逐级验证：能否编译运行、数值是否正确、提速多少、瓶颈在哪。提速只认真机实测；瓶颈分析才用模拟器，它能看到逐个单元的忙闲和跨引擎并行，两者不一致时以真机为准。</a:t>
             </a:r>
           </a:p>
           <a:p>
@@ -605,7 +605,7 @@
                 <a:ea typeface="Microsoft YaHei"/>
                 <a:cs typeface="Microsoft YaHei"/>
               </a:rPr>
-              <a:t>判完的分数和卡在哪原样回传给左边，接着改下一轮：精度默认八轮收敛，性能调优是持续迭代，连着五十轮没进展才敢说卡住了。</a:t>
+              <a:t>评测结论和瓶颈定位原样回传给左边，进入下一轮：精度默认八轮收敛，性能调优则持续迭代，连续五十轮没有进展才下停滞结论。</a:t>
             </a:r>
           </a:p>
           <a:p>
@@ -623,7 +623,7 @@
                 <a:ea typeface="Microsoft YaHei"/>
                 <a:cs typeface="Microsoft YaHei"/>
               </a:rPr>
-              <a:t>底下一行是架构：写算子、判算子都不碰硬件，认硬件的只有 backend 这一层四件事，换一款芯片只补这一层，加一张硬件说明卡。</a:t>
+              <a:t>底下一行是架构：写算子和判算子都不碰硬件，与硬件耦合的只有 backend 这一层四件事；更换芯片只需补齐这一层，再加一张硬件说明卡。</a:t>
             </a:r>
           </a:p>
           <a:p>
@@ -641,7 +641,7 @@
                 <a:ea typeface="Microsoft YaHei"/>
                 <a:cs typeface="Microsoft YaHei"/>
               </a:rPr>
-              <a:t>右边是目前的实测，还在样例阶段：验证过四个算子，rmsnorm 相对基线一点二四倍，理论上限达成率从零点四七提到零点五八。规模化的达标统计还没有，所以这里不报聚合数字。</a:t>
+              <a:t>右边是目前的实测，仍处在样例阶段：验证过四个算子，rmsnorm 相对基线一点二四倍，理论上限达成率从零点四七提到零点五八。规模化的达标统计还没有，所以这里不报聚合指标。</a:t>
             </a:r>
           </a:p>
           <a:p>
@@ -677,7 +677,7 @@
                 <a:ea typeface="Microsoft YaHei"/>
                 <a:cs typeface="Microsoft YaHei"/>
               </a:rPr>
-              <a:t>轮数口径：max_turns 默认 8、--max-turns 可改，管的是过 L1 精度的收敛上限；性能调优不设 8 轮上限，铁律是连续 50 轮没有进展才允许下 stalled 结论。</a:t>
+              <a:t>轮数口径：max_turns 默认 8、--max-turns 可调，对应的是 L1 精度的收敛上限；性能调优不设 8 轮上限，铁律是连续 50 轮没有进展才允许下 stalled 结论。</a:t>
             </a:r>
           </a:p>
           <a:p>
@@ -3855,7 +3855,7 @@
                 <a:ea typeface="Microsoft YaHei"/>
                 <a:cs typeface="Microsoft YaHei"/>
               </a:rPr>
-              <a:t>写的是 M100 原生内核（SDNN4 .xpu），不是 CUDA；模型只管写，判它行不行的是一套固定流程</a:t>
+              <a:t>生成 M100 原生内核（SDNN4 .xpu），不是 CUDA；模型只负责生成，是否合格由固定流程判定</a:t>
             </a:r>
           </a:p>
         </p:txBody>
@@ -3902,7 +3902,7 @@
                 <a:ea typeface="Microsoft YaHei"/>
                 <a:cs typeface="Microsoft YaHei"/>
               </a:rPr>
-              <a:t>怎么起步　</a:t>
+              <a:t>起步　</a:t>
             </a:r>
             <a:r>
               <a:rPr sz="1050" b="0">
@@ -3913,7 +3913,7 @@
                 <a:ea typeface="Microsoft YaHei"/>
                 <a:cs typeface="Microsoft YaHei"/>
               </a:rPr>
-              <a:t>从一句需求开始，也可以拿现有实现当第 0 轮基线　·　先把精度收住（默认 8 轮），再持续抠性能</a:t>
+              <a:t>可从一句需求开始，也可以现有实现作为第 0 轮基线　·　精度优先（默认 8 轮收敛），再迭代压榨性能</a:t>
             </a:r>
           </a:p>
         </p:txBody>
@@ -4011,7 +4011,7 @@
                 <a:ea typeface="Microsoft YaHei"/>
                 <a:cs typeface="Microsoft YaHei"/>
               </a:rPr>
-              <a:t>　全流程只有这一个模型</a:t>
+              <a:t>　全流程唯一的模型</a:t>
             </a:r>
           </a:p>
         </p:txBody>
@@ -4024,7 +4024,7 @@
         </p:nvSpPr>
         <p:spPr>
           <a:xfrm>
-            <a:off x="768096" y="3218687"/>
+            <a:off x="768096" y="3090672"/>
             <a:ext cx="2990088" cy="274320"/>
           </a:xfrm>
           <a:prstGeom prst="rect">
@@ -4058,7 +4058,7 @@
                 <a:ea typeface="Microsoft YaHei"/>
                 <a:cs typeface="Microsoft YaHei"/>
               </a:rPr>
-              <a:t>先问清楚再动手</a:t>
+              <a:t>先确认，后生成</a:t>
             </a:r>
             <a:r>
               <a:rPr sz="1000" b="0">
@@ -4082,7 +4082,7 @@
         </p:nvSpPr>
         <p:spPr>
           <a:xfrm>
-            <a:off x="768096" y="3493007"/>
+            <a:off x="768096" y="3364991"/>
             <a:ext cx="2990088" cy="256032"/>
           </a:xfrm>
           <a:prstGeom prst="rect">
@@ -4116,7 +4116,7 @@
                 <a:ea typeface="Microsoft YaHei"/>
                 <a:cs typeface="Microsoft YaHei"/>
               </a:rPr>
-              <a:t>把需求问到没有歧义，至少比过两个方案</a:t>
+              <a:t>需求澄清到无歧义，至少比选两个方案</a:t>
             </a:r>
           </a:p>
         </p:txBody>
@@ -4129,7 +4129,7 @@
         </p:nvSpPr>
         <p:spPr>
           <a:xfrm>
-            <a:off x="768096" y="4041648"/>
+            <a:off x="768096" y="4005072"/>
             <a:ext cx="2990088" cy="274320"/>
           </a:xfrm>
           <a:prstGeom prst="rect">
@@ -4163,7 +4163,7 @@
                 <a:ea typeface="Microsoft YaHei"/>
                 <a:cs typeface="Microsoft YaHei"/>
               </a:rPr>
-              <a:t>照硬件说明卡写内核</a:t>
+              <a:t>依硬件说明卡生成内核</a:t>
             </a:r>
             <a:r>
               <a:rPr sz="1000" b="0">
@@ -4187,7 +4187,7 @@
         </p:nvSpPr>
         <p:spPr>
           <a:xfrm>
-            <a:off x="768096" y="4315968"/>
+            <a:off x="768096" y="4279392"/>
             <a:ext cx="2990088" cy="256032"/>
           </a:xfrm>
           <a:prstGeom prst="rect">
@@ -4221,7 +4221,7 @@
                 <a:ea typeface="Microsoft YaHei"/>
                 <a:cs typeface="Microsoft YaHei"/>
               </a:rPr>
-              <a:t>说明卡写着这颗芯片有哪些单元、怎么用</a:t>
+              <a:t>说明卡列明该芯片的计算单元与用法</a:t>
             </a:r>
           </a:p>
         </p:txBody>
@@ -4319,7 +4319,7 @@
                 <a:ea typeface="Microsoft YaHei"/>
                 <a:cs typeface="Microsoft YaHei"/>
               </a:rPr>
-              <a:t>　规则固定，模型说了不算</a:t>
+              <a:t>　客观评测，由规则决定</a:t>
             </a:r>
           </a:p>
         </p:txBody>
@@ -4377,7 +4377,7 @@
                 <a:ea typeface="Microsoft YaHei"/>
                 <a:cs typeface="Microsoft YaHei"/>
               </a:rPr>
-              <a:t>　能不能跑起来</a:t>
+              <a:t>　能否编译运行</a:t>
             </a:r>
             <a:r>
               <a:rPr sz="1050" b="0">
@@ -4388,7 +4388,7 @@
                 <a:ea typeface="Microsoft YaHei"/>
                 <a:cs typeface="Microsoft YaHei"/>
               </a:rPr>
-              <a:t>　编译 + 拉起</a:t>
+              <a:t>　编译并启动，失败即返工</a:t>
             </a:r>
           </a:p>
         </p:txBody>
@@ -4446,7 +4446,7 @@
                 <a:ea typeface="Microsoft YaHei"/>
                 <a:cs typeface="Microsoft YaHei"/>
               </a:rPr>
-              <a:t>　算得对不对</a:t>
+              <a:t>　数值是否正确</a:t>
             </a:r>
             <a:r>
               <a:rPr sz="1050" b="0">
@@ -4457,7 +4457,7 @@
                 <a:ea typeface="Microsoft YaHei"/>
                 <a:cs typeface="Microsoft YaHei"/>
               </a:rPr>
-              <a:t>　多形状多精度对 CPU</a:t>
+              <a:t>　多形状多精度对照 CPU</a:t>
             </a:r>
           </a:p>
         </p:txBody>
@@ -4515,7 +4515,7 @@
                 <a:ea typeface="Microsoft YaHei"/>
                 <a:cs typeface="Microsoft YaHei"/>
               </a:rPr>
-              <a:t>　快了多少</a:t>
+              <a:t>　提速多少</a:t>
             </a:r>
             <a:r>
               <a:rPr sz="1050" b="0">
@@ -4584,7 +4584,7 @@
                 <a:ea typeface="Microsoft YaHei"/>
                 <a:cs typeface="Microsoft YaHei"/>
               </a:rPr>
-              <a:t>　为什么慢</a:t>
+              <a:t>　瓶颈在哪</a:t>
             </a:r>
             <a:r>
               <a:rPr sz="1050" b="0">
@@ -4595,7 +4595,7 @@
                 <a:ea typeface="Microsoft YaHei"/>
                 <a:cs typeface="Microsoft YaHei"/>
               </a:rPr>
-              <a:t>　模拟器看卡在哪一步</a:t>
+              <a:t>　模拟器定位到具体环节</a:t>
             </a:r>
           </a:p>
         </p:txBody>
@@ -4663,7 +4663,7 @@
                 <a:ea typeface="Microsoft YaHei"/>
                 <a:cs typeface="Microsoft YaHei"/>
               </a:rPr>
-              <a:t>原因看模拟器，收益只认真机</a:t>
+              <a:t>机制分析用模拟器，收益以真机为准</a:t>
             </a:r>
           </a:p>
         </p:txBody>
@@ -4760,7 +4760,7 @@
                 <a:ea typeface="Microsoft YaHei"/>
                 <a:cs typeface="Microsoft YaHei"/>
               </a:rPr>
-              <a:t>把写好的内核交过去</a:t>
+              <a:t>交付生成的内核</a:t>
             </a:r>
           </a:p>
         </p:txBody>
@@ -4857,7 +4857,7 @@
                 <a:ea typeface="Microsoft YaHei"/>
                 <a:cs typeface="Microsoft YaHei"/>
               </a:rPr>
-              <a:t>把分数和「卡在哪」原样带回去，接着改下一轮</a:t>
+              <a:t>评测结论与瓶颈定位原样回传，进入下一轮</a:t>
             </a:r>
           </a:p>
         </p:txBody>
@@ -4935,7 +4935,7 @@
                 <a:ea typeface="Microsoft YaHei"/>
                 <a:cs typeface="Microsoft YaHei"/>
               </a:rPr>
-              <a:t>认硬件的只有这一层：编译 · 运行 · 采性能 · 算理论上限</a:t>
+              <a:t>与硬件耦合的只有这一层：编译 · 运行 · 性能采集 · 理论上限</a:t>
             </a:r>
             <a:r>
               <a:rPr sz="1000" b="0">
@@ -4970,7 +4970,7 @@
                 <a:ea typeface="Microsoft YaHei"/>
                 <a:cs typeface="Microsoft YaHei"/>
               </a:rPr>
-              <a:t>换一款芯片只补这一层，上面写算子、判算子的流程一行不改</a:t>
+              <a:t>更换芯片只需补齐这一层，生成与评测流程无需改动</a:t>
             </a:r>
           </a:p>
         </p:txBody>
@@ -5435,7 +5435,7 @@
                 <a:ea typeface="Microsoft YaHei"/>
                 <a:cs typeface="Microsoft YaHei"/>
               </a:rPr>
-              <a:t>越接近 1，硬件越被榨干</a:t>
+              <a:t>越接近 1，硬件利用越充分</a:t>
             </a:r>
           </a:p>
         </p:txBody>
@@ -5482,7 +5482,7 @@
                 <a:ea typeface="Microsoft YaHei"/>
                 <a:cs typeface="Microsoft YaHei"/>
               </a:rPr>
-              <a:t>目前是单算子的实测样例，还没有成规模的达标统计；数字都来自真机、生产形状</a:t>
+              <a:t>当前为单算子实测样例，尚无规模化达标统计；数据均取自真机、生产形状</a:t>
             </a:r>
           </a:p>
         </p:txBody>
